--- a/Planning docs/Slides/lesson-5-1-teacher-slides.pptx
+++ b/Planning docs/Slides/lesson-5-1-teacher-slides.pptx
@@ -20,9 +20,10 @@
     <p:sldId id="268" r:id="rId14"/>
     <p:sldId id="269" r:id="rId15"/>
     <p:sldId id="270" r:id="rId16"/>
+    <p:sldId id="271" r:id="rId17"/>
   </p:sldIdLst>
   <p:notesMasterIdLst>
-    <p:notesMasterId r:id="rId17"/>
+    <p:notesMasterId r:id="rId18"/>
   </p:notesMasterIdLst>
   <p:sldSz cx="9144000" cy="5143500"/>
   <p:notesSz cx="5143500" cy="9144000"/>
@@ -516,7 +517,7 @@
           <a:p>
             <a:r>
               <a:rPr lang="en-US" dirty="0"/>
-              <a:t>Title slide for Week 5 Day 1. Review Week.</a:t>
+              <a:t>Lesson 5.1. Reading: Whole Book Summary.</a:t>
             </a:r>
             <a:endParaRPr lang="en-US" dirty="0"/>
           </a:p>
@@ -604,7 +605,7 @@
           <a:p>
             <a:r>
               <a:rPr lang="en-US" dirty="0"/>
-              <a:t>Review morphology focus. Have students identify the base word and affix in each example.</a:t>
+              <a:t>Each word appears in the chapters read this week, in the author’s own sentence.</a:t>
             </a:r>
             <a:endParaRPr lang="en-US" dirty="0"/>
           </a:p>
@@ -692,7 +693,7 @@
           <a:p>
             <a:r>
               <a:rPr lang="en-US" dirty="0"/>
-              <a:t>Go through each vocabulary word. For flip cards, have students guess the definition before revealing.</a:t>
+              <a:t>Answers: walked, helped, jumped, landed</a:t>
             </a:r>
             <a:endParaRPr lang="en-US" dirty="0"/>
           </a:p>
@@ -780,7 +781,7 @@
           <a:p>
             <a:r>
               <a:rPr lang="en-US" dirty="0"/>
-              <a:t>Give students time to sort the words. Use the chat or paper to organize.</a:t>
+              <a:t>Answers: walked, helped, jumped, landed</a:t>
             </a:r>
             <a:endParaRPr lang="en-US" dirty="0"/>
           </a:p>
@@ -868,7 +869,7 @@
           <a:p>
             <a:r>
               <a:rPr lang="en-US" dirty="0"/>
-              <a:t>Review each column. Ask: what pattern do you see in each group?</a:t>
+              <a:t>ed=/t/: walked, jumped, helped | ed=/d/: called, played, mailed | ed=/ĕd/: wanted, landed</a:t>
             </a:r>
             <a:endParaRPr lang="en-US" dirty="0"/>
           </a:p>
@@ -956,7 +957,7 @@
           <a:p>
             <a:r>
               <a:rPr lang="en-US" dirty="0"/>
-              <a:t>Reading focus slide. Use pause-and-think questions during reading. Copywork can be done after reading.</a:t>
+              <a:t>ed=/t/: walked, jumped, helped | ed=/d/: called, played, mailed | ed=/ĕd/: wanted, landed</a:t>
             </a:r>
             <a:endParaRPr lang="en-US" dirty="0"/>
           </a:p>
@@ -1044,7 +1045,7 @@
           <a:p>
             <a:r>
               <a:rPr lang="en-US" dirty="0"/>
-              <a:t>Transition to the writing workshop assignment in Canvas.</a:t>
+              <a:t>Read the chapters, then return to the pause questions.</a:t>
             </a:r>
             <a:endParaRPr lang="en-US" dirty="0"/>
           </a:p>
@@ -1068,6 +1069,94 @@
             <a:fld id="{F7021451-1387-4CA6-816F-3879F97B5CBC}" type="slidenum">
               <a:rPr lang="en-US"/>
               <a:t>15</a:t>
+            </a:fld>
+            <a:endParaRPr lang="en-US"/>
+          </a:p>
+        </p:txBody>
+      </p:sp>
+    </p:spTree>
+    <p:extLst>
+      <p:ext uri="{BB962C8B-B14F-4D97-AF65-F5344CB8AC3E}">
+        <p14:creationId xmlns:p14="http://schemas.microsoft.com/office/powerpoint/2010/main" val="1024086991"/>
+      </p:ext>
+    </p:extLst>
+  </p:cSld>
+  <p:clrMapOvr>
+    <a:masterClrMapping/>
+  </p:clrMapOvr>
+</p:notes>
+</file>
+
+<file path=ppt/notesSlides/notesSlide16.xml><?xml version="1.0" encoding="utf-8"?>
+<p:notes xmlns:a="http://schemas.openxmlformats.org/drawingml/2006/main" xmlns:r="http://schemas.openxmlformats.org/officeDocument/2006/relationships" xmlns:p="http://schemas.openxmlformats.org/presentationml/2006/main">
+  <p:cSld>
+    <p:spTree>
+      <p:nvGrpSpPr>
+        <p:cNvPr id="1" name=""/>
+        <p:cNvGrpSpPr/>
+        <p:nvPr/>
+      </p:nvGrpSpPr>
+      <p:grpSpPr>
+        <a:xfrm>
+          <a:off x="0" y="0"/>
+          <a:ext cx="0" cy="0"/>
+          <a:chOff x="0" y="0"/>
+          <a:chExt cx="0" cy="0"/>
+        </a:xfrm>
+      </p:grpSpPr>
+      <p:sp>
+        <p:nvSpPr>
+          <p:cNvPr id="2" name="Slide Image Placeholder 1"/>
+          <p:cNvSpPr>
+            <a:spLocks noGrp="1" noRot="1" noChangeAspect="1"/>
+          </p:cNvSpPr>
+          <p:nvPr>
+            <p:ph type="sldImg"/>
+          </p:nvPr>
+        </p:nvSpPr>
+        <p:spPr/>
+      </p:sp>
+      <p:sp>
+        <p:nvSpPr>
+          <p:cNvPr id="3" name="Notes Placeholder 2"/>
+          <p:cNvSpPr>
+            <a:spLocks noGrp="1"/>
+          </p:cNvSpPr>
+          <p:nvPr>
+            <p:ph type="body" idx="1"/>
+          </p:nvPr>
+        </p:nvSpPr>
+        <p:spPr/>
+        <p:txBody>
+          <a:bodyPr/>
+          <a:lstStyle/>
+          <a:p>
+            <a:r>
+              <a:rPr lang="en-US" dirty="0"/>
+              <a:t>Writer’s Workshop stage for the week.</a:t>
+            </a:r>
+            <a:endParaRPr lang="en-US" dirty="0"/>
+          </a:p>
+        </p:txBody>
+      </p:sp>
+      <p:sp>
+        <p:nvSpPr>
+          <p:cNvPr id="4" name="Slide Number Placeholder 3"/>
+          <p:cNvSpPr>
+            <a:spLocks noGrp="1"/>
+          </p:cNvSpPr>
+          <p:nvPr>
+            <p:ph type="sldNum" sz="quarter" idx="10"/>
+          </p:nvPr>
+        </p:nvSpPr>
+        <p:spPr/>
+        <p:txBody>
+          <a:bodyPr/>
+          <a:lstStyle/>
+          <a:p>
+            <a:fld id="{F7021451-1387-4CA6-816F-3879F97B5CBC}" type="slidenum">
+              <a:rPr lang="en-US"/>
+              <a:t>16</a:t>
             </a:fld>
             <a:endParaRPr lang="en-US"/>
           </a:p>
@@ -1132,7 +1221,7 @@
           <a:p>
             <a:r>
               <a:rPr lang="en-US" dirty="0"/>
-              <a:t>Read the prompt aloud once. Give students about 1 minute to read it again silently and think. Remind them: there is no wrong answer — just write what comes to mind. Advance to the writing slide when ready.</a:t>
+              <a:t>Read the prompt aloud. Give students a moment to think before writing.</a:t>
             </a:r>
             <a:endParaRPr lang="en-US" dirty="0"/>
           </a:p>
@@ -1220,7 +1309,7 @@
           <a:p>
             <a:r>
               <a:rPr lang="en-US" dirty="0"/>
-              <a:t>Set a 5-minute timer. Walk the room quietly. If a student stops, gently encourage them: "Keep writing — even one more sentence." The goal is sustained writing, not perfection. Do not interrupt to correct spelling or grammar during this time.</a:t>
+              <a:t>Five minutes of sustained writing. Stamina over polish. Do not correct spelling now.</a:t>
             </a:r>
             <a:endParaRPr lang="en-US" dirty="0"/>
           </a:p>
@@ -1308,7 +1397,7 @@
           <a:p>
             <a:r>
               <a:rPr lang="en-US" dirty="0"/>
-              <a:t>Set a 1-minute timer. Remind students: we are only fixing ONE thing today — Did I include other people's reactions, not just Stanley's?. They should also do a quick conventions check (capitals, punctuation, spelling). They do NOT need to rewrite — just fix and improve. Revision = improving ideas; Editing = fixing conventions. Keep them separate in your language.</a:t>
+              <a:t>One fix only. Editing is conventions; revision is ideas. Name which one you are asking for.</a:t>
             </a:r>
             <a:endParaRPr lang="en-US" dirty="0"/>
           </a:p>
@@ -1396,7 +1485,7 @@
           <a:p>
             <a:r>
               <a:rPr lang="en-US" dirty="0"/>
-              <a:t>Call on 3-5 students to share. Respond with genuine interest: "I love how you described that" or "That's a really interesting idea." Avoid correcting grammar or spelling during share time — this is about celebrating writing. If time is short, have 2-3 students share in chat instead.</a:t>
+              <a:t>Two or three volunteers. Praise something specific in each.</a:t>
             </a:r>
             <a:endParaRPr lang="en-US" dirty="0"/>
           </a:p>
@@ -1484,7 +1573,7 @@
           <a:p>
             <a:r>
               <a:rPr lang="en-US" dirty="0"/>
-              <a:t>Review the big question and reading lens with students before reading.</a:t>
+              <a:t>Reading lens: Good readers summarize when they finish a story. A summary retells only the most important events, in the order they happened. It leaves out the small details, no matter how funny they were.</a:t>
             </a:r>
             <a:endParaRPr lang="en-US" dirty="0"/>
           </a:p>
@@ -1572,7 +1661,8 @@
           <a:p>
             <a:r>
               <a:rPr lang="en-US" dirty="0"/>
-              <a:t>Read the model sentence aloud. Ask students: what do you notice about the punctuation and capitalization?</a:t>
+              <a:t>Corrected: Corrected: 
+Look for: The Chief of Police called Mr. Lambchop the next morning and thanked Stanley for catching the thieves .</a:t>
             </a:r>
             <a:endParaRPr lang="en-US" dirty="0"/>
           </a:p>
@@ -1660,7 +1750,8 @@
           <a:p>
             <a:r>
               <a:rPr lang="en-US" dirty="0"/>
-              <a:t>Give students 1-2 minutes to fix the sentence. Walk the room and check.</a:t>
+              <a:t>Corrected: Corrected: 
+Look for: The Chief of Police called Mr. Lambchop the next morning and thanked Stanley for catching the thieves .</a:t>
             </a:r>
             <a:endParaRPr lang="en-US" dirty="0"/>
           </a:p>
@@ -1748,7 +1839,7 @@
           <a:p>
             <a:r>
               <a:rPr lang="en-US" dirty="0"/>
-              <a:t>Reveal the corrected version. Point out each fix: capitalization, punctuation, spelling.</a:t>
+              <a:t>Break the word into base + word part. Ask what the part adds to the meaning.</a:t>
             </a:r>
             <a:endParaRPr lang="en-US" dirty="0"/>
           </a:p>
@@ -2103,7 +2194,7 @@
     <p:bg>
       <p:bgPr>
         <a:solidFill>
-          <a:srgbClr val="4A4A6A"/>
+          <a:srgbClr val="0E1C42"/>
         </a:solidFill>
       </p:bgPr>
     </p:bg>
@@ -2129,8 +2220,8 @@
         </p:nvSpPr>
         <p:spPr>
           <a:xfrm>
-            <a:off x="457200" y="914400"/>
-            <a:ext cx="8229600" cy="1097280"/>
+            <a:off x="0" y="822960"/>
+            <a:ext cx="9144000" cy="822960"/>
           </a:xfrm>
           <a:prstGeom prst="rect">
             <a:avLst/>
@@ -2146,7 +2237,43 @@
               <a:buNone/>
             </a:pPr>
             <a:r>
-              <a:rPr lang="en-US" sz="4000" b="1" dirty="0">
+              <a:rPr lang="en-US" sz="5200" dirty="0">
+                <a:solidFill>
+                  <a:srgbClr val="000000"/>
+                </a:solidFill>
+              </a:rPr>
+              <a:t>⭐</a:t>
+            </a:r>
+            <a:endParaRPr lang="en-US" sz="5200" dirty="0"/>
+          </a:p>
+        </p:txBody>
+      </p:sp>
+      <p:sp>
+        <p:nvSpPr>
+          <p:cNvPr id="3" name="Text 1"/>
+          <p:cNvSpPr/>
+          <p:nvPr/>
+        </p:nvSpPr>
+        <p:spPr>
+          <a:xfrm>
+            <a:off x="457200" y="1691640"/>
+            <a:ext cx="8229600" cy="566928"/>
+          </a:xfrm>
+          <a:prstGeom prst="rect">
+            <a:avLst/>
+          </a:prstGeom>
+          <a:noFill/>
+          <a:ln/>
+        </p:spPr>
+        <p:txBody>
+          <a:bodyPr wrap="square" lIns="0" tIns="0" rIns="0" bIns="0" rtlCol="0" anchor="ctr"/>
+          <a:lstStyle/>
+          <a:p>
+            <a:pPr algn="ctr" indent="0" marL="0">
+              <a:buNone/>
+            </a:pPr>
+            <a:r>
+              <a:rPr lang="en-US" sz="3400" b="1" dirty="0">
                 <a:solidFill>
                   <a:srgbClr val="FFFFFF"/>
                 </a:solidFill>
@@ -2154,22 +2281,22 @@
                 <a:ea typeface="Calibri" pitchFamily="34" charset="-122"/>
                 <a:cs typeface="Calibri" pitchFamily="34" charset="-120"/>
               </a:rPr>
-              <a:t>📝  Week 5 · Day 1</a:t>
-            </a:r>
-            <a:endParaRPr lang="en-US" sz="4000" dirty="0"/>
-          </a:p>
-        </p:txBody>
-      </p:sp>
-      <p:sp>
-        <p:nvSpPr>
-          <p:cNvPr id="3" name="Text 1"/>
-          <p:cNvSpPr/>
-          <p:nvPr/>
-        </p:nvSpPr>
-        <p:spPr>
-          <a:xfrm>
-            <a:off x="457200" y="2103120"/>
-            <a:ext cx="8229600" cy="731520"/>
+              <a:t>Flat Stanley</a:t>
+            </a:r>
+            <a:endParaRPr lang="en-US" sz="3400" dirty="0"/>
+          </a:p>
+        </p:txBody>
+      </p:sp>
+      <p:sp>
+        <p:nvSpPr>
+          <p:cNvPr id="4" name="Text 2"/>
+          <p:cNvSpPr/>
+          <p:nvPr/>
+        </p:nvSpPr>
+        <p:spPr>
+          <a:xfrm>
+            <a:off x="457200" y="2331720"/>
+            <a:ext cx="8229600" cy="411480"/>
           </a:xfrm>
           <a:prstGeom prst="rect">
             <a:avLst/>
@@ -2185,30 +2312,30 @@
               <a:buNone/>
             </a:pPr>
             <a:r>
-              <a:rPr lang="en-US" sz="1800" dirty="0">
-                <a:solidFill>
-                  <a:srgbClr val="8B8BB5"/>
-                </a:solidFill>
-                <a:latin typeface="Calibri" pitchFamily="34" charset="0"/>
-                <a:ea typeface="Calibri" pitchFamily="34" charset="-122"/>
-                <a:cs typeface="Calibri" pitchFamily="34" charset="-120"/>
-              </a:rPr>
-              <a:t>Review Week — Lesson 5.1</a:t>
-            </a:r>
-            <a:endParaRPr lang="en-US" sz="1800" dirty="0"/>
-          </a:p>
-        </p:txBody>
-      </p:sp>
-      <p:sp>
-        <p:nvSpPr>
-          <p:cNvPr id="4" name="Text 2"/>
-          <p:cNvSpPr/>
-          <p:nvPr/>
-        </p:nvSpPr>
-        <p:spPr>
-          <a:xfrm>
-            <a:off x="457200" y="4114800"/>
-            <a:ext cx="8229600" cy="457200"/>
+              <a:rPr lang="en-US" sz="2000" dirty="0">
+                <a:solidFill>
+                  <a:srgbClr val="55C8E8"/>
+                </a:solidFill>
+                <a:latin typeface="Calibri" pitchFamily="34" charset="0"/>
+                <a:ea typeface="Calibri" pitchFamily="34" charset="-122"/>
+                <a:cs typeface="Calibri" pitchFamily="34" charset="-120"/>
+              </a:rPr>
+              <a:t>Lesson 5.1  ·  Whole Book Summary</a:t>
+            </a:r>
+            <a:endParaRPr lang="en-US" sz="2000" dirty="0"/>
+          </a:p>
+        </p:txBody>
+      </p:sp>
+      <p:sp>
+        <p:nvSpPr>
+          <p:cNvPr id="5" name="Text 3"/>
+          <p:cNvSpPr/>
+          <p:nvPr/>
+        </p:nvSpPr>
+        <p:spPr>
+          <a:xfrm>
+            <a:off x="457200" y="2880360"/>
+            <a:ext cx="8229600" cy="320040"/>
           </a:xfrm>
           <a:prstGeom prst="rect">
             <a:avLst/>
@@ -2224,17 +2351,17 @@
               <a:buNone/>
             </a:pPr>
             <a:r>
-              <a:rPr lang="en-US" sz="1300" dirty="0">
-                <a:solidFill>
-                  <a:srgbClr val="AAAAAA"/>
-                </a:solidFill>
-                <a:latin typeface="Calibri" pitchFamily="34" charset="0"/>
-                <a:ea typeface="Calibri" pitchFamily="34" charset="-122"/>
-                <a:cs typeface="Calibri" pitchFamily="34" charset="-120"/>
-              </a:rPr>
-              <a:t>Optima Academy Online · 3rd Grade ELA</a:t>
-            </a:r>
-            <a:endParaRPr lang="en-US" sz="1300" dirty="0"/>
+              <a:rPr lang="en-US" sz="1400" dirty="0">
+                <a:solidFill>
+                  <a:srgbClr val="C9BCE4"/>
+                </a:solidFill>
+                <a:latin typeface="Calibri" pitchFamily="34" charset="0"/>
+                <a:ea typeface="Calibri" pitchFamily="34" charset="-122"/>
+                <a:cs typeface="Calibri" pitchFamily="34" charset="-120"/>
+              </a:rPr>
+              <a:t>Grade 3 ELA  ·  Virtue: Courage</a:t>
+            </a:r>
+            <a:endParaRPr lang="en-US" sz="1400" dirty="0"/>
           </a:p>
         </p:txBody>
       </p:sp>
@@ -2272,65 +2399,62 @@
       </p:grpSpPr>
       <p:sp>
         <p:nvSpPr>
-          <p:cNvPr id="2" name="Text 0"/>
-          <p:cNvSpPr/>
-          <p:nvPr/>
-        </p:nvSpPr>
-        <p:spPr>
-          <a:xfrm>
-            <a:off x="365760" y="164592"/>
-            <a:ext cx="8412480" cy="566928"/>
-          </a:xfrm>
-          <a:prstGeom prst="rect">
-            <a:avLst/>
-          </a:prstGeom>
-          <a:noFill/>
-          <a:ln/>
-        </p:spPr>
-        <p:txBody>
-          <a:bodyPr wrap="square" lIns="0" tIns="0" rIns="0" bIns="0" rtlCol="0" anchor="ctr"/>
-          <a:lstStyle/>
-          <a:p>
-            <a:pPr algn="l" indent="0" marL="0">
-              <a:buNone/>
-            </a:pPr>
-            <a:r>
-              <a:rPr lang="en-US" sz="2800" b="1" dirty="0">
-                <a:solidFill>
-                  <a:srgbClr val="0E1C42"/>
-                </a:solidFill>
-                <a:latin typeface="Calibri" pitchFamily="34" charset="0"/>
-                <a:ea typeface="Calibri" pitchFamily="34" charset="-122"/>
-                <a:cs typeface="Calibri" pitchFamily="34" charset="-120"/>
-              </a:rPr>
-              <a:t>🌱 Morphology: Suffix -ed shows past action</a:t>
-            </a:r>
-            <a:endParaRPr lang="en-US" sz="2800" dirty="0"/>
-          </a:p>
-        </p:txBody>
-      </p:sp>
-      <p:sp>
-        <p:nvSpPr>
-          <p:cNvPr id="3" name="Shape 1"/>
-          <p:cNvSpPr/>
-          <p:nvPr/>
-        </p:nvSpPr>
-        <p:spPr>
-          <a:xfrm>
-            <a:off x="365760" y="749808"/>
-            <a:ext cx="8412480" cy="0"/>
-          </a:xfrm>
-          <a:prstGeom prst="line">
-            <a:avLst/>
-          </a:prstGeom>
-          <a:noFill/>
-          <a:ln w="19050">
-            <a:solidFill>
-              <a:srgbClr val="8B6FC0"/>
-            </a:solidFill>
-            <a:prstDash val="solid"/>
-          </a:ln>
-        </p:spPr>
+          <p:cNvPr id="2" name="Shape 0"/>
+          <p:cNvSpPr/>
+          <p:nvPr/>
+        </p:nvSpPr>
+        <p:spPr>
+          <a:xfrm>
+            <a:off x="0" y="0"/>
+            <a:ext cx="9144000" cy="566928"/>
+          </a:xfrm>
+          <a:prstGeom prst="rect">
+            <a:avLst/>
+          </a:prstGeom>
+          <a:solidFill>
+            <a:srgbClr val="55C8E8"/>
+          </a:solidFill>
+          <a:ln/>
+        </p:spPr>
+      </p:sp>
+      <p:sp>
+        <p:nvSpPr>
+          <p:cNvPr id="3" name="Text 1"/>
+          <p:cNvSpPr/>
+          <p:nvPr/>
+        </p:nvSpPr>
+        <p:spPr>
+          <a:xfrm>
+            <a:off x="365760" y="54864"/>
+            <a:ext cx="8412480" cy="457200"/>
+          </a:xfrm>
+          <a:prstGeom prst="rect">
+            <a:avLst/>
+          </a:prstGeom>
+          <a:noFill/>
+          <a:ln/>
+        </p:spPr>
+        <p:txBody>
+          <a:bodyPr wrap="square" lIns="0" tIns="0" rIns="0" bIns="0" rtlCol="0" anchor="ctr"/>
+          <a:lstStyle/>
+          <a:p>
+            <a:pPr indent="0" marL="0">
+              <a:buNone/>
+            </a:pPr>
+            <a:r>
+              <a:rPr lang="en-US" sz="2200" b="1" dirty="0">
+                <a:solidFill>
+                  <a:srgbClr val="FFFFFF"/>
+                </a:solidFill>
+                <a:latin typeface="Calibri" pitchFamily="34" charset="0"/>
+                <a:ea typeface="Calibri" pitchFamily="34" charset="-122"/>
+                <a:cs typeface="Calibri" pitchFamily="34" charset="-120"/>
+              </a:rPr>
+              <a:t>🔤  Vocabulary</a:t>
+            </a:r>
+            <a:endParaRPr lang="en-US" sz="2200" dirty="0"/>
+          </a:p>
+        </p:txBody>
       </p:sp>
       <p:sp>
         <p:nvSpPr>
@@ -2340,32 +2464,32 @@
         </p:nvSpPr>
         <p:spPr>
           <a:xfrm>
-            <a:off x="457200" y="1005840"/>
-            <a:ext cx="8046720" cy="292608"/>
-          </a:xfrm>
-          <a:prstGeom prst="rect">
-            <a:avLst/>
-          </a:prstGeom>
-          <a:noFill/>
-          <a:ln/>
-        </p:spPr>
-        <p:txBody>
-          <a:bodyPr wrap="square" lIns="0" tIns="0" rIns="0" bIns="0" rtlCol="0" anchor="ctr"/>
-          <a:lstStyle/>
-          <a:p>
-            <a:pPr indent="0" marL="0">
-              <a:buNone/>
-            </a:pPr>
-            <a:r>
-              <a:rPr lang="en-US" sz="1100" b="1" spc="200" kern="0" dirty="0">
-                <a:solidFill>
-                  <a:srgbClr val="8B6FC0"/>
-                </a:solidFill>
-                <a:latin typeface="Calibri" pitchFamily="34" charset="0"/>
-                <a:ea typeface="Calibri" pitchFamily="34" charset="-122"/>
-                <a:cs typeface="Calibri" pitchFamily="34" charset="-120"/>
-              </a:rPr>
-              <a:t>WORD BUILDING</a:t>
+            <a:off x="365760" y="804672"/>
+            <a:ext cx="8229600" cy="237744"/>
+          </a:xfrm>
+          <a:prstGeom prst="rect">
+            <a:avLst/>
+          </a:prstGeom>
+          <a:noFill/>
+          <a:ln/>
+        </p:spPr>
+        <p:txBody>
+          <a:bodyPr wrap="square" lIns="0" tIns="0" rIns="0" bIns="0" rtlCol="0" anchor="ctr"/>
+          <a:lstStyle/>
+          <a:p>
+            <a:pPr indent="0" marL="0">
+              <a:buNone/>
+            </a:pPr>
+            <a:r>
+              <a:rPr lang="en-US" sz="1100" b="1" spc="100" kern="0" dirty="0">
+                <a:solidFill>
+                  <a:srgbClr val="55C8E8"/>
+                </a:solidFill>
+                <a:latin typeface="Calibri" pitchFamily="34" charset="0"/>
+                <a:ea typeface="Calibri" pitchFamily="34" charset="-122"/>
+                <a:cs typeface="Calibri" pitchFamily="34" charset="-120"/>
+              </a:rPr>
+              <a:t>WORDS WE'VE MET BEFORE</a:t>
             </a:r>
             <a:endParaRPr lang="en-US" sz="1100" dirty="0"/>
           </a:p>
@@ -2379,16 +2503,16 @@
         </p:nvSpPr>
         <p:spPr>
           <a:xfrm>
-            <a:off x="457200" y="1371600"/>
-            <a:ext cx="8229600" cy="457200"/>
+            <a:off x="365760" y="1097280"/>
+            <a:ext cx="8412480" cy="658368"/>
           </a:xfrm>
           <a:prstGeom prst="roundRect">
             <a:avLst>
-              <a:gd name="adj" fmla="val 20000"/>
+              <a:gd name="adj" fmla="val 13889"/>
             </a:avLst>
           </a:prstGeom>
           <a:solidFill>
-            <a:srgbClr val="F0E8FF"/>
+            <a:srgbClr val="E5F7FC"/>
           </a:solidFill>
           <a:ln/>
           <a:effectLst>
@@ -2408,24 +2532,24 @@
         </p:nvSpPr>
         <p:spPr>
           <a:xfrm>
-            <a:off x="640080" y="1417320"/>
-            <a:ext cx="7863840" cy="365760"/>
-          </a:xfrm>
-          <a:prstGeom prst="rect">
-            <a:avLst/>
-          </a:prstGeom>
-          <a:noFill/>
-          <a:ln/>
-        </p:spPr>
-        <p:txBody>
-          <a:bodyPr wrap="square" lIns="0" tIns="0" rIns="0" bIns="0" rtlCol="0" anchor="ctr"/>
-          <a:lstStyle/>
-          <a:p>
-            <a:pPr indent="0" marL="0">
-              <a:buNone/>
-            </a:pPr>
-            <a:r>
-              <a:rPr lang="en-US" sz="1600" b="1" dirty="0">
+            <a:off x="594360" y="1225296"/>
+            <a:ext cx="7863840" cy="420624"/>
+          </a:xfrm>
+          <a:prstGeom prst="rect">
+            <a:avLst/>
+          </a:prstGeom>
+          <a:noFill/>
+          <a:ln/>
+        </p:spPr>
+        <p:txBody>
+          <a:bodyPr wrap="square" lIns="0" tIns="0" rIns="0" bIns="0" rtlCol="0" anchor="ctr"/>
+          <a:lstStyle/>
+          <a:p>
+            <a:pPr indent="0" marL="0">
+              <a:buNone/>
+            </a:pPr>
+            <a:r>
+              <a:rPr lang="en-US" sz="1700" b="1" dirty="0">
                 <a:solidFill>
                   <a:srgbClr val="0E1C42"/>
                 </a:solidFill>
@@ -2433,7 +2557,7 @@
                 <a:ea typeface="Calibri" pitchFamily="34" charset="-122"/>
                 <a:cs typeface="Calibri" pitchFamily="34" charset="-120"/>
               </a:rPr>
-              <a:t>walked</a:t>
+              <a:t>marvel  </a:t>
             </a:r>
             <a:pPr indent="0" marL="0">
               <a:buNone/>
@@ -2441,15 +2565,15 @@
             <a:r>
               <a:rPr lang="en-US" sz="1400" dirty="0">
                 <a:solidFill>
-                  <a:srgbClr val="64748B"/>
-                </a:solidFill>
-                <a:latin typeface="Calibri" pitchFamily="34" charset="0"/>
-                <a:ea typeface="Calibri" pitchFamily="34" charset="-122"/>
-                <a:cs typeface="Calibri" pitchFamily="34" charset="-120"/>
-              </a:rPr>
-              <a:t>  ·  walk + -ed =</a:t>
-            </a:r>
-            <a:endParaRPr lang="en-US" sz="1600" dirty="0"/>
+                  <a:srgbClr val="1E293B"/>
+                </a:solidFill>
+                <a:latin typeface="Calibri" pitchFamily="34" charset="0"/>
+                <a:ea typeface="Calibri" pitchFamily="34" charset="-122"/>
+                <a:cs typeface="Calibri" pitchFamily="34" charset="-120"/>
+              </a:rPr>
+              <a:t>To be amazed or surprised by something.</a:t>
+            </a:r>
+            <a:endParaRPr lang="en-US" sz="1700" dirty="0"/>
           </a:p>
         </p:txBody>
       </p:sp>
@@ -2461,16 +2585,16 @@
         </p:nvSpPr>
         <p:spPr>
           <a:xfrm>
-            <a:off x="457200" y="1901952"/>
-            <a:ext cx="8229600" cy="457200"/>
+            <a:off x="365760" y="1828800"/>
+            <a:ext cx="8412480" cy="658368"/>
           </a:xfrm>
           <a:prstGeom prst="roundRect">
             <a:avLst>
-              <a:gd name="adj" fmla="val 20000"/>
+              <a:gd name="adj" fmla="val 13889"/>
             </a:avLst>
           </a:prstGeom>
           <a:solidFill>
-            <a:srgbClr val="F0E8FF"/>
+            <a:srgbClr val="FFFFFF"/>
           </a:solidFill>
           <a:ln/>
           <a:effectLst>
@@ -2490,24 +2614,24 @@
         </p:nvSpPr>
         <p:spPr>
           <a:xfrm>
-            <a:off x="640080" y="1947672"/>
-            <a:ext cx="7863840" cy="365760"/>
-          </a:xfrm>
-          <a:prstGeom prst="rect">
-            <a:avLst/>
-          </a:prstGeom>
-          <a:noFill/>
-          <a:ln/>
-        </p:spPr>
-        <p:txBody>
-          <a:bodyPr wrap="square" lIns="0" tIns="0" rIns="0" bIns="0" rtlCol="0" anchor="ctr"/>
-          <a:lstStyle/>
-          <a:p>
-            <a:pPr indent="0" marL="0">
-              <a:buNone/>
-            </a:pPr>
-            <a:r>
-              <a:rPr lang="en-US" sz="1600" b="1" dirty="0">
+            <a:off x="594360" y="1956816"/>
+            <a:ext cx="7863840" cy="420624"/>
+          </a:xfrm>
+          <a:prstGeom prst="rect">
+            <a:avLst/>
+          </a:prstGeom>
+          <a:noFill/>
+          <a:ln/>
+        </p:spPr>
+        <p:txBody>
+          <a:bodyPr wrap="square" lIns="0" tIns="0" rIns="0" bIns="0" rtlCol="0" anchor="ctr"/>
+          <a:lstStyle/>
+          <a:p>
+            <a:pPr indent="0" marL="0">
+              <a:buNone/>
+            </a:pPr>
+            <a:r>
+              <a:rPr lang="en-US" sz="1700" b="1" dirty="0">
                 <a:solidFill>
                   <a:srgbClr val="0E1C42"/>
                 </a:solidFill>
@@ -2515,7 +2639,7 @@
                 <a:ea typeface="Calibri" pitchFamily="34" charset="-122"/>
                 <a:cs typeface="Calibri" pitchFamily="34" charset="-120"/>
               </a:rPr>
-              <a:t>called</a:t>
+              <a:t>measurements  </a:t>
             </a:r>
             <a:pPr indent="0" marL="0">
               <a:buNone/>
@@ -2523,15 +2647,15 @@
             <a:r>
               <a:rPr lang="en-US" sz="1400" dirty="0">
                 <a:solidFill>
-                  <a:srgbClr val="64748B"/>
-                </a:solidFill>
-                <a:latin typeface="Calibri" pitchFamily="34" charset="0"/>
-                <a:ea typeface="Calibri" pitchFamily="34" charset="-122"/>
-                <a:cs typeface="Calibri" pitchFamily="34" charset="-120"/>
-              </a:rPr>
-              <a:t>  ·  call + -ed =</a:t>
-            </a:r>
-            <a:endParaRPr lang="en-US" sz="1600" dirty="0"/>
+                  <a:srgbClr val="1E293B"/>
+                </a:solidFill>
+                <a:latin typeface="Calibri" pitchFamily="34" charset="0"/>
+                <a:ea typeface="Calibri" pitchFamily="34" charset="-122"/>
+                <a:cs typeface="Calibri" pitchFamily="34" charset="-120"/>
+              </a:rPr>
+              <a:t>The size of something — how tall, wide, or thick.</a:t>
+            </a:r>
+            <a:endParaRPr lang="en-US" sz="1700" dirty="0"/>
           </a:p>
         </p:txBody>
       </p:sp>
@@ -2543,16 +2667,16 @@
         </p:nvSpPr>
         <p:spPr>
           <a:xfrm>
-            <a:off x="457200" y="2432304"/>
-            <a:ext cx="8229600" cy="457200"/>
+            <a:off x="365760" y="2560320"/>
+            <a:ext cx="8412480" cy="658368"/>
           </a:xfrm>
           <a:prstGeom prst="roundRect">
             <a:avLst>
-              <a:gd name="adj" fmla="val 20000"/>
+              <a:gd name="adj" fmla="val 13889"/>
             </a:avLst>
           </a:prstGeom>
           <a:solidFill>
-            <a:srgbClr val="F0E8FF"/>
+            <a:srgbClr val="E5F7FC"/>
           </a:solidFill>
           <a:ln/>
           <a:effectLst>
@@ -2572,24 +2696,24 @@
         </p:nvSpPr>
         <p:spPr>
           <a:xfrm>
-            <a:off x="640080" y="2478024"/>
-            <a:ext cx="7863840" cy="365760"/>
-          </a:xfrm>
-          <a:prstGeom prst="rect">
-            <a:avLst/>
-          </a:prstGeom>
-          <a:noFill/>
-          <a:ln/>
-        </p:spPr>
-        <p:txBody>
-          <a:bodyPr wrap="square" lIns="0" tIns="0" rIns="0" bIns="0" rtlCol="0" anchor="ctr"/>
-          <a:lstStyle/>
-          <a:p>
-            <a:pPr indent="0" marL="0">
-              <a:buNone/>
-            </a:pPr>
-            <a:r>
-              <a:rPr lang="en-US" sz="1600" b="1" dirty="0">
+            <a:off x="594360" y="2688336"/>
+            <a:ext cx="7863840" cy="420624"/>
+          </a:xfrm>
+          <a:prstGeom prst="rect">
+            <a:avLst/>
+          </a:prstGeom>
+          <a:noFill/>
+          <a:ln/>
+        </p:spPr>
+        <p:txBody>
+          <a:bodyPr wrap="square" lIns="0" tIns="0" rIns="0" bIns="0" rtlCol="0" anchor="ctr"/>
+          <a:lstStyle/>
+          <a:p>
+            <a:pPr indent="0" marL="0">
+              <a:buNone/>
+            </a:pPr>
+            <a:r>
+              <a:rPr lang="en-US" sz="1700" b="1" dirty="0">
                 <a:solidFill>
                   <a:srgbClr val="0E1C42"/>
                 </a:solidFill>
@@ -2597,7 +2721,7 @@
                 <a:ea typeface="Calibri" pitchFamily="34" charset="-122"/>
                 <a:cs typeface="Calibri" pitchFamily="34" charset="-120"/>
               </a:rPr>
-              <a:t>helped</a:t>
+              <a:t>jealous  </a:t>
             </a:r>
             <a:pPr indent="0" marL="0">
               <a:buNone/>
@@ -2605,15 +2729,15 @@
             <a:r>
               <a:rPr lang="en-US" sz="1400" dirty="0">
                 <a:solidFill>
-                  <a:srgbClr val="64748B"/>
-                </a:solidFill>
-                <a:latin typeface="Calibri" pitchFamily="34" charset="0"/>
-                <a:ea typeface="Calibri" pitchFamily="34" charset="-122"/>
-                <a:cs typeface="Calibri" pitchFamily="34" charset="-120"/>
-              </a:rPr>
-              <a:t>  ·  help + -ed =</a:t>
-            </a:r>
-            <a:endParaRPr lang="en-US" sz="1600" dirty="0"/>
+                  <a:srgbClr val="1E293B"/>
+                </a:solidFill>
+                <a:latin typeface="Calibri" pitchFamily="34" charset="0"/>
+                <a:ea typeface="Calibri" pitchFamily="34" charset="-122"/>
+                <a:cs typeface="Calibri" pitchFamily="34" charset="-120"/>
+              </a:rPr>
+              <a:t>Wanting what someone else has.</a:t>
+            </a:r>
+            <a:endParaRPr lang="en-US" sz="1700" dirty="0"/>
           </a:p>
         </p:txBody>
       </p:sp>
@@ -2625,16 +2749,16 @@
         </p:nvSpPr>
         <p:spPr>
           <a:xfrm>
-            <a:off x="457200" y="2962656"/>
-            <a:ext cx="8229600" cy="457200"/>
+            <a:off x="365760" y="3291840"/>
+            <a:ext cx="8412480" cy="658368"/>
           </a:xfrm>
           <a:prstGeom prst="roundRect">
             <a:avLst>
-              <a:gd name="adj" fmla="val 20000"/>
+              <a:gd name="adj" fmla="val 13889"/>
             </a:avLst>
           </a:prstGeom>
           <a:solidFill>
-            <a:srgbClr val="F0E8FF"/>
+            <a:srgbClr val="FFFFFF"/>
           </a:solidFill>
           <a:ln/>
           <a:effectLst>
@@ -2654,24 +2778,24 @@
         </p:nvSpPr>
         <p:spPr>
           <a:xfrm>
-            <a:off x="640080" y="3008376"/>
-            <a:ext cx="7863840" cy="365760"/>
-          </a:xfrm>
-          <a:prstGeom prst="rect">
-            <a:avLst/>
-          </a:prstGeom>
-          <a:noFill/>
-          <a:ln/>
-        </p:spPr>
-        <p:txBody>
-          <a:bodyPr wrap="square" lIns="0" tIns="0" rIns="0" bIns="0" rtlCol="0" anchor="ctr"/>
-          <a:lstStyle/>
-          <a:p>
-            <a:pPr indent="0" marL="0">
-              <a:buNone/>
-            </a:pPr>
-            <a:r>
-              <a:rPr lang="en-US" sz="1600" b="1" dirty="0">
+            <a:off x="594360" y="3419856"/>
+            <a:ext cx="7863840" cy="420624"/>
+          </a:xfrm>
+          <a:prstGeom prst="rect">
+            <a:avLst/>
+          </a:prstGeom>
+          <a:noFill/>
+          <a:ln/>
+        </p:spPr>
+        <p:txBody>
+          <a:bodyPr wrap="square" lIns="0" tIns="0" rIns="0" bIns="0" rtlCol="0" anchor="ctr"/>
+          <a:lstStyle/>
+          <a:p>
+            <a:pPr indent="0" marL="0">
+              <a:buNone/>
+            </a:pPr>
+            <a:r>
+              <a:rPr lang="en-US" sz="1700" b="1" dirty="0">
                 <a:solidFill>
                   <a:srgbClr val="0E1C42"/>
                 </a:solidFill>
@@ -2679,7 +2803,7 @@
                 <a:ea typeface="Calibri" pitchFamily="34" charset="-122"/>
                 <a:cs typeface="Calibri" pitchFamily="34" charset="-120"/>
               </a:rPr>
-              <a:t>looked</a:t>
+              <a:t>expensive  </a:t>
             </a:r>
             <a:pPr indent="0" marL="0">
               <a:buNone/>
@@ -2687,93 +2811,15 @@
             <a:r>
               <a:rPr lang="en-US" sz="1400" dirty="0">
                 <a:solidFill>
-                  <a:srgbClr val="64748B"/>
-                </a:solidFill>
-                <a:latin typeface="Calibri" pitchFamily="34" charset="0"/>
-                <a:ea typeface="Calibri" pitchFamily="34" charset="-122"/>
-                <a:cs typeface="Calibri" pitchFamily="34" charset="-120"/>
-              </a:rPr>
-              <a:t>  ·  look + -ed =</a:t>
-            </a:r>
-            <a:endParaRPr lang="en-US" sz="1600" dirty="0"/>
-          </a:p>
-        </p:txBody>
-      </p:sp>
-      <p:sp>
-        <p:nvSpPr>
-          <p:cNvPr id="13" name="Text 11"/>
-          <p:cNvSpPr/>
-          <p:nvPr/>
-        </p:nvSpPr>
-        <p:spPr>
-          <a:xfrm>
-            <a:off x="457200" y="3493008"/>
-            <a:ext cx="8046720" cy="292608"/>
-          </a:xfrm>
-          <a:prstGeom prst="rect">
-            <a:avLst/>
-          </a:prstGeom>
-          <a:noFill/>
-          <a:ln/>
-        </p:spPr>
-        <p:txBody>
-          <a:bodyPr wrap="square" lIns="0" tIns="0" rIns="0" bIns="0" rtlCol="0" anchor="ctr"/>
-          <a:lstStyle/>
-          <a:p>
-            <a:pPr indent="0" marL="0">
-              <a:buNone/>
-            </a:pPr>
-            <a:r>
-              <a:rPr lang="en-US" sz="1100" b="1" spc="200" kern="0" dirty="0">
-                <a:solidFill>
-                  <a:srgbClr val="64748B"/>
-                </a:solidFill>
-                <a:latin typeface="Calibri" pitchFamily="34" charset="0"/>
-                <a:ea typeface="Calibri" pitchFamily="34" charset="-122"/>
-                <a:cs typeface="Calibri" pitchFamily="34" charset="-120"/>
-              </a:rPr>
-              <a:t>CONCEPT EXAMPLES</a:t>
-            </a:r>
-            <a:endParaRPr lang="en-US" sz="1100" dirty="0"/>
-          </a:p>
-        </p:txBody>
-      </p:sp>
-      <p:sp>
-        <p:nvSpPr>
-          <p:cNvPr id="14" name="Text 12"/>
-          <p:cNvSpPr/>
-          <p:nvPr/>
-        </p:nvSpPr>
-        <p:spPr>
-          <a:xfrm>
-            <a:off x="640080" y="3813048"/>
-            <a:ext cx="7863840" cy="320040"/>
-          </a:xfrm>
-          <a:prstGeom prst="rect">
-            <a:avLst/>
-          </a:prstGeom>
-          <a:noFill/>
-          <a:ln/>
-        </p:spPr>
-        <p:txBody>
-          <a:bodyPr wrap="square" lIns="0" tIns="0" rIns="0" bIns="0" rtlCol="0" anchor="ctr"/>
-          <a:lstStyle/>
-          <a:p>
-            <a:pPr indent="0" marL="0">
-              <a:buNone/>
-            </a:pPr>
-            <a:r>
-              <a:rPr lang="en-US" sz="1300" dirty="0">
-                <a:solidFill>
                   <a:srgbClr val="1E293B"/>
                 </a:solidFill>
                 <a:latin typeface="Calibri" pitchFamily="34" charset="0"/>
                 <a:ea typeface="Calibri" pitchFamily="34" charset="-122"/>
                 <a:cs typeface="Calibri" pitchFamily="34" charset="-120"/>
               </a:rPr>
-              <a:t>• 📌 Examples</a:t>
-            </a:r>
-            <a:endParaRPr lang="en-US" sz="1300" dirty="0"/>
+              <a:t>Costing a lot of money.</a:t>
+            </a:r>
+            <a:endParaRPr lang="en-US" sz="1700" dirty="0"/>
           </a:p>
         </p:txBody>
       </p:sp>
@@ -2791,7 +2837,7 @@
     <p:bg>
       <p:bgPr>
         <a:solidFill>
-          <a:srgbClr val="FFFFFF"/>
+          <a:srgbClr val="F8FAFC"/>
         </a:solidFill>
       </p:bgPr>
     </p:bg>
@@ -2811,80 +2857,116 @@
       </p:grpSpPr>
       <p:sp>
         <p:nvSpPr>
-          <p:cNvPr id="2" name="Text 0"/>
-          <p:cNvSpPr/>
-          <p:nvPr/>
-        </p:nvSpPr>
-        <p:spPr>
-          <a:xfrm>
-            <a:off x="365760" y="164592"/>
-            <a:ext cx="8412480" cy="566928"/>
-          </a:xfrm>
-          <a:prstGeom prst="rect">
-            <a:avLst/>
-          </a:prstGeom>
-          <a:noFill/>
-          <a:ln/>
-        </p:spPr>
-        <p:txBody>
-          <a:bodyPr wrap="square" lIns="0" tIns="0" rIns="0" bIns="0" rtlCol="0" anchor="ctr"/>
-          <a:lstStyle/>
-          <a:p>
-            <a:pPr algn="l" indent="0" marL="0">
-              <a:buNone/>
-            </a:pPr>
-            <a:r>
-              <a:rPr lang="en-US" sz="2800" b="1" dirty="0">
-                <a:solidFill>
-                  <a:srgbClr val="0E1C42"/>
-                </a:solidFill>
-                <a:latin typeface="Calibri" pitchFamily="34" charset="0"/>
-                <a:ea typeface="Calibri" pitchFamily="34" charset="-122"/>
-                <a:cs typeface="Calibri" pitchFamily="34" charset="-120"/>
-              </a:rPr>
-              <a:t>🔤 Vocabulary</a:t>
-            </a:r>
-            <a:endParaRPr lang="en-US" sz="2800" dirty="0"/>
-          </a:p>
-        </p:txBody>
-      </p:sp>
-      <p:sp>
-        <p:nvSpPr>
-          <p:cNvPr id="3" name="Shape 1"/>
-          <p:cNvSpPr/>
-          <p:nvPr/>
-        </p:nvSpPr>
-        <p:spPr>
-          <a:xfrm>
-            <a:off x="365760" y="749808"/>
-            <a:ext cx="8412480" cy="0"/>
-          </a:xfrm>
-          <a:prstGeom prst="line">
-            <a:avLst/>
-          </a:prstGeom>
-          <a:noFill/>
-          <a:ln w="19050">
-            <a:solidFill>
-              <a:srgbClr val="55C8E8"/>
-            </a:solidFill>
-            <a:prstDash val="solid"/>
-          </a:ln>
-        </p:spPr>
-      </p:sp>
-      <p:sp>
-        <p:nvSpPr>
-          <p:cNvPr id="4" name="Shape 2"/>
-          <p:cNvSpPr/>
-          <p:nvPr/>
-        </p:nvSpPr>
-        <p:spPr>
-          <a:xfrm>
-            <a:off x="457200" y="1005840"/>
-            <a:ext cx="3840480" cy="640080"/>
+          <p:cNvPr id="2" name="Shape 0"/>
+          <p:cNvSpPr/>
+          <p:nvPr/>
+        </p:nvSpPr>
+        <p:spPr>
+          <a:xfrm>
+            <a:off x="0" y="0"/>
+            <a:ext cx="9144000" cy="566928"/>
+          </a:xfrm>
+          <a:prstGeom prst="rect">
+            <a:avLst/>
+          </a:prstGeom>
+          <a:solidFill>
+            <a:srgbClr val="C7922C"/>
+          </a:solidFill>
+          <a:ln/>
+        </p:spPr>
+      </p:sp>
+      <p:sp>
+        <p:nvSpPr>
+          <p:cNvPr id="3" name="Text 1"/>
+          <p:cNvSpPr/>
+          <p:nvPr/>
+        </p:nvSpPr>
+        <p:spPr>
+          <a:xfrm>
+            <a:off x="365760" y="54864"/>
+            <a:ext cx="8412480" cy="457200"/>
+          </a:xfrm>
+          <a:prstGeom prst="rect">
+            <a:avLst/>
+          </a:prstGeom>
+          <a:noFill/>
+          <a:ln/>
+        </p:spPr>
+        <p:txBody>
+          <a:bodyPr wrap="square" lIns="0" tIns="0" rIns="0" bIns="0" rtlCol="0" anchor="ctr"/>
+          <a:lstStyle/>
+          <a:p>
+            <a:pPr indent="0" marL="0">
+              <a:buNone/>
+            </a:pPr>
+            <a:r>
+              <a:rPr lang="en-US" sz="2200" b="1" dirty="0">
+                <a:solidFill>
+                  <a:srgbClr val="FFFFFF"/>
+                </a:solidFill>
+                <a:latin typeface="Calibri" pitchFamily="34" charset="0"/>
+                <a:ea typeface="Calibri" pitchFamily="34" charset="-122"/>
+                <a:cs typeface="Calibri" pitchFamily="34" charset="-120"/>
+              </a:rPr>
+              <a:t>✏️  Grammar</a:t>
+            </a:r>
+            <a:endParaRPr lang="en-US" sz="2200" dirty="0"/>
+          </a:p>
+        </p:txBody>
+      </p:sp>
+      <p:sp>
+        <p:nvSpPr>
+          <p:cNvPr id="4" name="Text 2"/>
+          <p:cNvSpPr/>
+          <p:nvPr/>
+        </p:nvSpPr>
+        <p:spPr>
+          <a:xfrm>
+            <a:off x="365760" y="777240"/>
+            <a:ext cx="8229600" cy="237744"/>
+          </a:xfrm>
+          <a:prstGeom prst="rect">
+            <a:avLst/>
+          </a:prstGeom>
+          <a:noFill/>
+          <a:ln/>
+        </p:spPr>
+        <p:txBody>
+          <a:bodyPr wrap="square" lIns="0" tIns="0" rIns="0" bIns="0" rtlCol="0" anchor="ctr"/>
+          <a:lstStyle/>
+          <a:p>
+            <a:pPr indent="0" marL="0">
+              <a:buNone/>
+            </a:pPr>
+            <a:r>
+              <a:rPr lang="en-US" sz="1100" b="1" spc="100" kern="0" dirty="0">
+                <a:solidFill>
+                  <a:srgbClr val="C7922C"/>
+                </a:solidFill>
+                <a:latin typeface="Calibri" pitchFamily="34" charset="0"/>
+                <a:ea typeface="Calibri" pitchFamily="34" charset="-122"/>
+                <a:cs typeface="Calibri" pitchFamily="34" charset="-120"/>
+              </a:rPr>
+              <a:t>PAST-TENSE VERBS</a:t>
+            </a:r>
+            <a:endParaRPr lang="en-US" sz="1100" dirty="0"/>
+          </a:p>
+        </p:txBody>
+      </p:sp>
+      <p:sp>
+        <p:nvSpPr>
+          <p:cNvPr id="5" name="Shape 3"/>
+          <p:cNvSpPr/>
+          <p:nvPr/>
+        </p:nvSpPr>
+        <p:spPr>
+          <a:xfrm>
+            <a:off x="365760" y="1078992"/>
+            <a:ext cx="8412480" cy="658368"/>
           </a:xfrm>
           <a:prstGeom prst="roundRect">
             <a:avLst>
-              <a:gd name="adj" fmla="val 14286"/>
+              <a:gd name="adj" fmla="val 13889"/>
             </a:avLst>
           </a:prstGeom>
           <a:solidFill>
@@ -2902,50 +2984,30 @@
       </p:sp>
       <p:sp>
         <p:nvSpPr>
-          <p:cNvPr id="5" name="Text 3"/>
-          <p:cNvSpPr/>
-          <p:nvPr/>
-        </p:nvSpPr>
-        <p:spPr>
-          <a:xfrm>
-            <a:off x="594360" y="1060704"/>
-            <a:ext cx="3566160" cy="530352"/>
-          </a:xfrm>
-          <a:prstGeom prst="rect">
-            <a:avLst/>
-          </a:prstGeom>
-          <a:noFill/>
-          <a:ln/>
-        </p:spPr>
-        <p:txBody>
-          <a:bodyPr wrap="square" lIns="0" tIns="0" rIns="0" bIns="0" rtlCol="0" anchor="ctr"/>
-          <a:lstStyle/>
-          <a:p>
-            <a:pPr indent="0" marL="0">
-              <a:buNone/>
-            </a:pPr>
-            <a:r>
-              <a:rPr lang="en-US" sz="1500" b="1" dirty="0">
-                <a:solidFill>
-                  <a:srgbClr val="0E1C42"/>
-                </a:solidFill>
-                <a:latin typeface="Calibri" pitchFamily="34" charset="0"/>
-                <a:ea typeface="Calibri" pitchFamily="34" charset="-122"/>
-                <a:cs typeface="Calibri" pitchFamily="34" charset="-120"/>
-              </a:rPr>
-              <a:t>bulletin</a:t>
-            </a:r>
-            <a:pPr indent="0" marL="0">
-              <a:buNone/>
-            </a:pPr>
-            <a:endParaRPr lang="en-US" sz="1500" dirty="0"/>
-          </a:p>
-          <a:p>
-            <a:pPr indent="0" marL="0">
-              <a:buNone/>
-            </a:pPr>
-            <a:r>
-              <a:rPr lang="en-US" sz="1200" dirty="0">
+          <p:cNvPr id="6" name="Text 4"/>
+          <p:cNvSpPr/>
+          <p:nvPr/>
+        </p:nvSpPr>
+        <p:spPr>
+          <a:xfrm>
+            <a:off x="594360" y="1225296"/>
+            <a:ext cx="7863840" cy="402336"/>
+          </a:xfrm>
+          <a:prstGeom prst="rect">
+            <a:avLst/>
+          </a:prstGeom>
+          <a:noFill/>
+          <a:ln/>
+        </p:spPr>
+        <p:txBody>
+          <a:bodyPr wrap="square" lIns="0" tIns="0" rIns="0" bIns="0" rtlCol="0" anchor="ctr"/>
+          <a:lstStyle/>
+          <a:p>
+            <a:pPr indent="0" marL="0">
+              <a:buNone/>
+            </a:pPr>
+            <a:r>
+              <a:rPr lang="en-US" sz="1600" dirty="0">
                 <a:solidFill>
                   <a:srgbClr val="1E293B"/>
                 </a:solidFill>
@@ -2953,30 +3015,30 @@
                 <a:ea typeface="Calibri" pitchFamily="34" charset="-122"/>
                 <a:cs typeface="Calibri" pitchFamily="34" charset="-120"/>
               </a:rPr>
-              <a:t>A board where you pin up messages and pictures.</a:t>
-            </a:r>
-            <a:endParaRPr lang="en-US" sz="1500" dirty="0"/>
-          </a:p>
-        </p:txBody>
-      </p:sp>
-      <p:sp>
-        <p:nvSpPr>
-          <p:cNvPr id="6" name="Shape 4"/>
-          <p:cNvSpPr/>
-          <p:nvPr/>
-        </p:nvSpPr>
-        <p:spPr>
-          <a:xfrm>
-            <a:off x="4572000" y="1005840"/>
-            <a:ext cx="3840480" cy="640080"/>
+              <a:t>walk walked walking walks</a:t>
+            </a:r>
+            <a:endParaRPr lang="en-US" sz="1600" dirty="0"/>
+          </a:p>
+        </p:txBody>
+      </p:sp>
+      <p:sp>
+        <p:nvSpPr>
+          <p:cNvPr id="7" name="Shape 5"/>
+          <p:cNvSpPr/>
+          <p:nvPr/>
+        </p:nvSpPr>
+        <p:spPr>
+          <a:xfrm>
+            <a:off x="365760" y="1810512"/>
+            <a:ext cx="8412480" cy="658368"/>
           </a:xfrm>
           <a:prstGeom prst="roundRect">
             <a:avLst>
-              <a:gd name="adj" fmla="val 14286"/>
+              <a:gd name="adj" fmla="val 13889"/>
             </a:avLst>
           </a:prstGeom>
           <a:solidFill>
-            <a:srgbClr val="FEF6E8"/>
+            <a:srgbClr val="FFFFFF"/>
           </a:solidFill>
           <a:ln/>
           <a:effectLst>
@@ -2990,50 +3052,30 @@
       </p:sp>
       <p:sp>
         <p:nvSpPr>
-          <p:cNvPr id="7" name="Text 5"/>
-          <p:cNvSpPr/>
-          <p:nvPr/>
-        </p:nvSpPr>
-        <p:spPr>
-          <a:xfrm>
-            <a:off x="4709160" y="1060704"/>
-            <a:ext cx="3566160" cy="530352"/>
-          </a:xfrm>
-          <a:prstGeom prst="rect">
-            <a:avLst/>
-          </a:prstGeom>
-          <a:noFill/>
-          <a:ln/>
-        </p:spPr>
-        <p:txBody>
-          <a:bodyPr wrap="square" lIns="0" tIns="0" rIns="0" bIns="0" rtlCol="0" anchor="ctr"/>
-          <a:lstStyle/>
-          <a:p>
-            <a:pPr indent="0" marL="0">
-              <a:buNone/>
-            </a:pPr>
-            <a:r>
-              <a:rPr lang="en-US" sz="1500" b="1" dirty="0">
-                <a:solidFill>
-                  <a:srgbClr val="0E1C42"/>
-                </a:solidFill>
-                <a:latin typeface="Calibri" pitchFamily="34" charset="0"/>
-                <a:ea typeface="Calibri" pitchFamily="34" charset="-122"/>
-                <a:cs typeface="Calibri" pitchFamily="34" charset="-120"/>
-              </a:rPr>
-              <a:t>examined</a:t>
-            </a:r>
-            <a:pPr indent="0" marL="0">
-              <a:buNone/>
-            </a:pPr>
-            <a:endParaRPr lang="en-US" sz="1500" dirty="0"/>
-          </a:p>
-          <a:p>
-            <a:pPr indent="0" marL="0">
-              <a:buNone/>
-            </a:pPr>
-            <a:r>
-              <a:rPr lang="en-US" sz="1200" dirty="0">
+          <p:cNvPr id="8" name="Text 6"/>
+          <p:cNvSpPr/>
+          <p:nvPr/>
+        </p:nvSpPr>
+        <p:spPr>
+          <a:xfrm>
+            <a:off x="594360" y="1956816"/>
+            <a:ext cx="7863840" cy="402336"/>
+          </a:xfrm>
+          <a:prstGeom prst="rect">
+            <a:avLst/>
+          </a:prstGeom>
+          <a:noFill/>
+          <a:ln/>
+        </p:spPr>
+        <p:txBody>
+          <a:bodyPr wrap="square" lIns="0" tIns="0" rIns="0" bIns="0" rtlCol="0" anchor="ctr"/>
+          <a:lstStyle/>
+          <a:p>
+            <a:pPr indent="0" marL="0">
+              <a:buNone/>
+            </a:pPr>
+            <a:r>
+              <a:rPr lang="en-US" sz="1600" dirty="0">
                 <a:solidFill>
                   <a:srgbClr val="1E293B"/>
                 </a:solidFill>
@@ -3041,26 +3083,26 @@
                 <a:ea typeface="Calibri" pitchFamily="34" charset="-122"/>
                 <a:cs typeface="Calibri" pitchFamily="34" charset="-120"/>
               </a:rPr>
-              <a:t>Looked at very carefully.</a:t>
-            </a:r>
-            <a:endParaRPr lang="en-US" sz="1500" dirty="0"/>
-          </a:p>
-        </p:txBody>
-      </p:sp>
-      <p:sp>
-        <p:nvSpPr>
-          <p:cNvPr id="8" name="Shape 6"/>
-          <p:cNvSpPr/>
-          <p:nvPr/>
-        </p:nvSpPr>
-        <p:spPr>
-          <a:xfrm>
-            <a:off x="457200" y="1755648"/>
-            <a:ext cx="3840480" cy="640080"/>
+              <a:t>help helps helped helping</a:t>
+            </a:r>
+            <a:endParaRPr lang="en-US" sz="1600" dirty="0"/>
+          </a:p>
+        </p:txBody>
+      </p:sp>
+      <p:sp>
+        <p:nvSpPr>
+          <p:cNvPr id="9" name="Shape 7"/>
+          <p:cNvSpPr/>
+          <p:nvPr/>
+        </p:nvSpPr>
+        <p:spPr>
+          <a:xfrm>
+            <a:off x="365760" y="2542032"/>
+            <a:ext cx="8412480" cy="658368"/>
           </a:xfrm>
           <a:prstGeom prst="roundRect">
             <a:avLst>
-              <a:gd name="adj" fmla="val 14286"/>
+              <a:gd name="adj" fmla="val 13889"/>
             </a:avLst>
           </a:prstGeom>
           <a:solidFill>
@@ -3078,50 +3120,30 @@
       </p:sp>
       <p:sp>
         <p:nvSpPr>
-          <p:cNvPr id="9" name="Text 7"/>
-          <p:cNvSpPr/>
-          <p:nvPr/>
-        </p:nvSpPr>
-        <p:spPr>
-          <a:xfrm>
-            <a:off x="594360" y="1810512"/>
-            <a:ext cx="3566160" cy="530352"/>
-          </a:xfrm>
-          <a:prstGeom prst="rect">
-            <a:avLst/>
-          </a:prstGeom>
-          <a:noFill/>
-          <a:ln/>
-        </p:spPr>
-        <p:txBody>
-          <a:bodyPr wrap="square" lIns="0" tIns="0" rIns="0" bIns="0" rtlCol="0" anchor="ctr"/>
-          <a:lstStyle/>
-          <a:p>
-            <a:pPr indent="0" marL="0">
-              <a:buNone/>
-            </a:pPr>
-            <a:r>
-              <a:rPr lang="en-US" sz="1500" b="1" dirty="0">
-                <a:solidFill>
-                  <a:srgbClr val="0E1C42"/>
-                </a:solidFill>
-                <a:latin typeface="Calibri" pitchFamily="34" charset="0"/>
-                <a:ea typeface="Calibri" pitchFamily="34" charset="-122"/>
-                <a:cs typeface="Calibri" pitchFamily="34" charset="-120"/>
-              </a:rPr>
-              <a:t>cross</a:t>
-            </a:r>
-            <a:pPr indent="0" marL="0">
-              <a:buNone/>
-            </a:pPr>
-            <a:endParaRPr lang="en-US" sz="1500" dirty="0"/>
-          </a:p>
-          <a:p>
-            <a:pPr indent="0" marL="0">
-              <a:buNone/>
-            </a:pPr>
-            <a:r>
-              <a:rPr lang="en-US" sz="1200" dirty="0">
+          <p:cNvPr id="10" name="Text 8"/>
+          <p:cNvSpPr/>
+          <p:nvPr/>
+        </p:nvSpPr>
+        <p:spPr>
+          <a:xfrm>
+            <a:off x="594360" y="2688336"/>
+            <a:ext cx="7863840" cy="402336"/>
+          </a:xfrm>
+          <a:prstGeom prst="rect">
+            <a:avLst/>
+          </a:prstGeom>
+          <a:noFill/>
+          <a:ln/>
+        </p:spPr>
+        <p:txBody>
+          <a:bodyPr wrap="square" lIns="0" tIns="0" rIns="0" bIns="0" rtlCol="0" anchor="ctr"/>
+          <a:lstStyle/>
+          <a:p>
+            <a:pPr indent="0" marL="0">
+              <a:buNone/>
+            </a:pPr>
+            <a:r>
+              <a:rPr lang="en-US" sz="1600" dirty="0">
                 <a:solidFill>
                   <a:srgbClr val="1E293B"/>
                 </a:solidFill>
@@ -3129,30 +3151,30 @@
                 <a:ea typeface="Calibri" pitchFamily="34" charset="-122"/>
                 <a:cs typeface="Calibri" pitchFamily="34" charset="-120"/>
               </a:rPr>
-              <a:t>Angry or annoyed.</a:t>
-            </a:r>
-            <a:endParaRPr lang="en-US" sz="1500" dirty="0"/>
-          </a:p>
-        </p:txBody>
-      </p:sp>
-      <p:sp>
-        <p:nvSpPr>
-          <p:cNvPr id="10" name="Shape 8"/>
-          <p:cNvSpPr/>
-          <p:nvPr/>
-        </p:nvSpPr>
-        <p:spPr>
-          <a:xfrm>
-            <a:off x="4572000" y="1755648"/>
-            <a:ext cx="3840480" cy="640080"/>
+              <a:t>jumped jump jumps jumping</a:t>
+            </a:r>
+            <a:endParaRPr lang="en-US" sz="1600" dirty="0"/>
+          </a:p>
+        </p:txBody>
+      </p:sp>
+      <p:sp>
+        <p:nvSpPr>
+          <p:cNvPr id="11" name="Shape 9"/>
+          <p:cNvSpPr/>
+          <p:nvPr/>
+        </p:nvSpPr>
+        <p:spPr>
+          <a:xfrm>
+            <a:off x="365760" y="3273552"/>
+            <a:ext cx="8412480" cy="658368"/>
           </a:xfrm>
           <a:prstGeom prst="roundRect">
             <a:avLst>
-              <a:gd name="adj" fmla="val 14286"/>
+              <a:gd name="adj" fmla="val 13889"/>
             </a:avLst>
           </a:prstGeom>
           <a:solidFill>
-            <a:srgbClr val="FEF6E8"/>
+            <a:srgbClr val="FFFFFF"/>
           </a:solidFill>
           <a:ln/>
           <a:effectLst>
@@ -3166,50 +3188,30 @@
       </p:sp>
       <p:sp>
         <p:nvSpPr>
-          <p:cNvPr id="11" name="Text 9"/>
-          <p:cNvSpPr/>
-          <p:nvPr/>
-        </p:nvSpPr>
-        <p:spPr>
-          <a:xfrm>
-            <a:off x="4709160" y="1810512"/>
-            <a:ext cx="3566160" cy="530352"/>
-          </a:xfrm>
-          <a:prstGeom prst="rect">
-            <a:avLst/>
-          </a:prstGeom>
-          <a:noFill/>
-          <a:ln/>
-        </p:spPr>
-        <p:txBody>
-          <a:bodyPr wrap="square" lIns="0" tIns="0" rIns="0" bIns="0" rtlCol="0" anchor="ctr"/>
-          <a:lstStyle/>
-          <a:p>
-            <a:pPr indent="0" marL="0">
-              <a:buNone/>
-            </a:pPr>
-            <a:r>
-              <a:rPr lang="en-US" sz="1500" b="1" dirty="0">
-                <a:solidFill>
-                  <a:srgbClr val="0E1C42"/>
-                </a:solidFill>
-                <a:latin typeface="Calibri" pitchFamily="34" charset="0"/>
-                <a:ea typeface="Calibri" pitchFamily="34" charset="-122"/>
-                <a:cs typeface="Calibri" pitchFamily="34" charset="-120"/>
-              </a:rPr>
-              <a:t>celebrate</a:t>
-            </a:r>
-            <a:pPr indent="0" marL="0">
-              <a:buNone/>
-            </a:pPr>
-            <a:endParaRPr lang="en-US" sz="1500" dirty="0"/>
-          </a:p>
-          <a:p>
-            <a:pPr indent="0" marL="0">
-              <a:buNone/>
-            </a:pPr>
-            <a:r>
-              <a:rPr lang="en-US" sz="1200" dirty="0">
+          <p:cNvPr id="12" name="Text 10"/>
+          <p:cNvSpPr/>
+          <p:nvPr/>
+        </p:nvSpPr>
+        <p:spPr>
+          <a:xfrm>
+            <a:off x="594360" y="3419856"/>
+            <a:ext cx="7863840" cy="402336"/>
+          </a:xfrm>
+          <a:prstGeom prst="rect">
+            <a:avLst/>
+          </a:prstGeom>
+          <a:noFill/>
+          <a:ln/>
+        </p:spPr>
+        <p:txBody>
+          <a:bodyPr wrap="square" lIns="0" tIns="0" rIns="0" bIns="0" rtlCol="0" anchor="ctr"/>
+          <a:lstStyle/>
+          <a:p>
+            <a:pPr indent="0" marL="0">
+              <a:buNone/>
+            </a:pPr>
+            <a:r>
+              <a:rPr lang="en-US" sz="1600" dirty="0">
                 <a:solidFill>
                   <a:srgbClr val="1E293B"/>
                 </a:solidFill>
@@ -3217,7 +3219,46 @@
                 <a:ea typeface="Calibri" pitchFamily="34" charset="-122"/>
                 <a:cs typeface="Calibri" pitchFamily="34" charset="-120"/>
               </a:rPr>
-              <a:t>To do something special because of good news.</a:t>
+              <a:t>landing lands land landed</a:t>
+            </a:r>
+            <a:endParaRPr lang="en-US" sz="1600" dirty="0"/>
+          </a:p>
+        </p:txBody>
+      </p:sp>
+      <p:sp>
+        <p:nvSpPr>
+          <p:cNvPr id="13" name="Text 11"/>
+          <p:cNvSpPr/>
+          <p:nvPr/>
+        </p:nvSpPr>
+        <p:spPr>
+          <a:xfrm>
+            <a:off x="365760" y="4050792"/>
+            <a:ext cx="8412480" cy="365760"/>
+          </a:xfrm>
+          <a:prstGeom prst="rect">
+            <a:avLst/>
+          </a:prstGeom>
+          <a:noFill/>
+          <a:ln/>
+        </p:spPr>
+        <p:txBody>
+          <a:bodyPr wrap="square" lIns="0" tIns="0" rIns="0" bIns="0" rtlCol="0" anchor="ctr"/>
+          <a:lstStyle/>
+          <a:p>
+            <a:pPr indent="0" marL="0">
+              <a:buNone/>
+            </a:pPr>
+            <a:r>
+              <a:rPr lang="en-US" sz="1500" i="1" dirty="0">
+                <a:solidFill>
+                  <a:srgbClr val="64748B"/>
+                </a:solidFill>
+                <a:latin typeface="Calibri" pitchFamily="34" charset="0"/>
+                <a:ea typeface="Calibri" pitchFamily="34" charset="-122"/>
+                <a:cs typeface="Calibri" pitchFamily="34" charset="-120"/>
+              </a:rPr>
+              <a:t>Your turn. Tap the past-tense verb in each row. Only one word in each row shows an action that already happened. Tap a word to check your answer. If it turns green, you got it.</a:t>
             </a:r>
             <a:endParaRPr lang="en-US" sz="1500" dirty="0"/>
           </a:p>
@@ -3237,7 +3278,7 @@
     <p:bg>
       <p:bgPr>
         <a:solidFill>
-          <a:srgbClr val="E5F7FC"/>
+          <a:srgbClr val="F8FAFC"/>
         </a:solidFill>
       </p:bgPr>
     </p:bg>
@@ -3257,180 +3298,116 @@
       </p:grpSpPr>
       <p:sp>
         <p:nvSpPr>
-          <p:cNvPr id="2" name="Text 0"/>
-          <p:cNvSpPr/>
-          <p:nvPr/>
-        </p:nvSpPr>
-        <p:spPr>
-          <a:xfrm>
-            <a:off x="365760" y="164592"/>
-            <a:ext cx="5943600" cy="566928"/>
-          </a:xfrm>
-          <a:prstGeom prst="rect">
-            <a:avLst/>
-          </a:prstGeom>
-          <a:noFill/>
-          <a:ln/>
-        </p:spPr>
-        <p:txBody>
-          <a:bodyPr wrap="square" lIns="0" tIns="0" rIns="0" bIns="0" rtlCol="0" anchor="ctr"/>
-          <a:lstStyle/>
-          <a:p>
-            <a:pPr algn="l" indent="0" marL="0">
-              <a:buNone/>
-            </a:pPr>
-            <a:r>
-              <a:rPr lang="en-US" sz="2800" b="1" dirty="0">
-                <a:solidFill>
-                  <a:srgbClr val="0E1C42"/>
-                </a:solidFill>
-                <a:latin typeface="Calibri" pitchFamily="34" charset="0"/>
-                <a:ea typeface="Calibri" pitchFamily="34" charset="-122"/>
-                <a:cs typeface="Calibri" pitchFamily="34" charset="-120"/>
-              </a:rPr>
-              <a:t>🔠 Spelling: Three sounds of -ed</a:t>
-            </a:r>
-            <a:endParaRPr lang="en-US" sz="2800" dirty="0"/>
-          </a:p>
-        </p:txBody>
-      </p:sp>
-      <p:sp>
-        <p:nvSpPr>
-          <p:cNvPr id="3" name="Shape 1"/>
-          <p:cNvSpPr/>
-          <p:nvPr/>
-        </p:nvSpPr>
-        <p:spPr>
-          <a:xfrm>
-            <a:off x="365760" y="749808"/>
-            <a:ext cx="8412480" cy="0"/>
-          </a:xfrm>
-          <a:prstGeom prst="line">
-            <a:avLst/>
-          </a:prstGeom>
-          <a:noFill/>
-          <a:ln w="19050">
-            <a:solidFill>
-              <a:srgbClr val="8B8BB5"/>
-            </a:solidFill>
-            <a:prstDash val="solid"/>
-          </a:ln>
-        </p:spPr>
-      </p:sp>
-      <p:sp>
-        <p:nvSpPr>
-          <p:cNvPr id="4" name="Shape 2"/>
-          <p:cNvSpPr/>
-          <p:nvPr/>
-        </p:nvSpPr>
-        <p:spPr>
-          <a:xfrm>
-            <a:off x="6492240" y="173736"/>
-            <a:ext cx="2286000" cy="502920"/>
+          <p:cNvPr id="2" name="Shape 0"/>
+          <p:cNvSpPr/>
+          <p:nvPr/>
+        </p:nvSpPr>
+        <p:spPr>
+          <a:xfrm>
+            <a:off x="0" y="0"/>
+            <a:ext cx="9144000" cy="566928"/>
+          </a:xfrm>
+          <a:prstGeom prst="rect">
+            <a:avLst/>
+          </a:prstGeom>
+          <a:solidFill>
+            <a:srgbClr val="C7922C"/>
+          </a:solidFill>
+          <a:ln/>
+        </p:spPr>
+      </p:sp>
+      <p:sp>
+        <p:nvSpPr>
+          <p:cNvPr id="3" name="Text 1"/>
+          <p:cNvSpPr/>
+          <p:nvPr/>
+        </p:nvSpPr>
+        <p:spPr>
+          <a:xfrm>
+            <a:off x="365760" y="54864"/>
+            <a:ext cx="8412480" cy="457200"/>
+          </a:xfrm>
+          <a:prstGeom prst="rect">
+            <a:avLst/>
+          </a:prstGeom>
+          <a:noFill/>
+          <a:ln/>
+        </p:spPr>
+        <p:txBody>
+          <a:bodyPr wrap="square" lIns="0" tIns="0" rIns="0" bIns="0" rtlCol="0" anchor="ctr"/>
+          <a:lstStyle/>
+          <a:p>
+            <a:pPr indent="0" marL="0">
+              <a:buNone/>
+            </a:pPr>
+            <a:r>
+              <a:rPr lang="en-US" sz="2200" b="1" dirty="0">
+                <a:solidFill>
+                  <a:srgbClr val="FFFFFF"/>
+                </a:solidFill>
+                <a:latin typeface="Calibri" pitchFamily="34" charset="0"/>
+                <a:ea typeface="Calibri" pitchFamily="34" charset="-122"/>
+                <a:cs typeface="Calibri" pitchFamily="34" charset="-120"/>
+              </a:rPr>
+              <a:t>✏️  Grammar</a:t>
+            </a:r>
+            <a:endParaRPr lang="en-US" sz="2200" dirty="0"/>
+          </a:p>
+        </p:txBody>
+      </p:sp>
+      <p:sp>
+        <p:nvSpPr>
+          <p:cNvPr id="4" name="Text 2"/>
+          <p:cNvSpPr/>
+          <p:nvPr/>
+        </p:nvSpPr>
+        <p:spPr>
+          <a:xfrm>
+            <a:off x="365760" y="777240"/>
+            <a:ext cx="8229600" cy="237744"/>
+          </a:xfrm>
+          <a:prstGeom prst="rect">
+            <a:avLst/>
+          </a:prstGeom>
+          <a:noFill/>
+          <a:ln/>
+        </p:spPr>
+        <p:txBody>
+          <a:bodyPr wrap="square" lIns="0" tIns="0" rIns="0" bIns="0" rtlCol="0" anchor="ctr"/>
+          <a:lstStyle/>
+          <a:p>
+            <a:pPr indent="0" marL="0">
+              <a:buNone/>
+            </a:pPr>
+            <a:r>
+              <a:rPr lang="en-US" sz="1100" b="1" spc="100" kern="0" dirty="0">
+                <a:solidFill>
+                  <a:srgbClr val="C7922C"/>
+                </a:solidFill>
+                <a:latin typeface="Calibri" pitchFamily="34" charset="0"/>
+                <a:ea typeface="Calibri" pitchFamily="34" charset="-122"/>
+                <a:cs typeface="Calibri" pitchFamily="34" charset="-120"/>
+              </a:rPr>
+              <a:t>PAST-TENSE VERBS</a:t>
+            </a:r>
+            <a:endParaRPr lang="en-US" sz="1100" dirty="0"/>
+          </a:p>
+        </p:txBody>
+      </p:sp>
+      <p:sp>
+        <p:nvSpPr>
+          <p:cNvPr id="5" name="Shape 3"/>
+          <p:cNvSpPr/>
+          <p:nvPr/>
+        </p:nvSpPr>
+        <p:spPr>
+          <a:xfrm>
+            <a:off x="365760" y="1078992"/>
+            <a:ext cx="8412480" cy="658368"/>
           </a:xfrm>
           <a:prstGeom prst="roundRect">
             <a:avLst>
-              <a:gd name="adj" fmla="val 21818"/>
-            </a:avLst>
-          </a:prstGeom>
-          <a:solidFill>
-            <a:srgbClr val="8B8BB5"/>
-          </a:solidFill>
-          <a:ln/>
-        </p:spPr>
-      </p:sp>
-      <p:sp>
-        <p:nvSpPr>
-          <p:cNvPr id="5" name="Text 3"/>
-          <p:cNvSpPr/>
-          <p:nvPr/>
-        </p:nvSpPr>
-        <p:spPr>
-          <a:xfrm>
-            <a:off x="6492240" y="173736"/>
-            <a:ext cx="2286000" cy="502920"/>
-          </a:xfrm>
-          <a:prstGeom prst="rect">
-            <a:avLst/>
-          </a:prstGeom>
-          <a:noFill/>
-          <a:ln/>
-        </p:spPr>
-        <p:txBody>
-          <a:bodyPr wrap="square" lIns="0" tIns="0" rIns="0" bIns="0" rtlCol="0" anchor="ctr"/>
-          <a:lstStyle/>
-          <a:p>
-            <a:pPr algn="ctr" indent="0" marL="0">
-              <a:buNone/>
-            </a:pPr>
-            <a:r>
-              <a:rPr lang="en-US" sz="1100" b="1" dirty="0">
-                <a:solidFill>
-                  <a:srgbClr val="0E1C42"/>
-                </a:solidFill>
-                <a:latin typeface="Calibri" pitchFamily="34" charset="0"/>
-                <a:ea typeface="Calibri" pitchFamily="34" charset="-122"/>
-                <a:cs typeface="Calibri" pitchFamily="34" charset="-120"/>
-              </a:rPr>
-              <a:t>CHAT PROMPT</a:t>
-            </a:r>
-            <a:endParaRPr lang="en-US" sz="1100" dirty="0"/>
-          </a:p>
-        </p:txBody>
-      </p:sp>
-      <p:sp>
-        <p:nvSpPr>
-          <p:cNvPr id="6" name="Text 4"/>
-          <p:cNvSpPr/>
-          <p:nvPr/>
-        </p:nvSpPr>
-        <p:spPr>
-          <a:xfrm>
-            <a:off x="457200" y="1005840"/>
-            <a:ext cx="8046720" cy="292608"/>
-          </a:xfrm>
-          <a:prstGeom prst="rect">
-            <a:avLst/>
-          </a:prstGeom>
-          <a:noFill/>
-          <a:ln/>
-        </p:spPr>
-        <p:txBody>
-          <a:bodyPr wrap="square" lIns="0" tIns="0" rIns="0" bIns="0" rtlCol="0" anchor="ctr"/>
-          <a:lstStyle/>
-          <a:p>
-            <a:pPr indent="0" marL="0">
-              <a:buNone/>
-            </a:pPr>
-            <a:r>
-              <a:rPr lang="en-US" sz="1100" b="1" spc="200" kern="0" dirty="0">
-                <a:solidFill>
-                  <a:srgbClr val="C7922C"/>
-                </a:solidFill>
-                <a:latin typeface="Calibri" pitchFamily="34" charset="0"/>
-                <a:ea typeface="Calibri" pitchFamily="34" charset="-122"/>
-                <a:cs typeface="Calibri" pitchFamily="34" charset="-120"/>
-              </a:rPr>
-              <a:t>WORD BANK — Sort these words!</a:t>
-            </a:r>
-            <a:endParaRPr lang="en-US" sz="1100" dirty="0"/>
-          </a:p>
-        </p:txBody>
-      </p:sp>
-      <p:sp>
-        <p:nvSpPr>
-          <p:cNvPr id="7" name="Shape 5"/>
-          <p:cNvSpPr/>
-          <p:nvPr/>
-        </p:nvSpPr>
-        <p:spPr>
-          <a:xfrm>
-            <a:off x="457200" y="1371600"/>
-            <a:ext cx="8229600" cy="914400"/>
-          </a:xfrm>
-          <a:prstGeom prst="roundRect">
-            <a:avLst>
-              <a:gd name="adj" fmla="val 10000"/>
+              <a:gd name="adj" fmla="val 13889"/>
             </a:avLst>
           </a:prstGeom>
           <a:solidFill>
@@ -3448,38 +3425,66 @@
       </p:sp>
       <p:sp>
         <p:nvSpPr>
-          <p:cNvPr id="8" name="Text 6"/>
-          <p:cNvSpPr/>
-          <p:nvPr/>
-        </p:nvSpPr>
-        <p:spPr>
-          <a:xfrm>
-            <a:off x="640080" y="1463040"/>
-            <a:ext cx="7863840" cy="731520"/>
-          </a:xfrm>
-          <a:prstGeom prst="rect">
-            <a:avLst/>
-          </a:prstGeom>
-          <a:noFill/>
-          <a:ln/>
-        </p:spPr>
-        <p:txBody>
-          <a:bodyPr wrap="square" lIns="0" tIns="0" rIns="0" bIns="0" rtlCol="0" anchor="ctr"/>
-          <a:lstStyle/>
-          <a:p>
-            <a:pPr algn="ctr" indent="0" marL="0">
+          <p:cNvPr id="6" name="Text 4"/>
+          <p:cNvSpPr/>
+          <p:nvPr/>
+        </p:nvSpPr>
+        <p:spPr>
+          <a:xfrm>
+            <a:off x="594360" y="1225296"/>
+            <a:ext cx="7863840" cy="402336"/>
+          </a:xfrm>
+          <a:prstGeom prst="rect">
+            <a:avLst/>
+          </a:prstGeom>
+          <a:noFill/>
+          <a:ln/>
+        </p:spPr>
+        <p:txBody>
+          <a:bodyPr wrap="square" lIns="0" tIns="0" rIns="0" bIns="0" rtlCol="0" anchor="ctr"/>
+          <a:lstStyle/>
+          <a:p>
+            <a:pPr indent="0" marL="0">
               <a:buNone/>
             </a:pPr>
             <a:r>
               <a:rPr lang="en-US" sz="1600" dirty="0">
                 <a:solidFill>
-                  <a:srgbClr val="0E1C42"/>
-                </a:solidFill>
-                <a:latin typeface="Calibri" pitchFamily="34" charset="0"/>
-                <a:ea typeface="Calibri" pitchFamily="34" charset="-122"/>
-                <a:cs typeface="Calibri" pitchFamily="34" charset="-120"/>
-              </a:rPr>
-              <a:t>walked     jumped     helped     called     played     mailed     wanted     landed</a:t>
+                  <a:srgbClr val="1E293B"/>
+                </a:solidFill>
+                <a:latin typeface="Calibri" pitchFamily="34" charset="0"/>
+                <a:ea typeface="Calibri" pitchFamily="34" charset="-122"/>
+                <a:cs typeface="Calibri" pitchFamily="34" charset="-120"/>
+              </a:rPr>
+              <a:t>walk </a:t>
+            </a:r>
+            <a:pPr indent="0" marL="0">
+              <a:buNone/>
+            </a:pPr>
+            <a:r>
+              <a:rPr lang="en-US" sz="1600" b="1" dirty="0">
+                <a:solidFill>
+                  <a:srgbClr val="34B76F"/>
+                </a:solidFill>
+                <a:latin typeface="Calibri" pitchFamily="34" charset="0"/>
+                <a:ea typeface="Calibri" pitchFamily="34" charset="-122"/>
+                <a:cs typeface="Calibri" pitchFamily="34" charset="-120"/>
+              </a:rPr>
+              <a:t>walked</a:t>
+            </a:r>
+            <a:pPr indent="0" marL="0">
+              <a:buNone/>
+            </a:pPr>
+            <a:r>
+              <a:rPr lang="en-US" sz="1600" dirty="0">
+                <a:solidFill>
+                  <a:srgbClr val="1E293B"/>
+                </a:solidFill>
+                <a:latin typeface="Calibri" pitchFamily="34" charset="0"/>
+                <a:ea typeface="Calibri" pitchFamily="34" charset="-122"/>
+                <a:cs typeface="Calibri" pitchFamily="34" charset="-120"/>
+              </a:rPr>
+              <a:t> walking walks</a:t>
             </a:r>
             <a:endParaRPr lang="en-US" sz="1600" dirty="0"/>
           </a:p>
@@ -3487,22 +3492,22 @@
       </p:sp>
       <p:sp>
         <p:nvSpPr>
-          <p:cNvPr id="9" name="Shape 7"/>
-          <p:cNvSpPr/>
-          <p:nvPr/>
-        </p:nvSpPr>
-        <p:spPr>
-          <a:xfrm>
-            <a:off x="457200" y="2468880"/>
-            <a:ext cx="3794760" cy="457200"/>
+          <p:cNvPr id="7" name="Shape 5"/>
+          <p:cNvSpPr/>
+          <p:nvPr/>
+        </p:nvSpPr>
+        <p:spPr>
+          <a:xfrm>
+            <a:off x="365760" y="1810512"/>
+            <a:ext cx="8412480" cy="658368"/>
           </a:xfrm>
           <a:prstGeom prst="roundRect">
             <a:avLst>
-              <a:gd name="adj" fmla="val 20000"/>
+              <a:gd name="adj" fmla="val 13889"/>
             </a:avLst>
           </a:prstGeom>
           <a:solidFill>
-            <a:srgbClr val="F0E8FF"/>
+            <a:srgbClr val="FFFFFF"/>
           </a:solidFill>
           <a:ln/>
           <a:effectLst>
@@ -3516,61 +3521,89 @@
       </p:sp>
       <p:sp>
         <p:nvSpPr>
-          <p:cNvPr id="10" name="Text 8"/>
-          <p:cNvSpPr/>
-          <p:nvPr/>
-        </p:nvSpPr>
-        <p:spPr>
-          <a:xfrm>
-            <a:off x="548640" y="2514600"/>
-            <a:ext cx="3611880" cy="365760"/>
-          </a:xfrm>
-          <a:prstGeom prst="rect">
-            <a:avLst/>
-          </a:prstGeom>
-          <a:noFill/>
-          <a:ln/>
-        </p:spPr>
-        <p:txBody>
-          <a:bodyPr wrap="square" lIns="0" tIns="0" rIns="0" bIns="0" rtlCol="0" anchor="ctr"/>
-          <a:lstStyle/>
-          <a:p>
-            <a:pPr algn="ctr" indent="0" marL="0">
-              <a:buNone/>
-            </a:pPr>
-            <a:r>
-              <a:rPr lang="en-US" sz="1400" b="1" dirty="0">
-                <a:solidFill>
-                  <a:srgbClr val="0E1C42"/>
-                </a:solidFill>
-                <a:latin typeface="Calibri" pitchFamily="34" charset="0"/>
-                <a:ea typeface="Calibri" pitchFamily="34" charset="-122"/>
-                <a:cs typeface="Calibri" pitchFamily="34" charset="-120"/>
-              </a:rPr>
-              <a:t>ed=/t/</a:t>
-            </a:r>
-            <a:endParaRPr lang="en-US" sz="1400" dirty="0"/>
-          </a:p>
-        </p:txBody>
-      </p:sp>
-      <p:sp>
-        <p:nvSpPr>
-          <p:cNvPr id="11" name="Shape 9"/>
-          <p:cNvSpPr/>
-          <p:nvPr/>
-        </p:nvSpPr>
-        <p:spPr>
-          <a:xfrm>
-            <a:off x="4480560" y="2468880"/>
-            <a:ext cx="3794760" cy="457200"/>
+          <p:cNvPr id="8" name="Text 6"/>
+          <p:cNvSpPr/>
+          <p:nvPr/>
+        </p:nvSpPr>
+        <p:spPr>
+          <a:xfrm>
+            <a:off x="594360" y="1956816"/>
+            <a:ext cx="7863840" cy="402336"/>
+          </a:xfrm>
+          <a:prstGeom prst="rect">
+            <a:avLst/>
+          </a:prstGeom>
+          <a:noFill/>
+          <a:ln/>
+        </p:spPr>
+        <p:txBody>
+          <a:bodyPr wrap="square" lIns="0" tIns="0" rIns="0" bIns="0" rtlCol="0" anchor="ctr"/>
+          <a:lstStyle/>
+          <a:p>
+            <a:pPr indent="0" marL="0">
+              <a:buNone/>
+            </a:pPr>
+            <a:r>
+              <a:rPr lang="en-US" sz="1600" dirty="0">
+                <a:solidFill>
+                  <a:srgbClr val="1E293B"/>
+                </a:solidFill>
+                <a:latin typeface="Calibri" pitchFamily="34" charset="0"/>
+                <a:ea typeface="Calibri" pitchFamily="34" charset="-122"/>
+                <a:cs typeface="Calibri" pitchFamily="34" charset="-120"/>
+              </a:rPr>
+              <a:t>help helps </a:t>
+            </a:r>
+            <a:pPr indent="0" marL="0">
+              <a:buNone/>
+            </a:pPr>
+            <a:r>
+              <a:rPr lang="en-US" sz="1600" b="1" dirty="0">
+                <a:solidFill>
+                  <a:srgbClr val="34B76F"/>
+                </a:solidFill>
+                <a:latin typeface="Calibri" pitchFamily="34" charset="0"/>
+                <a:ea typeface="Calibri" pitchFamily="34" charset="-122"/>
+                <a:cs typeface="Calibri" pitchFamily="34" charset="-120"/>
+              </a:rPr>
+              <a:t>helped</a:t>
+            </a:r>
+            <a:pPr indent="0" marL="0">
+              <a:buNone/>
+            </a:pPr>
+            <a:r>
+              <a:rPr lang="en-US" sz="1600" dirty="0">
+                <a:solidFill>
+                  <a:srgbClr val="1E293B"/>
+                </a:solidFill>
+                <a:latin typeface="Calibri" pitchFamily="34" charset="0"/>
+                <a:ea typeface="Calibri" pitchFamily="34" charset="-122"/>
+                <a:cs typeface="Calibri" pitchFamily="34" charset="-120"/>
+              </a:rPr>
+              <a:t> helping</a:t>
+            </a:r>
+            <a:endParaRPr lang="en-US" sz="1600" dirty="0"/>
+          </a:p>
+        </p:txBody>
+      </p:sp>
+      <p:sp>
+        <p:nvSpPr>
+          <p:cNvPr id="9" name="Shape 7"/>
+          <p:cNvSpPr/>
+          <p:nvPr/>
+        </p:nvSpPr>
+        <p:spPr>
+          <a:xfrm>
+            <a:off x="365760" y="2542032"/>
+            <a:ext cx="8412480" cy="658368"/>
           </a:xfrm>
           <a:prstGeom prst="roundRect">
             <a:avLst>
-              <a:gd name="adj" fmla="val 20000"/>
+              <a:gd name="adj" fmla="val 13889"/>
             </a:avLst>
           </a:prstGeom>
           <a:solidFill>
-            <a:srgbClr val="F0E8FF"/>
+            <a:srgbClr val="FEF6E8"/>
           </a:solidFill>
           <a:ln/>
           <a:effectLst>
@@ -3584,40 +3617,175 @@
       </p:sp>
       <p:sp>
         <p:nvSpPr>
+          <p:cNvPr id="10" name="Text 8"/>
+          <p:cNvSpPr/>
+          <p:nvPr/>
+        </p:nvSpPr>
+        <p:spPr>
+          <a:xfrm>
+            <a:off x="594360" y="2688336"/>
+            <a:ext cx="7863840" cy="402336"/>
+          </a:xfrm>
+          <a:prstGeom prst="rect">
+            <a:avLst/>
+          </a:prstGeom>
+          <a:noFill/>
+          <a:ln/>
+        </p:spPr>
+        <p:txBody>
+          <a:bodyPr wrap="square" lIns="0" tIns="0" rIns="0" bIns="0" rtlCol="0" anchor="ctr"/>
+          <a:lstStyle/>
+          <a:p>
+            <a:pPr indent="0" marL="0">
+              <a:buNone/>
+            </a:pPr>
+            <a:r>
+              <a:rPr lang="en-US" sz="1600" b="1" dirty="0">
+                <a:solidFill>
+                  <a:srgbClr val="34B76F"/>
+                </a:solidFill>
+                <a:latin typeface="Calibri" pitchFamily="34" charset="0"/>
+                <a:ea typeface="Calibri" pitchFamily="34" charset="-122"/>
+                <a:cs typeface="Calibri" pitchFamily="34" charset="-120"/>
+              </a:rPr>
+              <a:t>jumped</a:t>
+            </a:r>
+            <a:pPr indent="0" marL="0">
+              <a:buNone/>
+            </a:pPr>
+            <a:r>
+              <a:rPr lang="en-US" sz="1600" dirty="0">
+                <a:solidFill>
+                  <a:srgbClr val="1E293B"/>
+                </a:solidFill>
+                <a:latin typeface="Calibri" pitchFamily="34" charset="0"/>
+                <a:ea typeface="Calibri" pitchFamily="34" charset="-122"/>
+                <a:cs typeface="Calibri" pitchFamily="34" charset="-120"/>
+              </a:rPr>
+              <a:t> jump jumps jumping</a:t>
+            </a:r>
+            <a:endParaRPr lang="en-US" sz="1600" dirty="0"/>
+          </a:p>
+        </p:txBody>
+      </p:sp>
+      <p:sp>
+        <p:nvSpPr>
+          <p:cNvPr id="11" name="Shape 9"/>
+          <p:cNvSpPr/>
+          <p:nvPr/>
+        </p:nvSpPr>
+        <p:spPr>
+          <a:xfrm>
+            <a:off x="365760" y="3273552"/>
+            <a:ext cx="8412480" cy="658368"/>
+          </a:xfrm>
+          <a:prstGeom prst="roundRect">
+            <a:avLst>
+              <a:gd name="adj" fmla="val 13889"/>
+            </a:avLst>
+          </a:prstGeom>
+          <a:solidFill>
+            <a:srgbClr val="FFFFFF"/>
+          </a:solidFill>
+          <a:ln/>
+          <a:effectLst>
+            <a:outerShdw sx="100000" sy="100000" kx="0" ky="0" algn="bl" rotWithShape="0" blurRad="101600" dist="38100" dir="2700000">
+              <a:srgbClr val="000000">
+                <a:alpha val="12000"/>
+              </a:srgbClr>
+            </a:outerShdw>
+          </a:effectLst>
+        </p:spPr>
+      </p:sp>
+      <p:sp>
+        <p:nvSpPr>
           <p:cNvPr id="12" name="Text 10"/>
           <p:cNvSpPr/>
           <p:nvPr/>
         </p:nvSpPr>
         <p:spPr>
           <a:xfrm>
-            <a:off x="4572000" y="2514600"/>
-            <a:ext cx="3611880" cy="365760"/>
-          </a:xfrm>
-          <a:prstGeom prst="rect">
-            <a:avLst/>
-          </a:prstGeom>
-          <a:noFill/>
-          <a:ln/>
-        </p:spPr>
-        <p:txBody>
-          <a:bodyPr wrap="square" lIns="0" tIns="0" rIns="0" bIns="0" rtlCol="0" anchor="ctr"/>
-          <a:lstStyle/>
-          <a:p>
-            <a:pPr algn="ctr" indent="0" marL="0">
-              <a:buNone/>
-            </a:pPr>
-            <a:r>
-              <a:rPr lang="en-US" sz="1400" b="1" dirty="0">
-                <a:solidFill>
-                  <a:srgbClr val="0E1C42"/>
-                </a:solidFill>
-                <a:latin typeface="Calibri" pitchFamily="34" charset="0"/>
-                <a:ea typeface="Calibri" pitchFamily="34" charset="-122"/>
-                <a:cs typeface="Calibri" pitchFamily="34" charset="-120"/>
-              </a:rPr>
-              <a:t>ed=/d/</a:t>
-            </a:r>
-            <a:endParaRPr lang="en-US" sz="1400" dirty="0"/>
+            <a:off x="594360" y="3419856"/>
+            <a:ext cx="7863840" cy="402336"/>
+          </a:xfrm>
+          <a:prstGeom prst="rect">
+            <a:avLst/>
+          </a:prstGeom>
+          <a:noFill/>
+          <a:ln/>
+        </p:spPr>
+        <p:txBody>
+          <a:bodyPr wrap="square" lIns="0" tIns="0" rIns="0" bIns="0" rtlCol="0" anchor="ctr"/>
+          <a:lstStyle/>
+          <a:p>
+            <a:pPr indent="0" marL="0">
+              <a:buNone/>
+            </a:pPr>
+            <a:r>
+              <a:rPr lang="en-US" sz="1600" dirty="0">
+                <a:solidFill>
+                  <a:srgbClr val="1E293B"/>
+                </a:solidFill>
+                <a:latin typeface="Calibri" pitchFamily="34" charset="0"/>
+                <a:ea typeface="Calibri" pitchFamily="34" charset="-122"/>
+                <a:cs typeface="Calibri" pitchFamily="34" charset="-120"/>
+              </a:rPr>
+              <a:t>landing lands land </a:t>
+            </a:r>
+            <a:pPr indent="0" marL="0">
+              <a:buNone/>
+            </a:pPr>
+            <a:r>
+              <a:rPr lang="en-US" sz="1600" b="1" dirty="0">
+                <a:solidFill>
+                  <a:srgbClr val="34B76F"/>
+                </a:solidFill>
+                <a:latin typeface="Calibri" pitchFamily="34" charset="0"/>
+                <a:ea typeface="Calibri" pitchFamily="34" charset="-122"/>
+                <a:cs typeface="Calibri" pitchFamily="34" charset="-120"/>
+              </a:rPr>
+              <a:t>landed</a:t>
+            </a:r>
+            <a:endParaRPr lang="en-US" sz="1600" dirty="0"/>
+          </a:p>
+        </p:txBody>
+      </p:sp>
+      <p:sp>
+        <p:nvSpPr>
+          <p:cNvPr id="13" name="Text 11"/>
+          <p:cNvSpPr/>
+          <p:nvPr/>
+        </p:nvSpPr>
+        <p:spPr>
+          <a:xfrm>
+            <a:off x="365760" y="4050792"/>
+            <a:ext cx="8412480" cy="365760"/>
+          </a:xfrm>
+          <a:prstGeom prst="rect">
+            <a:avLst/>
+          </a:prstGeom>
+          <a:noFill/>
+          <a:ln/>
+        </p:spPr>
+        <p:txBody>
+          <a:bodyPr wrap="square" lIns="0" tIns="0" rIns="0" bIns="0" rtlCol="0" anchor="ctr"/>
+          <a:lstStyle/>
+          <a:p>
+            <a:pPr indent="0" marL="0">
+              <a:buNone/>
+            </a:pPr>
+            <a:r>
+              <a:rPr lang="en-US" sz="1500" b="1" dirty="0">
+                <a:solidFill>
+                  <a:srgbClr val="34B76F"/>
+                </a:solidFill>
+                <a:latin typeface="Calibri" pitchFamily="34" charset="0"/>
+                <a:ea typeface="Calibri" pitchFamily="34" charset="-122"/>
+                <a:cs typeface="Calibri" pitchFamily="34" charset="-120"/>
+              </a:rPr>
+              <a:t>✅  Answers revealed</a:t>
+            </a:r>
+            <a:endParaRPr lang="en-US" sz="1500" dirty="0"/>
           </a:p>
         </p:txBody>
       </p:sp>
@@ -3635,7 +3803,7 @@
     <p:bg>
       <p:bgPr>
         <a:solidFill>
-          <a:srgbClr val="E5F7FC"/>
+          <a:srgbClr val="F8FAFC"/>
         </a:solidFill>
       </p:bgPr>
     </p:bg>
@@ -3655,30 +3823,89 @@
       </p:grpSpPr>
       <p:sp>
         <p:nvSpPr>
-          <p:cNvPr id="2" name="Text 0"/>
-          <p:cNvSpPr/>
-          <p:nvPr/>
-        </p:nvSpPr>
-        <p:spPr>
-          <a:xfrm>
-            <a:off x="365760" y="164592"/>
-            <a:ext cx="5943600" cy="566928"/>
-          </a:xfrm>
-          <a:prstGeom prst="rect">
-            <a:avLst/>
-          </a:prstGeom>
-          <a:noFill/>
-          <a:ln/>
-        </p:spPr>
-        <p:txBody>
-          <a:bodyPr wrap="square" lIns="0" tIns="0" rIns="0" bIns="0" rtlCol="0" anchor="ctr"/>
-          <a:lstStyle/>
-          <a:p>
-            <a:pPr algn="l" indent="0" marL="0">
-              <a:buNone/>
-            </a:pPr>
-            <a:r>
-              <a:rPr lang="en-US" sz="2800" b="1" dirty="0">
+          <p:cNvPr id="2" name="Shape 0"/>
+          <p:cNvSpPr/>
+          <p:nvPr/>
+        </p:nvSpPr>
+        <p:spPr>
+          <a:xfrm>
+            <a:off x="0" y="0"/>
+            <a:ext cx="9144000" cy="566928"/>
+          </a:xfrm>
+          <a:prstGeom prst="rect">
+            <a:avLst/>
+          </a:prstGeom>
+          <a:solidFill>
+            <a:srgbClr val="0E1C42"/>
+          </a:solidFill>
+          <a:ln/>
+        </p:spPr>
+      </p:sp>
+      <p:sp>
+        <p:nvSpPr>
+          <p:cNvPr id="3" name="Text 1"/>
+          <p:cNvSpPr/>
+          <p:nvPr/>
+        </p:nvSpPr>
+        <p:spPr>
+          <a:xfrm>
+            <a:off x="365760" y="54864"/>
+            <a:ext cx="8412480" cy="457200"/>
+          </a:xfrm>
+          <a:prstGeom prst="rect">
+            <a:avLst/>
+          </a:prstGeom>
+          <a:noFill/>
+          <a:ln/>
+        </p:spPr>
+        <p:txBody>
+          <a:bodyPr wrap="square" lIns="0" tIns="0" rIns="0" bIns="0" rtlCol="0" anchor="ctr"/>
+          <a:lstStyle/>
+          <a:p>
+            <a:pPr indent="0" marL="0">
+              <a:buNone/>
+            </a:pPr>
+            <a:r>
+              <a:rPr lang="en-US" sz="2200" b="1" dirty="0">
+                <a:solidFill>
+                  <a:srgbClr val="FFFFFF"/>
+                </a:solidFill>
+                <a:latin typeface="Calibri" pitchFamily="34" charset="0"/>
+                <a:ea typeface="Calibri" pitchFamily="34" charset="-122"/>
+                <a:cs typeface="Calibri" pitchFamily="34" charset="-120"/>
+              </a:rPr>
+              <a:t>🔠  Spelling</a:t>
+            </a:r>
+            <a:endParaRPr lang="en-US" sz="2200" dirty="0"/>
+          </a:p>
+        </p:txBody>
+      </p:sp>
+      <p:sp>
+        <p:nvSpPr>
+          <p:cNvPr id="4" name="Text 2"/>
+          <p:cNvSpPr/>
+          <p:nvPr/>
+        </p:nvSpPr>
+        <p:spPr>
+          <a:xfrm>
+            <a:off x="365760" y="777240"/>
+            <a:ext cx="8229600" cy="237744"/>
+          </a:xfrm>
+          <a:prstGeom prst="rect">
+            <a:avLst/>
+          </a:prstGeom>
+          <a:noFill/>
+          <a:ln/>
+        </p:spPr>
+        <p:txBody>
+          <a:bodyPr wrap="square" lIns="0" tIns="0" rIns="0" bIns="0" rtlCol="0" anchor="ctr"/>
+          <a:lstStyle/>
+          <a:p>
+            <a:pPr indent="0" marL="0">
+              <a:buNone/>
+            </a:pPr>
+            <a:r>
+              <a:rPr lang="en-US" sz="1100" b="1" spc="100" kern="0" dirty="0">
                 <a:solidFill>
                   <a:srgbClr val="0E1C42"/>
                 </a:solidFill>
@@ -3686,116 +3913,76 @@
                 <a:ea typeface="Calibri" pitchFamily="34" charset="-122"/>
                 <a:cs typeface="Calibri" pitchFamily="34" charset="-120"/>
               </a:rPr>
-              <a:t>🔠 Spelling: Three sounds of -ed — Sorted</a:t>
-            </a:r>
-            <a:endParaRPr lang="en-US" sz="2800" dirty="0"/>
-          </a:p>
-        </p:txBody>
-      </p:sp>
-      <p:sp>
-        <p:nvSpPr>
-          <p:cNvPr id="3" name="Shape 1"/>
-          <p:cNvSpPr/>
-          <p:nvPr/>
-        </p:nvSpPr>
-        <p:spPr>
-          <a:xfrm>
-            <a:off x="365760" y="749808"/>
-            <a:ext cx="8412480" cy="0"/>
-          </a:xfrm>
-          <a:prstGeom prst="line">
-            <a:avLst/>
-          </a:prstGeom>
-          <a:noFill/>
+              <a:t>THREE SOUNDS OF -ED</a:t>
+            </a:r>
+            <a:endParaRPr lang="en-US" sz="1100" dirty="0"/>
+          </a:p>
+        </p:txBody>
+      </p:sp>
+      <p:sp>
+        <p:nvSpPr>
+          <p:cNvPr id="5" name="Text 3"/>
+          <p:cNvSpPr/>
+          <p:nvPr/>
+        </p:nvSpPr>
+        <p:spPr>
+          <a:xfrm>
+            <a:off x="365760" y="1078992"/>
+            <a:ext cx="8229600" cy="237744"/>
+          </a:xfrm>
+          <a:prstGeom prst="rect">
+            <a:avLst/>
+          </a:prstGeom>
+          <a:noFill/>
+          <a:ln/>
+        </p:spPr>
+        <p:txBody>
+          <a:bodyPr wrap="square" lIns="0" tIns="0" rIns="0" bIns="0" rtlCol="0" anchor="ctr"/>
+          <a:lstStyle/>
+          <a:p>
+            <a:pPr indent="0" marL="0">
+              <a:buNone/>
+            </a:pPr>
+            <a:r>
+              <a:rPr lang="en-US" sz="1100" b="1" spc="100" kern="0" dirty="0">
+                <a:solidFill>
+                  <a:srgbClr val="64748B"/>
+                </a:solidFill>
+                <a:latin typeface="Calibri" pitchFamily="34" charset="0"/>
+                <a:ea typeface="Calibri" pitchFamily="34" charset="-122"/>
+                <a:cs typeface="Calibri" pitchFamily="34" charset="-120"/>
+              </a:rPr>
+              <a:t>WORD BANK</a:t>
+            </a:r>
+            <a:endParaRPr lang="en-US" sz="1100" dirty="0"/>
+          </a:p>
+        </p:txBody>
+      </p:sp>
+      <p:sp>
+        <p:nvSpPr>
+          <p:cNvPr id="6" name="Shape 4"/>
+          <p:cNvSpPr/>
+          <p:nvPr/>
+        </p:nvSpPr>
+        <p:spPr>
+          <a:xfrm>
+            <a:off x="365760" y="1353312"/>
+            <a:ext cx="8412480" cy="1005840"/>
+          </a:xfrm>
+          <a:prstGeom prst="roundRect">
+            <a:avLst>
+              <a:gd name="adj" fmla="val 9091"/>
+            </a:avLst>
+          </a:prstGeom>
+          <a:solidFill>
+            <a:srgbClr val="FFFFFF"/>
+          </a:solidFill>
           <a:ln w="19050">
             <a:solidFill>
-              <a:srgbClr val="8B8BB5"/>
+              <a:srgbClr val="0E1C42"/>
             </a:solidFill>
             <a:prstDash val="solid"/>
           </a:ln>
-        </p:spPr>
-      </p:sp>
-      <p:sp>
-        <p:nvSpPr>
-          <p:cNvPr id="4" name="Shape 2"/>
-          <p:cNvSpPr/>
-          <p:nvPr/>
-        </p:nvSpPr>
-        <p:spPr>
-          <a:xfrm>
-            <a:off x="6492240" y="173736"/>
-            <a:ext cx="2286000" cy="502920"/>
-          </a:xfrm>
-          <a:prstGeom prst="roundRect">
-            <a:avLst>
-              <a:gd name="adj" fmla="val 21818"/>
-            </a:avLst>
-          </a:prstGeom>
-          <a:solidFill>
-            <a:srgbClr val="8B8BB5"/>
-          </a:solidFill>
-          <a:ln/>
-        </p:spPr>
-      </p:sp>
-      <p:sp>
-        <p:nvSpPr>
-          <p:cNvPr id="5" name="Text 3"/>
-          <p:cNvSpPr/>
-          <p:nvPr/>
-        </p:nvSpPr>
-        <p:spPr>
-          <a:xfrm>
-            <a:off x="6492240" y="173736"/>
-            <a:ext cx="2286000" cy="502920"/>
-          </a:xfrm>
-          <a:prstGeom prst="rect">
-            <a:avLst/>
-          </a:prstGeom>
-          <a:noFill/>
-          <a:ln/>
-        </p:spPr>
-        <p:txBody>
-          <a:bodyPr wrap="square" lIns="0" tIns="0" rIns="0" bIns="0" rtlCol="0" anchor="ctr"/>
-          <a:lstStyle/>
-          <a:p>
-            <a:pPr algn="ctr" indent="0" marL="0">
-              <a:buNone/>
-            </a:pPr>
-            <a:r>
-              <a:rPr lang="en-US" sz="1100" b="1" dirty="0">
-                <a:solidFill>
-                  <a:srgbClr val="0E1C42"/>
-                </a:solidFill>
-                <a:latin typeface="Calibri" pitchFamily="34" charset="0"/>
-                <a:ea typeface="Calibri" pitchFamily="34" charset="-122"/>
-                <a:cs typeface="Calibri" pitchFamily="34" charset="-120"/>
-              </a:rPr>
-              <a:t>CHAT PROMPT</a:t>
-            </a:r>
-            <a:endParaRPr lang="en-US" sz="1100" dirty="0"/>
-          </a:p>
-        </p:txBody>
-      </p:sp>
-      <p:sp>
-        <p:nvSpPr>
-          <p:cNvPr id="6" name="Shape 4"/>
-          <p:cNvSpPr/>
-          <p:nvPr/>
-        </p:nvSpPr>
-        <p:spPr>
-          <a:xfrm>
-            <a:off x="457200" y="1005840"/>
-            <a:ext cx="3794760" cy="457200"/>
-          </a:xfrm>
-          <a:prstGeom prst="roundRect">
-            <a:avLst>
-              <a:gd name="adj" fmla="val 20000"/>
-            </a:avLst>
-          </a:prstGeom>
-          <a:solidFill>
-            <a:srgbClr val="F0E8FF"/>
-          </a:solidFill>
-          <a:ln/>
           <a:effectLst>
             <a:outerShdw sx="100000" sy="100000" kx="0" ky="0" algn="bl" rotWithShape="0" blurRad="101600" dist="38100" dir="2700000">
               <a:srgbClr val="000000">
@@ -3813,24 +4000,24 @@
         </p:nvSpPr>
         <p:spPr>
           <a:xfrm>
-            <a:off x="548640" y="1051560"/>
-            <a:ext cx="3611880" cy="365760"/>
-          </a:xfrm>
-          <a:prstGeom prst="rect">
-            <a:avLst/>
-          </a:prstGeom>
-          <a:noFill/>
-          <a:ln/>
-        </p:spPr>
-        <p:txBody>
-          <a:bodyPr wrap="square" lIns="0" tIns="0" rIns="0" bIns="0" rtlCol="0" anchor="ctr"/>
-          <a:lstStyle/>
-          <a:p>
-            <a:pPr algn="ctr" indent="0" marL="0">
-              <a:buNone/>
-            </a:pPr>
-            <a:r>
-              <a:rPr lang="en-US" sz="1400" b="1" dirty="0">
+            <a:off x="594360" y="1481328"/>
+            <a:ext cx="7955280" cy="749808"/>
+          </a:xfrm>
+          <a:prstGeom prst="rect">
+            <a:avLst/>
+          </a:prstGeom>
+          <a:noFill/>
+          <a:ln/>
+        </p:spPr>
+        <p:txBody>
+          <a:bodyPr wrap="square" lIns="0" tIns="0" rIns="0" bIns="0" rtlCol="0" anchor="ctr"/>
+          <a:lstStyle/>
+          <a:p>
+            <a:pPr indent="0" marL="0">
+              <a:buNone/>
+            </a:pPr>
+            <a:r>
+              <a:rPr lang="en-US" sz="1700" dirty="0">
                 <a:solidFill>
                   <a:srgbClr val="0E1C42"/>
                 </a:solidFill>
@@ -3838,9 +4025,9 @@
                 <a:ea typeface="Calibri" pitchFamily="34" charset="-122"/>
                 <a:cs typeface="Calibri" pitchFamily="34" charset="-120"/>
               </a:rPr>
-              <a:t>ed=/t/</a:t>
-            </a:r>
-            <a:endParaRPr lang="en-US" sz="1400" dirty="0"/>
+              <a:t>walked   ·   jumped   ·   helped   ·   called   ·   played   ·   mailed   ·   wanted   ·   landed</a:t>
+            </a:r>
+            <a:endParaRPr lang="en-US" sz="1700" dirty="0"/>
           </a:p>
         </p:txBody>
       </p:sp>
@@ -3852,297 +4039,34 @@
         </p:nvSpPr>
         <p:spPr>
           <a:xfrm>
-            <a:off x="548640" y="1554480"/>
-            <a:ext cx="3611880" cy="320040"/>
-          </a:xfrm>
-          <a:prstGeom prst="rect">
-            <a:avLst/>
-          </a:prstGeom>
-          <a:noFill/>
-          <a:ln/>
-        </p:spPr>
-        <p:txBody>
-          <a:bodyPr wrap="square" lIns="0" tIns="0" rIns="0" bIns="0" rtlCol="0" anchor="ctr"/>
-          <a:lstStyle/>
-          <a:p>
-            <a:pPr algn="ctr" indent="0" marL="0">
-              <a:buNone/>
-            </a:pPr>
-            <a:r>
-              <a:rPr lang="en-US" sz="1400" b="1" dirty="0">
-                <a:solidFill>
-                  <a:srgbClr val="34B76F"/>
-                </a:solidFill>
-                <a:latin typeface="Calibri" pitchFamily="34" charset="0"/>
-                <a:ea typeface="Calibri" pitchFamily="34" charset="-122"/>
-                <a:cs typeface="Calibri" pitchFamily="34" charset="-120"/>
-              </a:rPr>
-              <a:t>walked</a:t>
-            </a:r>
-            <a:endParaRPr lang="en-US" sz="1400" dirty="0"/>
-          </a:p>
-        </p:txBody>
-      </p:sp>
-      <p:sp>
-        <p:nvSpPr>
-          <p:cNvPr id="9" name="Text 7"/>
-          <p:cNvSpPr/>
-          <p:nvPr/>
-        </p:nvSpPr>
-        <p:spPr>
-          <a:xfrm>
-            <a:off x="548640" y="1901952"/>
-            <a:ext cx="3611880" cy="320040"/>
-          </a:xfrm>
-          <a:prstGeom prst="rect">
-            <a:avLst/>
-          </a:prstGeom>
-          <a:noFill/>
-          <a:ln/>
-        </p:spPr>
-        <p:txBody>
-          <a:bodyPr wrap="square" lIns="0" tIns="0" rIns="0" bIns="0" rtlCol="0" anchor="ctr"/>
-          <a:lstStyle/>
-          <a:p>
-            <a:pPr algn="ctr" indent="0" marL="0">
-              <a:buNone/>
-            </a:pPr>
-            <a:r>
-              <a:rPr lang="en-US" sz="1400" b="1" dirty="0">
-                <a:solidFill>
-                  <a:srgbClr val="34B76F"/>
-                </a:solidFill>
-                <a:latin typeface="Calibri" pitchFamily="34" charset="0"/>
-                <a:ea typeface="Calibri" pitchFamily="34" charset="-122"/>
-                <a:cs typeface="Calibri" pitchFamily="34" charset="-120"/>
-              </a:rPr>
-              <a:t>jumped</a:t>
-            </a:r>
-            <a:endParaRPr lang="en-US" sz="1400" dirty="0"/>
-          </a:p>
-        </p:txBody>
-      </p:sp>
-      <p:sp>
-        <p:nvSpPr>
-          <p:cNvPr id="10" name="Text 8"/>
-          <p:cNvSpPr/>
-          <p:nvPr/>
-        </p:nvSpPr>
-        <p:spPr>
-          <a:xfrm>
-            <a:off x="548640" y="2249424"/>
-            <a:ext cx="3611880" cy="320040"/>
-          </a:xfrm>
-          <a:prstGeom prst="rect">
-            <a:avLst/>
-          </a:prstGeom>
-          <a:noFill/>
-          <a:ln/>
-        </p:spPr>
-        <p:txBody>
-          <a:bodyPr wrap="square" lIns="0" tIns="0" rIns="0" bIns="0" rtlCol="0" anchor="ctr"/>
-          <a:lstStyle/>
-          <a:p>
-            <a:pPr algn="ctr" indent="0" marL="0">
-              <a:buNone/>
-            </a:pPr>
-            <a:r>
-              <a:rPr lang="en-US" sz="1400" b="1" dirty="0">
-                <a:solidFill>
-                  <a:srgbClr val="34B76F"/>
-                </a:solidFill>
-                <a:latin typeface="Calibri" pitchFamily="34" charset="0"/>
-                <a:ea typeface="Calibri" pitchFamily="34" charset="-122"/>
-                <a:cs typeface="Calibri" pitchFamily="34" charset="-120"/>
-              </a:rPr>
-              <a:t>helped</a:t>
-            </a:r>
-            <a:endParaRPr lang="en-US" sz="1400" dirty="0"/>
-          </a:p>
-        </p:txBody>
-      </p:sp>
-      <p:sp>
-        <p:nvSpPr>
-          <p:cNvPr id="11" name="Shape 9"/>
-          <p:cNvSpPr/>
-          <p:nvPr/>
-        </p:nvSpPr>
-        <p:spPr>
-          <a:xfrm>
-            <a:off x="4480560" y="1005840"/>
-            <a:ext cx="3794760" cy="457200"/>
-          </a:xfrm>
-          <a:prstGeom prst="roundRect">
-            <a:avLst>
-              <a:gd name="adj" fmla="val 20000"/>
-            </a:avLst>
-          </a:prstGeom>
-          <a:solidFill>
-            <a:srgbClr val="F0E8FF"/>
-          </a:solidFill>
-          <a:ln/>
-          <a:effectLst>
-            <a:outerShdw sx="100000" sy="100000" kx="0" ky="0" algn="bl" rotWithShape="0" blurRad="101600" dist="38100" dir="2700000">
-              <a:srgbClr val="000000">
-                <a:alpha val="12000"/>
-              </a:srgbClr>
-            </a:outerShdw>
-          </a:effectLst>
-        </p:spPr>
-      </p:sp>
-      <p:sp>
-        <p:nvSpPr>
-          <p:cNvPr id="12" name="Text 10"/>
-          <p:cNvSpPr/>
-          <p:nvPr/>
-        </p:nvSpPr>
-        <p:spPr>
-          <a:xfrm>
-            <a:off x="4572000" y="1051560"/>
-            <a:ext cx="3611880" cy="365760"/>
-          </a:xfrm>
-          <a:prstGeom prst="rect">
-            <a:avLst/>
-          </a:prstGeom>
-          <a:noFill/>
-          <a:ln/>
-        </p:spPr>
-        <p:txBody>
-          <a:bodyPr wrap="square" lIns="0" tIns="0" rIns="0" bIns="0" rtlCol="0" anchor="ctr"/>
-          <a:lstStyle/>
-          <a:p>
-            <a:pPr algn="ctr" indent="0" marL="0">
-              <a:buNone/>
-            </a:pPr>
-            <a:r>
-              <a:rPr lang="en-US" sz="1400" b="1" dirty="0">
-                <a:solidFill>
-                  <a:srgbClr val="0E1C42"/>
-                </a:solidFill>
-                <a:latin typeface="Calibri" pitchFamily="34" charset="0"/>
-                <a:ea typeface="Calibri" pitchFamily="34" charset="-122"/>
-                <a:cs typeface="Calibri" pitchFamily="34" charset="-120"/>
-              </a:rPr>
-              <a:t>ed=/d/</a:t>
-            </a:r>
-            <a:endParaRPr lang="en-US" sz="1400" dirty="0"/>
-          </a:p>
-        </p:txBody>
-      </p:sp>
-      <p:sp>
-        <p:nvSpPr>
-          <p:cNvPr id="13" name="Text 11"/>
-          <p:cNvSpPr/>
-          <p:nvPr/>
-        </p:nvSpPr>
-        <p:spPr>
-          <a:xfrm>
-            <a:off x="4572000" y="1554480"/>
-            <a:ext cx="3611880" cy="320040"/>
-          </a:xfrm>
-          <a:prstGeom prst="rect">
-            <a:avLst/>
-          </a:prstGeom>
-          <a:noFill/>
-          <a:ln/>
-        </p:spPr>
-        <p:txBody>
-          <a:bodyPr wrap="square" lIns="0" tIns="0" rIns="0" bIns="0" rtlCol="0" anchor="ctr"/>
-          <a:lstStyle/>
-          <a:p>
-            <a:pPr algn="ctr" indent="0" marL="0">
-              <a:buNone/>
-            </a:pPr>
-            <a:r>
-              <a:rPr lang="en-US" sz="1400" b="1" dirty="0">
-                <a:solidFill>
-                  <a:srgbClr val="34B76F"/>
-                </a:solidFill>
-                <a:latin typeface="Calibri" pitchFamily="34" charset="0"/>
-                <a:ea typeface="Calibri" pitchFamily="34" charset="-122"/>
-                <a:cs typeface="Calibri" pitchFamily="34" charset="-120"/>
-              </a:rPr>
-              <a:t>called</a:t>
-            </a:r>
-            <a:endParaRPr lang="en-US" sz="1400" dirty="0"/>
-          </a:p>
-        </p:txBody>
-      </p:sp>
-      <p:sp>
-        <p:nvSpPr>
-          <p:cNvPr id="14" name="Text 12"/>
-          <p:cNvSpPr/>
-          <p:nvPr/>
-        </p:nvSpPr>
-        <p:spPr>
-          <a:xfrm>
-            <a:off x="4572000" y="1901952"/>
-            <a:ext cx="3611880" cy="320040"/>
-          </a:xfrm>
-          <a:prstGeom prst="rect">
-            <a:avLst/>
-          </a:prstGeom>
-          <a:noFill/>
-          <a:ln/>
-        </p:spPr>
-        <p:txBody>
-          <a:bodyPr wrap="square" lIns="0" tIns="0" rIns="0" bIns="0" rtlCol="0" anchor="ctr"/>
-          <a:lstStyle/>
-          <a:p>
-            <a:pPr algn="ctr" indent="0" marL="0">
-              <a:buNone/>
-            </a:pPr>
-            <a:r>
-              <a:rPr lang="en-US" sz="1400" b="1" dirty="0">
-                <a:solidFill>
-                  <a:srgbClr val="34B76F"/>
-                </a:solidFill>
-                <a:latin typeface="Calibri" pitchFamily="34" charset="0"/>
-                <a:ea typeface="Calibri" pitchFamily="34" charset="-122"/>
-                <a:cs typeface="Calibri" pitchFamily="34" charset="-120"/>
-              </a:rPr>
-              <a:t>played</a:t>
-            </a:r>
-            <a:endParaRPr lang="en-US" sz="1400" dirty="0"/>
-          </a:p>
-        </p:txBody>
-      </p:sp>
-      <p:sp>
-        <p:nvSpPr>
-          <p:cNvPr id="15" name="Text 13"/>
-          <p:cNvSpPr/>
-          <p:nvPr/>
-        </p:nvSpPr>
-        <p:spPr>
-          <a:xfrm>
-            <a:off x="4572000" y="2249424"/>
-            <a:ext cx="3611880" cy="320040"/>
-          </a:xfrm>
-          <a:prstGeom prst="rect">
-            <a:avLst/>
-          </a:prstGeom>
-          <a:noFill/>
-          <a:ln/>
-        </p:spPr>
-        <p:txBody>
-          <a:bodyPr wrap="square" lIns="0" tIns="0" rIns="0" bIns="0" rtlCol="0" anchor="ctr"/>
-          <a:lstStyle/>
-          <a:p>
-            <a:pPr algn="ctr" indent="0" marL="0">
-              <a:buNone/>
-            </a:pPr>
-            <a:r>
-              <a:rPr lang="en-US" sz="1400" b="1" dirty="0">
-                <a:solidFill>
-                  <a:srgbClr val="34B76F"/>
-                </a:solidFill>
-                <a:latin typeface="Calibri" pitchFamily="34" charset="0"/>
-                <a:ea typeface="Calibri" pitchFamily="34" charset="-122"/>
-                <a:cs typeface="Calibri" pitchFamily="34" charset="-120"/>
-              </a:rPr>
-              <a:t>mailed</a:t>
-            </a:r>
-            <a:endParaRPr lang="en-US" sz="1400" dirty="0"/>
+            <a:off x="365760" y="2514600"/>
+            <a:ext cx="8412480" cy="457200"/>
+          </a:xfrm>
+          <a:prstGeom prst="rect">
+            <a:avLst/>
+          </a:prstGeom>
+          <a:noFill/>
+          <a:ln/>
+        </p:spPr>
+        <p:txBody>
+          <a:bodyPr wrap="square" lIns="0" tIns="0" rIns="0" bIns="0" rtlCol="0" anchor="ctr"/>
+          <a:lstStyle/>
+          <a:p>
+            <a:pPr indent="0" marL="0">
+              <a:buNone/>
+            </a:pPr>
+            <a:r>
+              <a:rPr lang="en-US" sz="1500" i="1" dirty="0">
+                <a:solidFill>
+                  <a:srgbClr val="64748B"/>
+                </a:solidFill>
+                <a:latin typeface="Calibri" pitchFamily="34" charset="0"/>
+                <a:ea typeface="Calibri" pitchFamily="34" charset="-122"/>
+                <a:cs typeface="Calibri" pitchFamily="34" charset="-120"/>
+              </a:rPr>
+              <a:t>Which column does each word belong in?  Columns: ed=/t/  |  ed=/d/  |  ed=/ĕd/</a:t>
+            </a:r>
+            <a:endParaRPr lang="en-US" sz="1500" dirty="0"/>
           </a:p>
         </p:txBody>
       </p:sp>
@@ -4160,7 +4084,7 @@
     <p:bg>
       <p:bgPr>
         <a:solidFill>
-          <a:srgbClr val="FFFFFF"/>
+          <a:srgbClr val="F8FAFC"/>
         </a:solidFill>
       </p:bgPr>
     </p:bg>
@@ -4180,30 +4104,89 @@
       </p:grpSpPr>
       <p:sp>
         <p:nvSpPr>
-          <p:cNvPr id="2" name="Text 0"/>
-          <p:cNvSpPr/>
-          <p:nvPr/>
-        </p:nvSpPr>
-        <p:spPr>
-          <a:xfrm>
-            <a:off x="365760" y="164592"/>
-            <a:ext cx="8412480" cy="566928"/>
-          </a:xfrm>
-          <a:prstGeom prst="rect">
-            <a:avLst/>
-          </a:prstGeom>
-          <a:noFill/>
-          <a:ln/>
-        </p:spPr>
-        <p:txBody>
-          <a:bodyPr wrap="square" lIns="0" tIns="0" rIns="0" bIns="0" rtlCol="0" anchor="ctr"/>
-          <a:lstStyle/>
-          <a:p>
-            <a:pPr algn="l" indent="0" marL="0">
-              <a:buNone/>
-            </a:pPr>
-            <a:r>
-              <a:rPr lang="en-US" sz="2800" b="1" dirty="0">
+          <p:cNvPr id="2" name="Shape 0"/>
+          <p:cNvSpPr/>
+          <p:nvPr/>
+        </p:nvSpPr>
+        <p:spPr>
+          <a:xfrm>
+            <a:off x="0" y="0"/>
+            <a:ext cx="9144000" cy="566928"/>
+          </a:xfrm>
+          <a:prstGeom prst="rect">
+            <a:avLst/>
+          </a:prstGeom>
+          <a:solidFill>
+            <a:srgbClr val="0E1C42"/>
+          </a:solidFill>
+          <a:ln/>
+        </p:spPr>
+      </p:sp>
+      <p:sp>
+        <p:nvSpPr>
+          <p:cNvPr id="3" name="Text 1"/>
+          <p:cNvSpPr/>
+          <p:nvPr/>
+        </p:nvSpPr>
+        <p:spPr>
+          <a:xfrm>
+            <a:off x="365760" y="54864"/>
+            <a:ext cx="8412480" cy="457200"/>
+          </a:xfrm>
+          <a:prstGeom prst="rect">
+            <a:avLst/>
+          </a:prstGeom>
+          <a:noFill/>
+          <a:ln/>
+        </p:spPr>
+        <p:txBody>
+          <a:bodyPr wrap="square" lIns="0" tIns="0" rIns="0" bIns="0" rtlCol="0" anchor="ctr"/>
+          <a:lstStyle/>
+          <a:p>
+            <a:pPr indent="0" marL="0">
+              <a:buNone/>
+            </a:pPr>
+            <a:r>
+              <a:rPr lang="en-US" sz="2200" b="1" dirty="0">
+                <a:solidFill>
+                  <a:srgbClr val="FFFFFF"/>
+                </a:solidFill>
+                <a:latin typeface="Calibri" pitchFamily="34" charset="0"/>
+                <a:ea typeface="Calibri" pitchFamily="34" charset="-122"/>
+                <a:cs typeface="Calibri" pitchFamily="34" charset="-120"/>
+              </a:rPr>
+              <a:t>🔠  Spelling</a:t>
+            </a:r>
+            <a:endParaRPr lang="en-US" sz="2200" dirty="0"/>
+          </a:p>
+        </p:txBody>
+      </p:sp>
+      <p:sp>
+        <p:nvSpPr>
+          <p:cNvPr id="4" name="Text 2"/>
+          <p:cNvSpPr/>
+          <p:nvPr/>
+        </p:nvSpPr>
+        <p:spPr>
+          <a:xfrm>
+            <a:off x="365760" y="777240"/>
+            <a:ext cx="8229600" cy="237744"/>
+          </a:xfrm>
+          <a:prstGeom prst="rect">
+            <a:avLst/>
+          </a:prstGeom>
+          <a:noFill/>
+          <a:ln/>
+        </p:spPr>
+        <p:txBody>
+          <a:bodyPr wrap="square" lIns="0" tIns="0" rIns="0" bIns="0" rtlCol="0" anchor="ctr"/>
+          <a:lstStyle/>
+          <a:p>
+            <a:pPr indent="0" marL="0">
+              <a:buNone/>
+            </a:pPr>
+            <a:r>
+              <a:rPr lang="en-US" sz="1100" b="1" spc="100" kern="0" dirty="0">
                 <a:solidFill>
                   <a:srgbClr val="0E1C42"/>
                 </a:solidFill>
@@ -4211,69 +4194,7 @@
                 <a:ea typeface="Calibri" pitchFamily="34" charset="-122"/>
                 <a:cs typeface="Calibri" pitchFamily="34" charset="-120"/>
               </a:rPr>
-              <a:t>📕 Reading Focus</a:t>
-            </a:r>
-            <a:endParaRPr lang="en-US" sz="2800" dirty="0"/>
-          </a:p>
-        </p:txBody>
-      </p:sp>
-      <p:sp>
-        <p:nvSpPr>
-          <p:cNvPr id="3" name="Shape 1"/>
-          <p:cNvSpPr/>
-          <p:nvPr/>
-        </p:nvSpPr>
-        <p:spPr>
-          <a:xfrm>
-            <a:off x="365760" y="749808"/>
-            <a:ext cx="8412480" cy="0"/>
-          </a:xfrm>
-          <a:prstGeom prst="line">
-            <a:avLst/>
-          </a:prstGeom>
-          <a:noFill/>
-          <a:ln w="19050">
-            <a:solidFill>
-              <a:srgbClr val="55C8E8"/>
-            </a:solidFill>
-            <a:prstDash val="solid"/>
-          </a:ln>
-        </p:spPr>
-      </p:sp>
-      <p:sp>
-        <p:nvSpPr>
-          <p:cNvPr id="4" name="Text 2"/>
-          <p:cNvSpPr/>
-          <p:nvPr/>
-        </p:nvSpPr>
-        <p:spPr>
-          <a:xfrm>
-            <a:off x="457200" y="1005840"/>
-            <a:ext cx="8046720" cy="292608"/>
-          </a:xfrm>
-          <a:prstGeom prst="rect">
-            <a:avLst/>
-          </a:prstGeom>
-          <a:noFill/>
-          <a:ln/>
-        </p:spPr>
-        <p:txBody>
-          <a:bodyPr wrap="square" lIns="0" tIns="0" rIns="0" bIns="0" rtlCol="0" anchor="ctr"/>
-          <a:lstStyle/>
-          <a:p>
-            <a:pPr indent="0" marL="0">
-              <a:buNone/>
-            </a:pPr>
-            <a:r>
-              <a:rPr lang="en-US" sz="1100" b="1" spc="200" kern="0" dirty="0">
-                <a:solidFill>
-                  <a:srgbClr val="C7922C"/>
-                </a:solidFill>
-                <a:latin typeface="Calibri" pitchFamily="34" charset="0"/>
-                <a:ea typeface="Calibri" pitchFamily="34" charset="-122"/>
-                <a:cs typeface="Calibri" pitchFamily="34" charset="-120"/>
-              </a:rPr>
-              <a:t>COPYWORK</a:t>
+              <a:t>THREE SOUNDS OF -ED</a:t>
             </a:r>
             <a:endParaRPr lang="en-US" sz="1100" dirty="0"/>
           </a:p>
@@ -4287,23 +4208,79 @@
         </p:nvSpPr>
         <p:spPr>
           <a:xfrm>
-            <a:off x="457200" y="1325880"/>
-            <a:ext cx="8229600" cy="731520"/>
+            <a:off x="411480" y="1078992"/>
+            <a:ext cx="2712720" cy="457200"/>
           </a:xfrm>
           <a:prstGeom prst="roundRect">
             <a:avLst>
-              <a:gd name="adj" fmla="val 12500"/>
+              <a:gd name="adj" fmla="val 16000"/>
             </a:avLst>
           </a:prstGeom>
           <a:solidFill>
-            <a:srgbClr val="FEF6E8"/>
+            <a:srgbClr val="0E1C42"/>
           </a:solidFill>
-          <a:ln w="12700">
-            <a:solidFill>
-              <a:srgbClr val="C7922C"/>
-            </a:solidFill>
-            <a:prstDash val="solid"/>
-          </a:ln>
+          <a:ln/>
+        </p:spPr>
+      </p:sp>
+      <p:sp>
+        <p:nvSpPr>
+          <p:cNvPr id="6" name="Text 4"/>
+          <p:cNvSpPr/>
+          <p:nvPr/>
+        </p:nvSpPr>
+        <p:spPr>
+          <a:xfrm>
+            <a:off x="457200" y="1133856"/>
+            <a:ext cx="2621280" cy="347472"/>
+          </a:xfrm>
+          <a:prstGeom prst="rect">
+            <a:avLst/>
+          </a:prstGeom>
+          <a:noFill/>
+          <a:ln/>
+        </p:spPr>
+        <p:txBody>
+          <a:bodyPr wrap="square" lIns="0" tIns="0" rIns="0" bIns="0" rtlCol="0" anchor="ctr"/>
+          <a:lstStyle/>
+          <a:p>
+            <a:pPr algn="ctr" indent="0" marL="0">
+              <a:buNone/>
+            </a:pPr>
+            <a:r>
+              <a:rPr lang="en-US" sz="1300" b="1" dirty="0">
+                <a:solidFill>
+                  <a:srgbClr val="FFFFFF"/>
+                </a:solidFill>
+                <a:latin typeface="Calibri" pitchFamily="34" charset="0"/>
+                <a:ea typeface="Calibri" pitchFamily="34" charset="-122"/>
+                <a:cs typeface="Calibri" pitchFamily="34" charset="-120"/>
+              </a:rPr>
+              <a:t>ed=/t/</a:t>
+            </a:r>
+            <a:endParaRPr lang="en-US" sz="1300" dirty="0"/>
+          </a:p>
+        </p:txBody>
+      </p:sp>
+      <p:sp>
+        <p:nvSpPr>
+          <p:cNvPr id="7" name="Shape 5"/>
+          <p:cNvSpPr/>
+          <p:nvPr/>
+        </p:nvSpPr>
+        <p:spPr>
+          <a:xfrm>
+            <a:off x="411480" y="1591056"/>
+            <a:ext cx="2712720" cy="2103120"/>
+          </a:xfrm>
+          <a:prstGeom prst="roundRect">
+            <a:avLst>
+              <a:gd name="adj" fmla="val 4348"/>
+            </a:avLst>
+          </a:prstGeom>
+          <a:solidFill>
+            <a:srgbClr val="FFFFFF"/>
+          </a:solidFill>
+          <a:ln/>
           <a:effectLst>
             <a:outerShdw sx="100000" sy="100000" kx="0" ky="0" algn="bl" rotWithShape="0" blurRad="101600" dist="38100" dir="2700000">
               <a:srgbClr val="000000">
@@ -4315,30 +4292,30 @@
       </p:sp>
       <p:sp>
         <p:nvSpPr>
-          <p:cNvPr id="6" name="Text 4"/>
-          <p:cNvSpPr/>
-          <p:nvPr/>
-        </p:nvSpPr>
-        <p:spPr>
-          <a:xfrm>
-            <a:off x="640080" y="1435608"/>
-            <a:ext cx="7863840" cy="502920"/>
-          </a:xfrm>
-          <a:prstGeom prst="rect">
-            <a:avLst/>
-          </a:prstGeom>
-          <a:noFill/>
-          <a:ln/>
-        </p:spPr>
-        <p:txBody>
-          <a:bodyPr wrap="square" lIns="0" tIns="0" rIns="0" bIns="0" rtlCol="0" anchor="ctr"/>
-          <a:lstStyle/>
-          <a:p>
-            <a:pPr indent="0" marL="0">
-              <a:buNone/>
-            </a:pPr>
-            <a:r>
-              <a:rPr lang="en-US" sz="1800" i="1" dirty="0">
+          <p:cNvPr id="8" name="Text 6"/>
+          <p:cNvSpPr/>
+          <p:nvPr/>
+        </p:nvSpPr>
+        <p:spPr>
+          <a:xfrm>
+            <a:off x="502920" y="1700784"/>
+            <a:ext cx="2529840" cy="1883664"/>
+          </a:xfrm>
+          <a:prstGeom prst="rect">
+            <a:avLst/>
+          </a:prstGeom>
+          <a:noFill/>
+          <a:ln/>
+        </p:spPr>
+        <p:txBody>
+          <a:bodyPr wrap="square" lIns="0" tIns="0" rIns="0" bIns="0" rtlCol="0" anchor="ctr"/>
+          <a:lstStyle/>
+          <a:p>
+            <a:pPr algn="ctr" indent="0" marL="0">
+              <a:buNone/>
+            </a:pPr>
+            <a:r>
+              <a:rPr lang="en-US" sz="1400" dirty="0">
                 <a:solidFill>
                   <a:srgbClr val="1E293B"/>
                 </a:solidFill>
@@ -4346,9 +4323,352 @@
                 <a:ea typeface="Calibri" pitchFamily="34" charset="-122"/>
                 <a:cs typeface="Calibri" pitchFamily="34" charset="-120"/>
               </a:rPr>
-              <a:t>It had been a long and tiring day. Very soon all the Lambchops were asleep.</a:t>
-            </a:r>
-            <a:endParaRPr lang="en-US" sz="1800" dirty="0"/>
+              <a:t>walked</a:t>
+            </a:r>
+            <a:endParaRPr lang="en-US" sz="1400" dirty="0"/>
+          </a:p>
+          <a:p>
+            <a:pPr algn="ctr" indent="0" marL="0">
+              <a:buNone/>
+            </a:pPr>
+            <a:r>
+              <a:rPr lang="en-US" sz="1400" dirty="0">
+                <a:solidFill>
+                  <a:srgbClr val="1E293B"/>
+                </a:solidFill>
+                <a:latin typeface="Calibri" pitchFamily="34" charset="0"/>
+                <a:ea typeface="Calibri" pitchFamily="34" charset="-122"/>
+                <a:cs typeface="Calibri" pitchFamily="34" charset="-120"/>
+              </a:rPr>
+              <a:t>jumped</a:t>
+            </a:r>
+            <a:endParaRPr lang="en-US" sz="1400" dirty="0"/>
+          </a:p>
+          <a:p>
+            <a:pPr algn="ctr" indent="0" marL="0">
+              <a:buNone/>
+            </a:pPr>
+            <a:r>
+              <a:rPr lang="en-US" sz="1400" dirty="0">
+                <a:solidFill>
+                  <a:srgbClr val="1E293B"/>
+                </a:solidFill>
+                <a:latin typeface="Calibri" pitchFamily="34" charset="0"/>
+                <a:ea typeface="Calibri" pitchFamily="34" charset="-122"/>
+                <a:cs typeface="Calibri" pitchFamily="34" charset="-120"/>
+              </a:rPr>
+              <a:t>helped</a:t>
+            </a:r>
+            <a:endParaRPr lang="en-US" sz="1400" dirty="0"/>
+          </a:p>
+        </p:txBody>
+      </p:sp>
+      <p:sp>
+        <p:nvSpPr>
+          <p:cNvPr id="9" name="Shape 7"/>
+          <p:cNvSpPr/>
+          <p:nvPr/>
+        </p:nvSpPr>
+        <p:spPr>
+          <a:xfrm>
+            <a:off x="3215640" y="1078992"/>
+            <a:ext cx="2712720" cy="457200"/>
+          </a:xfrm>
+          <a:prstGeom prst="roundRect">
+            <a:avLst>
+              <a:gd name="adj" fmla="val 16000"/>
+            </a:avLst>
+          </a:prstGeom>
+          <a:solidFill>
+            <a:srgbClr val="0E1C42"/>
+          </a:solidFill>
+          <a:ln/>
+        </p:spPr>
+      </p:sp>
+      <p:sp>
+        <p:nvSpPr>
+          <p:cNvPr id="10" name="Text 8"/>
+          <p:cNvSpPr/>
+          <p:nvPr/>
+        </p:nvSpPr>
+        <p:spPr>
+          <a:xfrm>
+            <a:off x="3261360" y="1133856"/>
+            <a:ext cx="2621280" cy="347472"/>
+          </a:xfrm>
+          <a:prstGeom prst="rect">
+            <a:avLst/>
+          </a:prstGeom>
+          <a:noFill/>
+          <a:ln/>
+        </p:spPr>
+        <p:txBody>
+          <a:bodyPr wrap="square" lIns="0" tIns="0" rIns="0" bIns="0" rtlCol="0" anchor="ctr"/>
+          <a:lstStyle/>
+          <a:p>
+            <a:pPr algn="ctr" indent="0" marL="0">
+              <a:buNone/>
+            </a:pPr>
+            <a:r>
+              <a:rPr lang="en-US" sz="1300" b="1" dirty="0">
+                <a:solidFill>
+                  <a:srgbClr val="FFFFFF"/>
+                </a:solidFill>
+                <a:latin typeface="Calibri" pitchFamily="34" charset="0"/>
+                <a:ea typeface="Calibri" pitchFamily="34" charset="-122"/>
+                <a:cs typeface="Calibri" pitchFamily="34" charset="-120"/>
+              </a:rPr>
+              <a:t>ed=/d/</a:t>
+            </a:r>
+            <a:endParaRPr lang="en-US" sz="1300" dirty="0"/>
+          </a:p>
+        </p:txBody>
+      </p:sp>
+      <p:sp>
+        <p:nvSpPr>
+          <p:cNvPr id="11" name="Shape 9"/>
+          <p:cNvSpPr/>
+          <p:nvPr/>
+        </p:nvSpPr>
+        <p:spPr>
+          <a:xfrm>
+            <a:off x="3215640" y="1591056"/>
+            <a:ext cx="2712720" cy="2103120"/>
+          </a:xfrm>
+          <a:prstGeom prst="roundRect">
+            <a:avLst>
+              <a:gd name="adj" fmla="val 4348"/>
+            </a:avLst>
+          </a:prstGeom>
+          <a:solidFill>
+            <a:srgbClr val="FFFFFF"/>
+          </a:solidFill>
+          <a:ln/>
+          <a:effectLst>
+            <a:outerShdw sx="100000" sy="100000" kx="0" ky="0" algn="bl" rotWithShape="0" blurRad="101600" dist="38100" dir="2700000">
+              <a:srgbClr val="000000">
+                <a:alpha val="12000"/>
+              </a:srgbClr>
+            </a:outerShdw>
+          </a:effectLst>
+        </p:spPr>
+      </p:sp>
+      <p:sp>
+        <p:nvSpPr>
+          <p:cNvPr id="12" name="Text 10"/>
+          <p:cNvSpPr/>
+          <p:nvPr/>
+        </p:nvSpPr>
+        <p:spPr>
+          <a:xfrm>
+            <a:off x="3307080" y="1700784"/>
+            <a:ext cx="2529840" cy="1883664"/>
+          </a:xfrm>
+          <a:prstGeom prst="rect">
+            <a:avLst/>
+          </a:prstGeom>
+          <a:noFill/>
+          <a:ln/>
+        </p:spPr>
+        <p:txBody>
+          <a:bodyPr wrap="square" lIns="0" tIns="0" rIns="0" bIns="0" rtlCol="0" anchor="ctr"/>
+          <a:lstStyle/>
+          <a:p>
+            <a:pPr algn="ctr" indent="0" marL="0">
+              <a:buNone/>
+            </a:pPr>
+            <a:r>
+              <a:rPr lang="en-US" sz="1400" dirty="0">
+                <a:solidFill>
+                  <a:srgbClr val="1E293B"/>
+                </a:solidFill>
+                <a:latin typeface="Calibri" pitchFamily="34" charset="0"/>
+                <a:ea typeface="Calibri" pitchFamily="34" charset="-122"/>
+                <a:cs typeface="Calibri" pitchFamily="34" charset="-120"/>
+              </a:rPr>
+              <a:t>called</a:t>
+            </a:r>
+            <a:endParaRPr lang="en-US" sz="1400" dirty="0"/>
+          </a:p>
+          <a:p>
+            <a:pPr algn="ctr" indent="0" marL="0">
+              <a:buNone/>
+            </a:pPr>
+            <a:r>
+              <a:rPr lang="en-US" sz="1400" dirty="0">
+                <a:solidFill>
+                  <a:srgbClr val="1E293B"/>
+                </a:solidFill>
+                <a:latin typeface="Calibri" pitchFamily="34" charset="0"/>
+                <a:ea typeface="Calibri" pitchFamily="34" charset="-122"/>
+                <a:cs typeface="Calibri" pitchFamily="34" charset="-120"/>
+              </a:rPr>
+              <a:t>played</a:t>
+            </a:r>
+            <a:endParaRPr lang="en-US" sz="1400" dirty="0"/>
+          </a:p>
+          <a:p>
+            <a:pPr algn="ctr" indent="0" marL="0">
+              <a:buNone/>
+            </a:pPr>
+            <a:r>
+              <a:rPr lang="en-US" sz="1400" dirty="0">
+                <a:solidFill>
+                  <a:srgbClr val="1E293B"/>
+                </a:solidFill>
+                <a:latin typeface="Calibri" pitchFamily="34" charset="0"/>
+                <a:ea typeface="Calibri" pitchFamily="34" charset="-122"/>
+                <a:cs typeface="Calibri" pitchFamily="34" charset="-120"/>
+              </a:rPr>
+              <a:t>mailed</a:t>
+            </a:r>
+            <a:endParaRPr lang="en-US" sz="1400" dirty="0"/>
+          </a:p>
+        </p:txBody>
+      </p:sp>
+      <p:sp>
+        <p:nvSpPr>
+          <p:cNvPr id="13" name="Shape 11"/>
+          <p:cNvSpPr/>
+          <p:nvPr/>
+        </p:nvSpPr>
+        <p:spPr>
+          <a:xfrm>
+            <a:off x="6019800" y="1078992"/>
+            <a:ext cx="2712720" cy="457200"/>
+          </a:xfrm>
+          <a:prstGeom prst="roundRect">
+            <a:avLst>
+              <a:gd name="adj" fmla="val 16000"/>
+            </a:avLst>
+          </a:prstGeom>
+          <a:solidFill>
+            <a:srgbClr val="0E1C42"/>
+          </a:solidFill>
+          <a:ln/>
+        </p:spPr>
+      </p:sp>
+      <p:sp>
+        <p:nvSpPr>
+          <p:cNvPr id="14" name="Text 12"/>
+          <p:cNvSpPr/>
+          <p:nvPr/>
+        </p:nvSpPr>
+        <p:spPr>
+          <a:xfrm>
+            <a:off x="6065520" y="1133856"/>
+            <a:ext cx="2621280" cy="347472"/>
+          </a:xfrm>
+          <a:prstGeom prst="rect">
+            <a:avLst/>
+          </a:prstGeom>
+          <a:noFill/>
+          <a:ln/>
+        </p:spPr>
+        <p:txBody>
+          <a:bodyPr wrap="square" lIns="0" tIns="0" rIns="0" bIns="0" rtlCol="0" anchor="ctr"/>
+          <a:lstStyle/>
+          <a:p>
+            <a:pPr algn="ctr" indent="0" marL="0">
+              <a:buNone/>
+            </a:pPr>
+            <a:r>
+              <a:rPr lang="en-US" sz="1300" b="1" dirty="0">
+                <a:solidFill>
+                  <a:srgbClr val="FFFFFF"/>
+                </a:solidFill>
+                <a:latin typeface="Calibri" pitchFamily="34" charset="0"/>
+                <a:ea typeface="Calibri" pitchFamily="34" charset="-122"/>
+                <a:cs typeface="Calibri" pitchFamily="34" charset="-120"/>
+              </a:rPr>
+              <a:t>ed=/ĕd/</a:t>
+            </a:r>
+            <a:endParaRPr lang="en-US" sz="1300" dirty="0"/>
+          </a:p>
+        </p:txBody>
+      </p:sp>
+      <p:sp>
+        <p:nvSpPr>
+          <p:cNvPr id="15" name="Shape 13"/>
+          <p:cNvSpPr/>
+          <p:nvPr/>
+        </p:nvSpPr>
+        <p:spPr>
+          <a:xfrm>
+            <a:off x="6019800" y="1591056"/>
+            <a:ext cx="2712720" cy="2103120"/>
+          </a:xfrm>
+          <a:prstGeom prst="roundRect">
+            <a:avLst>
+              <a:gd name="adj" fmla="val 4348"/>
+            </a:avLst>
+          </a:prstGeom>
+          <a:solidFill>
+            <a:srgbClr val="FFFFFF"/>
+          </a:solidFill>
+          <a:ln/>
+          <a:effectLst>
+            <a:outerShdw sx="100000" sy="100000" kx="0" ky="0" algn="bl" rotWithShape="0" blurRad="101600" dist="38100" dir="2700000">
+              <a:srgbClr val="000000">
+                <a:alpha val="12000"/>
+              </a:srgbClr>
+            </a:outerShdw>
+          </a:effectLst>
+        </p:spPr>
+      </p:sp>
+      <p:sp>
+        <p:nvSpPr>
+          <p:cNvPr id="16" name="Text 14"/>
+          <p:cNvSpPr/>
+          <p:nvPr/>
+        </p:nvSpPr>
+        <p:spPr>
+          <a:xfrm>
+            <a:off x="6111240" y="1700784"/>
+            <a:ext cx="2529840" cy="1883664"/>
+          </a:xfrm>
+          <a:prstGeom prst="rect">
+            <a:avLst/>
+          </a:prstGeom>
+          <a:noFill/>
+          <a:ln/>
+        </p:spPr>
+        <p:txBody>
+          <a:bodyPr wrap="square" lIns="0" tIns="0" rIns="0" bIns="0" rtlCol="0" anchor="ctr"/>
+          <a:lstStyle/>
+          <a:p>
+            <a:pPr algn="ctr" indent="0" marL="0">
+              <a:buNone/>
+            </a:pPr>
+            <a:r>
+              <a:rPr lang="en-US" sz="1400" dirty="0">
+                <a:solidFill>
+                  <a:srgbClr val="1E293B"/>
+                </a:solidFill>
+                <a:latin typeface="Calibri" pitchFamily="34" charset="0"/>
+                <a:ea typeface="Calibri" pitchFamily="34" charset="-122"/>
+                <a:cs typeface="Calibri" pitchFamily="34" charset="-120"/>
+              </a:rPr>
+              <a:t>wanted</a:t>
+            </a:r>
+            <a:endParaRPr lang="en-US" sz="1400" dirty="0"/>
+          </a:p>
+          <a:p>
+            <a:pPr algn="ctr" indent="0" marL="0">
+              <a:buNone/>
+            </a:pPr>
+            <a:r>
+              <a:rPr lang="en-US" sz="1400" dirty="0">
+                <a:solidFill>
+                  <a:srgbClr val="1E293B"/>
+                </a:solidFill>
+                <a:latin typeface="Calibri" pitchFamily="34" charset="0"/>
+                <a:ea typeface="Calibri" pitchFamily="34" charset="-122"/>
+                <a:cs typeface="Calibri" pitchFamily="34" charset="-120"/>
+              </a:rPr>
+              <a:t>landed</a:t>
+            </a:r>
+            <a:endParaRPr lang="en-US" sz="1400" dirty="0"/>
           </a:p>
         </p:txBody>
       </p:sp>
@@ -4386,30 +4706,89 @@
       </p:grpSpPr>
       <p:sp>
         <p:nvSpPr>
-          <p:cNvPr id="2" name="Text 0"/>
-          <p:cNvSpPr/>
-          <p:nvPr/>
-        </p:nvSpPr>
-        <p:spPr>
-          <a:xfrm>
-            <a:off x="365760" y="164592"/>
-            <a:ext cx="8412480" cy="566928"/>
-          </a:xfrm>
-          <a:prstGeom prst="rect">
-            <a:avLst/>
-          </a:prstGeom>
-          <a:noFill/>
-          <a:ln/>
-        </p:spPr>
-        <p:txBody>
-          <a:bodyPr wrap="square" lIns="0" tIns="0" rIns="0" bIns="0" rtlCol="0" anchor="ctr"/>
-          <a:lstStyle/>
-          <a:p>
-            <a:pPr algn="l" indent="0" marL="0">
-              <a:buNone/>
-            </a:pPr>
-            <a:r>
-              <a:rPr lang="en-US" sz="2800" b="1" dirty="0">
+          <p:cNvPr id="2" name="Shape 0"/>
+          <p:cNvSpPr/>
+          <p:nvPr/>
+        </p:nvSpPr>
+        <p:spPr>
+          <a:xfrm>
+            <a:off x="0" y="0"/>
+            <a:ext cx="9144000" cy="566928"/>
+          </a:xfrm>
+          <a:prstGeom prst="rect">
+            <a:avLst/>
+          </a:prstGeom>
+          <a:solidFill>
+            <a:srgbClr val="55C8E8"/>
+          </a:solidFill>
+          <a:ln/>
+        </p:spPr>
+      </p:sp>
+      <p:sp>
+        <p:nvSpPr>
+          <p:cNvPr id="3" name="Text 1"/>
+          <p:cNvSpPr/>
+          <p:nvPr/>
+        </p:nvSpPr>
+        <p:spPr>
+          <a:xfrm>
+            <a:off x="365760" y="54864"/>
+            <a:ext cx="8412480" cy="457200"/>
+          </a:xfrm>
+          <a:prstGeom prst="rect">
+            <a:avLst/>
+          </a:prstGeom>
+          <a:noFill/>
+          <a:ln/>
+        </p:spPr>
+        <p:txBody>
+          <a:bodyPr wrap="square" lIns="0" tIns="0" rIns="0" bIns="0" rtlCol="0" anchor="ctr"/>
+          <a:lstStyle/>
+          <a:p>
+            <a:pPr indent="0" marL="0">
+              <a:buNone/>
+            </a:pPr>
+            <a:r>
+              <a:rPr lang="en-US" sz="2200" b="1" dirty="0">
+                <a:solidFill>
+                  <a:srgbClr val="FFFFFF"/>
+                </a:solidFill>
+                <a:latin typeface="Calibri" pitchFamily="34" charset="0"/>
+                <a:ea typeface="Calibri" pitchFamily="34" charset="-122"/>
+                <a:cs typeface="Calibri" pitchFamily="34" charset="-120"/>
+              </a:rPr>
+              <a:t>📕  Read</a:t>
+            </a:r>
+            <a:endParaRPr lang="en-US" sz="2200" dirty="0"/>
+          </a:p>
+        </p:txBody>
+      </p:sp>
+      <p:sp>
+        <p:nvSpPr>
+          <p:cNvPr id="4" name="Text 2"/>
+          <p:cNvSpPr/>
+          <p:nvPr/>
+        </p:nvSpPr>
+        <p:spPr>
+          <a:xfrm>
+            <a:off x="365760" y="868680"/>
+            <a:ext cx="8412480" cy="502920"/>
+          </a:xfrm>
+          <a:prstGeom prst="rect">
+            <a:avLst/>
+          </a:prstGeom>
+          <a:noFill/>
+          <a:ln/>
+        </p:spPr>
+        <p:txBody>
+          <a:bodyPr wrap="square" lIns="0" tIns="0" rIns="0" bIns="0" rtlCol="0" anchor="ctr"/>
+          <a:lstStyle/>
+          <a:p>
+            <a:pPr indent="0" marL="0">
+              <a:buNone/>
+            </a:pPr>
+            <a:r>
+              <a:rPr lang="en-US" sz="2600" b="1" dirty="0">
                 <a:solidFill>
                   <a:srgbClr val="0E1C42"/>
                 </a:solidFill>
@@ -4417,34 +4796,309 @@
                 <a:ea typeface="Calibri" pitchFamily="34" charset="-122"/>
                 <a:cs typeface="Calibri" pitchFamily="34" charset="-120"/>
               </a:rPr>
-              <a:t>🪶 Writing Connection</a:t>
-            </a:r>
-            <a:endParaRPr lang="en-US" sz="2800" dirty="0"/>
-          </a:p>
-        </p:txBody>
-      </p:sp>
-      <p:sp>
-        <p:nvSpPr>
-          <p:cNvPr id="3" name="Shape 1"/>
-          <p:cNvSpPr/>
-          <p:nvPr/>
-        </p:nvSpPr>
-        <p:spPr>
-          <a:xfrm>
-            <a:off x="365760" y="749808"/>
-            <a:ext cx="8412480" cy="0"/>
-          </a:xfrm>
-          <a:prstGeom prst="line">
-            <a:avLst/>
-          </a:prstGeom>
-          <a:noFill/>
+              <a:t>Whole Book Summary</a:t>
+            </a:r>
+            <a:endParaRPr lang="en-US" sz="2600" dirty="0"/>
+          </a:p>
+        </p:txBody>
+      </p:sp>
+      <p:sp>
+        <p:nvSpPr>
+          <p:cNvPr id="5" name="Text 3"/>
+          <p:cNvSpPr/>
+          <p:nvPr/>
+        </p:nvSpPr>
+        <p:spPr>
+          <a:xfrm>
+            <a:off x="365760" y="1463040"/>
+            <a:ext cx="8229600" cy="237744"/>
+          </a:xfrm>
+          <a:prstGeom prst="rect">
+            <a:avLst/>
+          </a:prstGeom>
+          <a:noFill/>
+          <a:ln/>
+        </p:spPr>
+        <p:txBody>
+          <a:bodyPr wrap="square" lIns="0" tIns="0" rIns="0" bIns="0" rtlCol="0" anchor="ctr"/>
+          <a:lstStyle/>
+          <a:p>
+            <a:pPr indent="0" marL="0">
+              <a:buNone/>
+            </a:pPr>
+            <a:r>
+              <a:rPr lang="en-US" sz="1100" b="1" spc="100" kern="0" dirty="0">
+                <a:solidFill>
+                  <a:srgbClr val="8B6FC0"/>
+                </a:solidFill>
+                <a:latin typeface="Calibri" pitchFamily="34" charset="0"/>
+                <a:ea typeface="Calibri" pitchFamily="34" charset="-122"/>
+                <a:cs typeface="Calibri" pitchFamily="34" charset="-120"/>
+              </a:rPr>
+              <a:t>COPYWORK — FROM THE NOVEL</a:t>
+            </a:r>
+            <a:endParaRPr lang="en-US" sz="1100" dirty="0"/>
+          </a:p>
+        </p:txBody>
+      </p:sp>
+      <p:sp>
+        <p:nvSpPr>
+          <p:cNvPr id="6" name="Shape 4"/>
+          <p:cNvSpPr/>
+          <p:nvPr/>
+        </p:nvSpPr>
+        <p:spPr>
+          <a:xfrm>
+            <a:off x="365760" y="1719072"/>
+            <a:ext cx="8412480" cy="1143000"/>
+          </a:xfrm>
+          <a:prstGeom prst="roundRect">
+            <a:avLst>
+              <a:gd name="adj" fmla="val 8000"/>
+            </a:avLst>
+          </a:prstGeom>
+          <a:solidFill>
+            <a:srgbClr val="F0E8FF"/>
+          </a:solidFill>
           <a:ln w="19050">
             <a:solidFill>
-              <a:srgbClr val="34B76F"/>
+              <a:srgbClr val="8B6FC0"/>
             </a:solidFill>
             <a:prstDash val="solid"/>
           </a:ln>
-        </p:spPr>
+          <a:effectLst>
+            <a:outerShdw sx="100000" sy="100000" kx="0" ky="0" algn="bl" rotWithShape="0" blurRad="101600" dist="38100" dir="2700000">
+              <a:srgbClr val="000000">
+                <a:alpha val="12000"/>
+              </a:srgbClr>
+            </a:outerShdw>
+          </a:effectLst>
+        </p:spPr>
+      </p:sp>
+      <p:sp>
+        <p:nvSpPr>
+          <p:cNvPr id="7" name="Text 5"/>
+          <p:cNvSpPr/>
+          <p:nvPr/>
+        </p:nvSpPr>
+        <p:spPr>
+          <a:xfrm>
+            <a:off x="594360" y="1847088"/>
+            <a:ext cx="7955280" cy="886968"/>
+          </a:xfrm>
+          <a:prstGeom prst="rect">
+            <a:avLst/>
+          </a:prstGeom>
+          <a:noFill/>
+          <a:ln/>
+        </p:spPr>
+        <p:txBody>
+          <a:bodyPr wrap="square" lIns="0" tIns="0" rIns="0" bIns="0" rtlCol="0" anchor="ctr"/>
+          <a:lstStyle/>
+          <a:p>
+            <a:pPr indent="0" marL="0">
+              <a:buNone/>
+            </a:pPr>
+            <a:r>
+              <a:rPr lang="en-US" sz="1700" dirty="0">
+                <a:solidFill>
+                  <a:srgbClr val="1E293B"/>
+                </a:solidFill>
+                <a:latin typeface="Calibri" pitchFamily="34" charset="0"/>
+                <a:ea typeface="Calibri" pitchFamily="34" charset="-122"/>
+                <a:cs typeface="Calibri" pitchFamily="34" charset="-120"/>
+              </a:rPr>
+              <a:t>“It had been a long and tiring day. Very soon all the Lambchops were asleep.”</a:t>
+            </a:r>
+            <a:endParaRPr lang="en-US" sz="1700" dirty="0"/>
+          </a:p>
+        </p:txBody>
+      </p:sp>
+      <p:sp>
+        <p:nvSpPr>
+          <p:cNvPr id="8" name="Text 6"/>
+          <p:cNvSpPr/>
+          <p:nvPr/>
+        </p:nvSpPr>
+        <p:spPr>
+          <a:xfrm>
+            <a:off x="365760" y="3017520"/>
+            <a:ext cx="8229600" cy="237744"/>
+          </a:xfrm>
+          <a:prstGeom prst="rect">
+            <a:avLst/>
+          </a:prstGeom>
+          <a:noFill/>
+          <a:ln/>
+        </p:spPr>
+        <p:txBody>
+          <a:bodyPr wrap="square" lIns="0" tIns="0" rIns="0" bIns="0" rtlCol="0" anchor="ctr"/>
+          <a:lstStyle/>
+          <a:p>
+            <a:pPr indent="0" marL="0">
+              <a:buNone/>
+            </a:pPr>
+            <a:r>
+              <a:rPr lang="en-US" sz="1100" b="1" spc="100" kern="0" dirty="0">
+                <a:solidFill>
+                  <a:srgbClr val="C7922C"/>
+                </a:solidFill>
+                <a:latin typeface="Calibri" pitchFamily="34" charset="0"/>
+                <a:ea typeface="Calibri" pitchFamily="34" charset="-122"/>
+                <a:cs typeface="Calibri" pitchFamily="34" charset="-120"/>
+              </a:rPr>
+              <a:t>PAUSE &amp; THINK</a:t>
+            </a:r>
+            <a:endParaRPr lang="en-US" sz="1100" dirty="0"/>
+          </a:p>
+        </p:txBody>
+      </p:sp>
+      <p:sp>
+        <p:nvSpPr>
+          <p:cNvPr id="9" name="Text 7"/>
+          <p:cNvSpPr/>
+          <p:nvPr/>
+        </p:nvSpPr>
+        <p:spPr>
+          <a:xfrm>
+            <a:off x="365760" y="3273552"/>
+            <a:ext cx="8412480" cy="914400"/>
+          </a:xfrm>
+          <a:prstGeom prst="rect">
+            <a:avLst/>
+          </a:prstGeom>
+          <a:noFill/>
+          <a:ln/>
+        </p:spPr>
+        <p:txBody>
+          <a:bodyPr wrap="square" lIns="0" tIns="0" rIns="0" bIns="0" rtlCol="0" anchor="ctr"/>
+          <a:lstStyle/>
+          <a:p>
+            <a:pPr indent="0" marL="0">
+              <a:buNone/>
+            </a:pPr>
+            <a:r>
+              <a:rPr lang="en-US" sz="1500" dirty="0">
+                <a:solidFill>
+                  <a:srgbClr val="1E293B"/>
+                </a:solidFill>
+                <a:latin typeface="Calibri" pitchFamily="34" charset="0"/>
+                <a:ea typeface="Calibri" pitchFamily="34" charset="-122"/>
+                <a:cs typeface="Calibri" pitchFamily="34" charset="-120"/>
+              </a:rPr>
+              <a:t>•  If you could only tell someone THREE things about Flat Stanley , what would they be?</a:t>
+            </a:r>
+            <a:endParaRPr lang="en-US" sz="1500" dirty="0"/>
+          </a:p>
+          <a:p>
+            <a:pPr indent="0" marL="0">
+              <a:buNone/>
+            </a:pPr>
+            <a:r>
+              <a:rPr lang="en-US" sz="1500" dirty="0">
+                <a:solidFill>
+                  <a:srgbClr val="1E293B"/>
+                </a:solidFill>
+                <a:latin typeface="Calibri" pitchFamily="34" charset="0"/>
+                <a:ea typeface="Calibri" pitchFamily="34" charset="-122"/>
+                <a:cs typeface="Calibri" pitchFamily="34" charset="-120"/>
+              </a:rPr>
+              <a:t>•  If you could only tell someone THREE things about Flat Stanley , what would they be?</a:t>
+            </a:r>
+            <a:endParaRPr lang="en-US" sz="1500" dirty="0"/>
+          </a:p>
+        </p:txBody>
+      </p:sp>
+    </p:spTree>
+  </p:cSld>
+  <p:clrMapOvr>
+    <a:masterClrMapping/>
+  </p:clrMapOvr>
+</p:sld>
+</file>
+
+<file path=ppt/slides/slide16.xml><?xml version="1.0" encoding="utf-8"?>
+<p:sld xmlns:a="http://schemas.openxmlformats.org/drawingml/2006/main" xmlns:r="http://schemas.openxmlformats.org/officeDocument/2006/relationships" xmlns:p="http://schemas.openxmlformats.org/presentationml/2006/main">
+  <p:cSld name="Slide 16">
+    <p:bg>
+      <p:bgPr>
+        <a:solidFill>
+          <a:srgbClr val="FFFFFF"/>
+        </a:solidFill>
+      </p:bgPr>
+    </p:bg>
+    <p:spTree>
+      <p:nvGrpSpPr>
+        <p:cNvPr id="1" name=""/>
+        <p:cNvGrpSpPr/>
+        <p:nvPr/>
+      </p:nvGrpSpPr>
+      <p:grpSpPr>
+        <a:xfrm>
+          <a:off x="0" y="0"/>
+          <a:ext cx="0" cy="0"/>
+          <a:chOff x="0" y="0"/>
+          <a:chExt cx="0" cy="0"/>
+        </a:xfrm>
+      </p:grpSpPr>
+      <p:sp>
+        <p:nvSpPr>
+          <p:cNvPr id="2" name="Shape 0"/>
+          <p:cNvSpPr/>
+          <p:nvPr/>
+        </p:nvSpPr>
+        <p:spPr>
+          <a:xfrm>
+            <a:off x="0" y="0"/>
+            <a:ext cx="9144000" cy="566928"/>
+          </a:xfrm>
+          <a:prstGeom prst="rect">
+            <a:avLst/>
+          </a:prstGeom>
+          <a:solidFill>
+            <a:srgbClr val="34B76F"/>
+          </a:solidFill>
+          <a:ln/>
+        </p:spPr>
+      </p:sp>
+      <p:sp>
+        <p:nvSpPr>
+          <p:cNvPr id="3" name="Text 1"/>
+          <p:cNvSpPr/>
+          <p:nvPr/>
+        </p:nvSpPr>
+        <p:spPr>
+          <a:xfrm>
+            <a:off x="365760" y="54864"/>
+            <a:ext cx="8412480" cy="457200"/>
+          </a:xfrm>
+          <a:prstGeom prst="rect">
+            <a:avLst/>
+          </a:prstGeom>
+          <a:noFill/>
+          <a:ln/>
+        </p:spPr>
+        <p:txBody>
+          <a:bodyPr wrap="square" lIns="0" tIns="0" rIns="0" bIns="0" rtlCol="0" anchor="ctr"/>
+          <a:lstStyle/>
+          <a:p>
+            <a:pPr indent="0" marL="0">
+              <a:buNone/>
+            </a:pPr>
+            <a:r>
+              <a:rPr lang="en-US" sz="2200" b="1" dirty="0">
+                <a:solidFill>
+                  <a:srgbClr val="FFFFFF"/>
+                </a:solidFill>
+                <a:latin typeface="Calibri" pitchFamily="34" charset="0"/>
+                <a:ea typeface="Calibri" pitchFamily="34" charset="-122"/>
+                <a:cs typeface="Calibri" pitchFamily="34" charset="-120"/>
+              </a:rPr>
+              <a:t>🪶  Writer’s Workshop</a:t>
+            </a:r>
+            <a:endParaRPr lang="en-US" sz="2200" dirty="0"/>
+          </a:p>
+        </p:txBody>
       </p:sp>
       <p:sp>
         <p:nvSpPr>
@@ -4454,24 +5108,102 @@
         </p:nvSpPr>
         <p:spPr>
           <a:xfrm>
-            <a:off x="640080" y="1371600"/>
-            <a:ext cx="7863840" cy="457200"/>
-          </a:xfrm>
-          <a:prstGeom prst="rect">
-            <a:avLst/>
-          </a:prstGeom>
-          <a:noFill/>
-          <a:ln/>
-        </p:spPr>
-        <p:txBody>
-          <a:bodyPr wrap="square" lIns="0" tIns="0" rIns="0" bIns="0" rtlCol="0" anchor="ctr"/>
-          <a:lstStyle/>
-          <a:p>
-            <a:pPr indent="0" marL="0">
-              <a:buNone/>
-            </a:pPr>
-            <a:r>
-              <a:rPr lang="en-US" sz="1600" dirty="0">
+            <a:off x="365760" y="822960"/>
+            <a:ext cx="8229600" cy="237744"/>
+          </a:xfrm>
+          <a:prstGeom prst="rect">
+            <a:avLst/>
+          </a:prstGeom>
+          <a:noFill/>
+          <a:ln/>
+        </p:spPr>
+        <p:txBody>
+          <a:bodyPr wrap="square" lIns="0" tIns="0" rIns="0" bIns="0" rtlCol="0" anchor="ctr"/>
+          <a:lstStyle/>
+          <a:p>
+            <a:pPr indent="0" marL="0">
+              <a:buNone/>
+            </a:pPr>
+            <a:r>
+              <a:rPr lang="en-US" sz="1100" b="1" spc="100" kern="0" dirty="0">
+                <a:solidFill>
+                  <a:srgbClr val="34B76F"/>
+                </a:solidFill>
+                <a:latin typeface="Calibri" pitchFamily="34" charset="0"/>
+                <a:ea typeface="Calibri" pitchFamily="34" charset="-122"/>
+                <a:cs typeface="Calibri" pitchFamily="34" charset="-120"/>
+              </a:rPr>
+              <a:t>THIS WEEK’S STAGE</a:t>
+            </a:r>
+            <a:endParaRPr lang="en-US" sz="1100" dirty="0"/>
+          </a:p>
+        </p:txBody>
+      </p:sp>
+      <p:sp>
+        <p:nvSpPr>
+          <p:cNvPr id="5" name="Text 3"/>
+          <p:cNvSpPr/>
+          <p:nvPr/>
+        </p:nvSpPr>
+        <p:spPr>
+          <a:xfrm>
+            <a:off x="365760" y="1078992"/>
+            <a:ext cx="8412480" cy="548640"/>
+          </a:xfrm>
+          <a:prstGeom prst="rect">
+            <a:avLst/>
+          </a:prstGeom>
+          <a:noFill/>
+          <a:ln/>
+        </p:spPr>
+        <p:txBody>
+          <a:bodyPr wrap="square" lIns="0" tIns="0" rIns="0" bIns="0" rtlCol="0" anchor="ctr"/>
+          <a:lstStyle/>
+          <a:p>
+            <a:pPr indent="0" marL="0">
+              <a:buNone/>
+            </a:pPr>
+            <a:r>
+              <a:rPr lang="en-US" sz="3000" b="1" dirty="0">
+                <a:solidFill>
+                  <a:srgbClr val="0E1C42"/>
+                </a:solidFill>
+                <a:latin typeface="Calibri" pitchFamily="34" charset="0"/>
+                <a:ea typeface="Calibri" pitchFamily="34" charset="-122"/>
+                <a:cs typeface="Calibri" pitchFamily="34" charset="-120"/>
+              </a:rPr>
+              <a:t>PUBLISH</a:t>
+            </a:r>
+            <a:endParaRPr lang="en-US" sz="3000" dirty="0"/>
+          </a:p>
+        </p:txBody>
+      </p:sp>
+      <p:sp>
+        <p:nvSpPr>
+          <p:cNvPr id="6" name="Text 4"/>
+          <p:cNvSpPr/>
+          <p:nvPr/>
+        </p:nvSpPr>
+        <p:spPr>
+          <a:xfrm>
+            <a:off x="365760" y="1691640"/>
+            <a:ext cx="8412480" cy="457200"/>
+          </a:xfrm>
+          <a:prstGeom prst="rect">
+            <a:avLst/>
+          </a:prstGeom>
+          <a:noFill/>
+          <a:ln/>
+        </p:spPr>
+        <p:txBody>
+          <a:bodyPr wrap="square" lIns="0" tIns="0" rIns="0" bIns="0" rtlCol="0" anchor="ctr"/>
+          <a:lstStyle/>
+          <a:p>
+            <a:pPr indent="0" marL="0">
+              <a:buNone/>
+            </a:pPr>
+            <a:r>
+              <a:rPr lang="en-US" sz="1800" dirty="0">
                 <a:solidFill>
                   <a:srgbClr val="1E293B"/>
                 </a:solidFill>
@@ -4479,48 +5211,9 @@
                 <a:ea typeface="Calibri" pitchFamily="34" charset="-122"/>
                 <a:cs typeface="Calibri" pitchFamily="34" charset="-120"/>
               </a:rPr>
-              <a:t>Open your writing assignment in Canvas.</a:t>
-            </a:r>
-            <a:endParaRPr lang="en-US" sz="1600" dirty="0"/>
-          </a:p>
-        </p:txBody>
-      </p:sp>
-      <p:sp>
-        <p:nvSpPr>
-          <p:cNvPr id="5" name="Text 3"/>
-          <p:cNvSpPr/>
-          <p:nvPr/>
-        </p:nvSpPr>
-        <p:spPr>
-          <a:xfrm>
-            <a:off x="640080" y="2011680"/>
-            <a:ext cx="7863840" cy="457200"/>
-          </a:xfrm>
-          <a:prstGeom prst="rect">
-            <a:avLst/>
-          </a:prstGeom>
-          <a:noFill/>
-          <a:ln/>
-        </p:spPr>
-        <p:txBody>
-          <a:bodyPr wrap="square" lIns="0" tIns="0" rIns="0" bIns="0" rtlCol="0" anchor="ctr"/>
-          <a:lstStyle/>
-          <a:p>
-            <a:pPr indent="0" marL="0">
-              <a:buNone/>
-            </a:pPr>
-            <a:r>
-              <a:rPr lang="en-US" sz="1400" dirty="0">
-                <a:solidFill>
-                  <a:srgbClr val="64748B"/>
-                </a:solidFill>
-                <a:latin typeface="Calibri" pitchFamily="34" charset="0"/>
-                <a:ea typeface="Calibri" pitchFamily="34" charset="-122"/>
-                <a:cs typeface="Calibri" pitchFamily="34" charset="-120"/>
-              </a:rPr>
-              <a:t>Follow the writing prompt for today's workshop.</a:t>
-            </a:r>
-            <a:endParaRPr lang="en-US" sz="1400" dirty="0"/>
+              <a:t>Write your final copy</a:t>
+            </a:r>
+            <a:endParaRPr lang="en-US" sz="1800" dirty="0"/>
           </a:p>
         </p:txBody>
       </p:sp>
@@ -4558,65 +5251,62 @@
       </p:grpSpPr>
       <p:sp>
         <p:nvSpPr>
-          <p:cNvPr id="2" name="Text 0"/>
-          <p:cNvSpPr/>
-          <p:nvPr/>
-        </p:nvSpPr>
-        <p:spPr>
-          <a:xfrm>
-            <a:off x="365760" y="164592"/>
-            <a:ext cx="8412480" cy="566928"/>
-          </a:xfrm>
-          <a:prstGeom prst="rect">
-            <a:avLst/>
-          </a:prstGeom>
-          <a:noFill/>
-          <a:ln/>
-        </p:spPr>
-        <p:txBody>
-          <a:bodyPr wrap="square" lIns="0" tIns="0" rIns="0" bIns="0" rtlCol="0" anchor="ctr"/>
-          <a:lstStyle/>
-          <a:p>
-            <a:pPr algn="l" indent="0" marL="0">
-              <a:buNone/>
-            </a:pPr>
-            <a:r>
-              <a:rPr lang="en-US" sz="2800" b="1" dirty="0">
-                <a:solidFill>
-                  <a:srgbClr val="0E1C42"/>
-                </a:solidFill>
-                <a:latin typeface="Calibri" pitchFamily="34" charset="0"/>
-                <a:ea typeface="Calibri" pitchFamily="34" charset="-122"/>
-                <a:cs typeface="Calibri" pitchFamily="34" charset="-120"/>
-              </a:rPr>
-              <a:t>✏️ 10-Minute Write</a:t>
-            </a:r>
-            <a:endParaRPr lang="en-US" sz="2800" dirty="0"/>
-          </a:p>
-        </p:txBody>
-      </p:sp>
-      <p:sp>
-        <p:nvSpPr>
-          <p:cNvPr id="3" name="Shape 1"/>
-          <p:cNvSpPr/>
-          <p:nvPr/>
-        </p:nvSpPr>
-        <p:spPr>
-          <a:xfrm>
-            <a:off x="365760" y="749808"/>
-            <a:ext cx="8412480" cy="0"/>
-          </a:xfrm>
-          <a:prstGeom prst="line">
-            <a:avLst/>
-          </a:prstGeom>
-          <a:noFill/>
-          <a:ln w="19050">
-            <a:solidFill>
-              <a:srgbClr val="C7922C"/>
-            </a:solidFill>
-            <a:prstDash val="solid"/>
-          </a:ln>
-        </p:spPr>
+          <p:cNvPr id="2" name="Shape 0"/>
+          <p:cNvSpPr/>
+          <p:nvPr/>
+        </p:nvSpPr>
+        <p:spPr>
+          <a:xfrm>
+            <a:off x="0" y="0"/>
+            <a:ext cx="9144000" cy="566928"/>
+          </a:xfrm>
+          <a:prstGeom prst="rect">
+            <a:avLst/>
+          </a:prstGeom>
+          <a:solidFill>
+            <a:srgbClr val="C7922C"/>
+          </a:solidFill>
+          <a:ln/>
+        </p:spPr>
+      </p:sp>
+      <p:sp>
+        <p:nvSpPr>
+          <p:cNvPr id="3" name="Text 1"/>
+          <p:cNvSpPr/>
+          <p:nvPr/>
+        </p:nvSpPr>
+        <p:spPr>
+          <a:xfrm>
+            <a:off x="365760" y="54864"/>
+            <a:ext cx="8412480" cy="457200"/>
+          </a:xfrm>
+          <a:prstGeom prst="rect">
+            <a:avLst/>
+          </a:prstGeom>
+          <a:noFill/>
+          <a:ln/>
+        </p:spPr>
+        <p:txBody>
+          <a:bodyPr wrap="square" lIns="0" tIns="0" rIns="0" bIns="0" rtlCol="0" anchor="ctr"/>
+          <a:lstStyle/>
+          <a:p>
+            <a:pPr indent="0" marL="0">
+              <a:buNone/>
+            </a:pPr>
+            <a:r>
+              <a:rPr lang="en-US" sz="2200" b="1" dirty="0">
+                <a:solidFill>
+                  <a:srgbClr val="FFFFFF"/>
+                </a:solidFill>
+                <a:latin typeface="Calibri" pitchFamily="34" charset="0"/>
+                <a:ea typeface="Calibri" pitchFamily="34" charset="-122"/>
+                <a:cs typeface="Calibri" pitchFamily="34" charset="-120"/>
+              </a:rPr>
+              <a:t>✍️  10-Minute Write</a:t>
+            </a:r>
+            <a:endParaRPr lang="en-US" sz="2200" dirty="0"/>
+          </a:p>
+        </p:txBody>
       </p:sp>
       <p:sp>
         <p:nvSpPr>
@@ -4626,24 +5316,24 @@
         </p:nvSpPr>
         <p:spPr>
           <a:xfrm>
-            <a:off x="457200" y="1005840"/>
-            <a:ext cx="8046720" cy="292608"/>
-          </a:xfrm>
-          <a:prstGeom prst="rect">
-            <a:avLst/>
-          </a:prstGeom>
-          <a:noFill/>
-          <a:ln/>
-        </p:spPr>
-        <p:txBody>
-          <a:bodyPr wrap="square" lIns="0" tIns="0" rIns="0" bIns="0" rtlCol="0" anchor="ctr"/>
-          <a:lstStyle/>
-          <a:p>
-            <a:pPr indent="0" marL="0">
-              <a:buNone/>
-            </a:pPr>
-            <a:r>
-              <a:rPr lang="en-US" sz="1100" b="1" spc="200" kern="0" dirty="0">
+            <a:off x="365760" y="822960"/>
+            <a:ext cx="8229600" cy="237744"/>
+          </a:xfrm>
+          <a:prstGeom prst="rect">
+            <a:avLst/>
+          </a:prstGeom>
+          <a:noFill/>
+          <a:ln/>
+        </p:spPr>
+        <p:txBody>
+          <a:bodyPr wrap="square" lIns="0" tIns="0" rIns="0" bIns="0" rtlCol="0" anchor="ctr"/>
+          <a:lstStyle/>
+          <a:p>
+            <a:pPr indent="0" marL="0">
+              <a:buNone/>
+            </a:pPr>
+            <a:r>
+              <a:rPr lang="en-US" sz="1100" b="1" spc="100" kern="0" dirty="0">
                 <a:solidFill>
                   <a:srgbClr val="C7922C"/>
                 </a:solidFill>
@@ -4651,7 +5341,7 @@
                 <a:ea typeface="Calibri" pitchFamily="34" charset="-122"/>
                 <a:cs typeface="Calibri" pitchFamily="34" charset="-120"/>
               </a:rPr>
-              <a:t>📖 READ THE PROMPT — 1 MINUTE</a:t>
+              <a:t>READ THE PROMPT — 1 MINUTE</a:t>
             </a:r>
             <a:endParaRPr lang="en-US" sz="1100" dirty="0"/>
           </a:p>
@@ -4665,18 +5355,18 @@
         </p:nvSpPr>
         <p:spPr>
           <a:xfrm>
-            <a:off x="457200" y="1417320"/>
-            <a:ext cx="8229600" cy="1645920"/>
+            <a:off x="365760" y="1143000"/>
+            <a:ext cx="8412480" cy="1737360"/>
           </a:xfrm>
           <a:prstGeom prst="roundRect">
             <a:avLst>
-              <a:gd name="adj" fmla="val 5556"/>
+              <a:gd name="adj" fmla="val 5263"/>
             </a:avLst>
           </a:prstGeom>
           <a:solidFill>
             <a:srgbClr val="FEF6E8"/>
           </a:solidFill>
-          <a:ln w="12700">
+          <a:ln w="19050">
             <a:solidFill>
               <a:srgbClr val="C7922C"/>
             </a:solidFill>
@@ -4699,24 +5389,24 @@
         </p:nvSpPr>
         <p:spPr>
           <a:xfrm>
-            <a:off x="640080" y="1527048"/>
-            <a:ext cx="7863840" cy="1417320"/>
-          </a:xfrm>
-          <a:prstGeom prst="rect">
-            <a:avLst/>
-          </a:prstGeom>
-          <a:noFill/>
-          <a:ln/>
-        </p:spPr>
-        <p:txBody>
-          <a:bodyPr wrap="square" lIns="0" tIns="0" rIns="0" bIns="0" rtlCol="0" anchor="ctr"/>
-          <a:lstStyle/>
-          <a:p>
-            <a:pPr indent="0" marL="0">
-              <a:buNone/>
-            </a:pPr>
-            <a:r>
-              <a:rPr lang="en-US" sz="1800" i="1" dirty="0">
+            <a:off x="594360" y="1271016"/>
+            <a:ext cx="7955280" cy="1481328"/>
+          </a:xfrm>
+          <a:prstGeom prst="rect">
+            <a:avLst/>
+          </a:prstGeom>
+          <a:noFill/>
+          <a:ln/>
+        </p:spPr>
+        <p:txBody>
+          <a:bodyPr wrap="square" lIns="0" tIns="0" rIns="0" bIns="0" rtlCol="0" anchor="ctr"/>
+          <a:lstStyle/>
+          <a:p>
+            <a:pPr indent="0" marL="0">
+              <a:buNone/>
+            </a:pPr>
+            <a:r>
+              <a:rPr lang="en-US" sz="1700" dirty="0">
                 <a:solidFill>
                   <a:srgbClr val="1E293B"/>
                 </a:solidFill>
@@ -4724,9 +5414,9 @@
                 <a:ea typeface="Calibri" pitchFamily="34" charset="-122"/>
                 <a:cs typeface="Calibri" pitchFamily="34" charset="-120"/>
               </a:rPr>
-              <a:t>If Flat Stanley showed up at YOUR school for a day, what would happen? Write about his visit. What would the other kids think? What problems might he have? What would be awesome about it?</a:t>
-            </a:r>
-            <a:endParaRPr lang="en-US" sz="1800" dirty="0"/>
+              <a:t>Write about your favourite part of Flat Stanley in three sentences or fewer. Only the most important parts.</a:t>
+            </a:r>
+            <a:endParaRPr lang="en-US" sz="1700" dirty="0"/>
           </a:p>
         </p:txBody>
       </p:sp>
@@ -4738,76 +5428,34 @@
         </p:nvSpPr>
         <p:spPr>
           <a:xfrm>
-            <a:off x="640080" y="3246120"/>
-            <a:ext cx="7863840" cy="457200"/>
-          </a:xfrm>
-          <a:prstGeom prst="rect">
-            <a:avLst/>
-          </a:prstGeom>
-          <a:noFill/>
-          <a:ln/>
-        </p:spPr>
-        <p:txBody>
-          <a:bodyPr wrap="square" lIns="0" tIns="0" rIns="0" bIns="0" rtlCol="0" anchor="ctr"/>
-          <a:lstStyle/>
-          <a:p>
-            <a:pPr indent="0" marL="0">
-              <a:buNone/>
-            </a:pPr>
-            <a:r>
-              <a:rPr lang="en-US" sz="1400" b="1" dirty="0">
-                <a:solidFill>
-                  <a:srgbClr val="0E1C42"/>
-                </a:solidFill>
-                <a:latin typeface="Calibri" pitchFamily="34" charset="0"/>
-                <a:ea typeface="Calibri" pitchFamily="34" charset="-122"/>
-                <a:cs typeface="Calibri" pitchFamily="34" charset="-120"/>
-              </a:rPr>
-              <a:t>Type in the chat </a:t>
-            </a:r>
-            <a:pPr indent="0" marL="0">
-              <a:buNone/>
-            </a:pPr>
-            <a:r>
-              <a:rPr lang="en-US" sz="1400" dirty="0">
-                <a:solidFill>
-                  <a:srgbClr val="1E293B"/>
-                </a:solidFill>
-                <a:latin typeface="Calibri" pitchFamily="34" charset="0"/>
-                <a:ea typeface="Calibri" pitchFamily="34" charset="-122"/>
-                <a:cs typeface="Calibri" pitchFamily="34" charset="-120"/>
-              </a:rPr>
-              <a:t>or </a:t>
-            </a:r>
-            <a:pPr indent="0" marL="0">
-              <a:buNone/>
-            </a:pPr>
-            <a:r>
-              <a:rPr lang="en-US" sz="1400" b="1" dirty="0">
-                <a:solidFill>
-                  <a:srgbClr val="0E1C42"/>
-                </a:solidFill>
-                <a:latin typeface="Calibri" pitchFamily="34" charset="0"/>
-                <a:ea typeface="Calibri" pitchFamily="34" charset="-122"/>
-                <a:cs typeface="Calibri" pitchFamily="34" charset="-120"/>
-              </a:rPr>
-              <a:t>write on paper</a:t>
-            </a:r>
-            <a:pPr indent="0" marL="0">
-              <a:buNone/>
-            </a:pPr>
-            <a:r>
-              <a:rPr lang="en-US" sz="1400" dirty="0">
-                <a:solidFill>
-                  <a:srgbClr val="1E293B"/>
-                </a:solidFill>
-                <a:latin typeface="Calibri" pitchFamily="34" charset="0"/>
-                <a:ea typeface="Calibri" pitchFamily="34" charset="-122"/>
-                <a:cs typeface="Calibri" pitchFamily="34" charset="-120"/>
-              </a:rPr>
-              <a:t> to hold up when we share.</a:t>
-            </a:r>
-            <a:endParaRPr lang="en-US" sz="1400" dirty="0"/>
+            <a:off x="365760" y="3063240"/>
+            <a:ext cx="8412480" cy="365760"/>
+          </a:xfrm>
+          <a:prstGeom prst="rect">
+            <a:avLst/>
+          </a:prstGeom>
+          <a:noFill/>
+          <a:ln/>
+        </p:spPr>
+        <p:txBody>
+          <a:bodyPr wrap="square" lIns="0" tIns="0" rIns="0" bIns="0" rtlCol="0" anchor="ctr"/>
+          <a:lstStyle/>
+          <a:p>
+            <a:pPr indent="0" marL="0">
+              <a:buNone/>
+            </a:pPr>
+            <a:r>
+              <a:rPr lang="en-US" sz="1600" i="1" dirty="0">
+                <a:solidFill>
+                  <a:srgbClr val="64748B"/>
+                </a:solidFill>
+                <a:latin typeface="Calibri" pitchFamily="34" charset="0"/>
+                <a:ea typeface="Calibri" pitchFamily="34" charset="-122"/>
+                <a:cs typeface="Calibri" pitchFamily="34" charset="-120"/>
+              </a:rPr>
+              <a:t>Think first. You will have five minutes to write.</a:t>
+            </a:r>
+            <a:endParaRPr lang="en-US" sz="1600" dirty="0"/>
           </a:p>
         </p:txBody>
       </p:sp>
@@ -4845,30 +5493,89 @@
       </p:grpSpPr>
       <p:sp>
         <p:nvSpPr>
-          <p:cNvPr id="2" name="Text 0"/>
-          <p:cNvSpPr/>
-          <p:nvPr/>
-        </p:nvSpPr>
-        <p:spPr>
-          <a:xfrm>
-            <a:off x="457200" y="228600"/>
-            <a:ext cx="8229600" cy="640080"/>
-          </a:xfrm>
-          <a:prstGeom prst="rect">
-            <a:avLst/>
-          </a:prstGeom>
-          <a:noFill/>
-          <a:ln/>
-        </p:spPr>
-        <p:txBody>
-          <a:bodyPr wrap="square" lIns="0" tIns="0" rIns="0" bIns="0" rtlCol="0" anchor="ctr"/>
-          <a:lstStyle/>
-          <a:p>
-            <a:pPr algn="ctr" indent="0" marL="0">
-              <a:buNone/>
-            </a:pPr>
-            <a:r>
-              <a:rPr lang="en-US" sz="3200" b="1" dirty="0">
+          <p:cNvPr id="2" name="Shape 0"/>
+          <p:cNvSpPr/>
+          <p:nvPr/>
+        </p:nvSpPr>
+        <p:spPr>
+          <a:xfrm>
+            <a:off x="0" y="0"/>
+            <a:ext cx="9144000" cy="566928"/>
+          </a:xfrm>
+          <a:prstGeom prst="rect">
+            <a:avLst/>
+          </a:prstGeom>
+          <a:solidFill>
+            <a:srgbClr val="C7922C"/>
+          </a:solidFill>
+          <a:ln/>
+        </p:spPr>
+      </p:sp>
+      <p:sp>
+        <p:nvSpPr>
+          <p:cNvPr id="3" name="Text 1"/>
+          <p:cNvSpPr/>
+          <p:nvPr/>
+        </p:nvSpPr>
+        <p:spPr>
+          <a:xfrm>
+            <a:off x="365760" y="54864"/>
+            <a:ext cx="8412480" cy="457200"/>
+          </a:xfrm>
+          <a:prstGeom prst="rect">
+            <a:avLst/>
+          </a:prstGeom>
+          <a:noFill/>
+          <a:ln/>
+        </p:spPr>
+        <p:txBody>
+          <a:bodyPr wrap="square" lIns="0" tIns="0" rIns="0" bIns="0" rtlCol="0" anchor="ctr"/>
+          <a:lstStyle/>
+          <a:p>
+            <a:pPr indent="0" marL="0">
+              <a:buNone/>
+            </a:pPr>
+            <a:r>
+              <a:rPr lang="en-US" sz="2200" b="1" dirty="0">
+                <a:solidFill>
+                  <a:srgbClr val="FFFFFF"/>
+                </a:solidFill>
+                <a:latin typeface="Calibri" pitchFamily="34" charset="0"/>
+                <a:ea typeface="Calibri" pitchFamily="34" charset="-122"/>
+                <a:cs typeface="Calibri" pitchFamily="34" charset="-120"/>
+              </a:rPr>
+              <a:t>✍️  Writing Time</a:t>
+            </a:r>
+            <a:endParaRPr lang="en-US" sz="2200" dirty="0"/>
+          </a:p>
+        </p:txBody>
+      </p:sp>
+      <p:sp>
+        <p:nvSpPr>
+          <p:cNvPr id="4" name="Text 2"/>
+          <p:cNvSpPr/>
+          <p:nvPr/>
+        </p:nvSpPr>
+        <p:spPr>
+          <a:xfrm>
+            <a:off x="365760" y="868680"/>
+            <a:ext cx="8412480" cy="502920"/>
+          </a:xfrm>
+          <a:prstGeom prst="rect">
+            <a:avLst/>
+          </a:prstGeom>
+          <a:noFill/>
+          <a:ln/>
+        </p:spPr>
+        <p:txBody>
+          <a:bodyPr wrap="square" lIns="0" tIns="0" rIns="0" bIns="0" rtlCol="0" anchor="ctr"/>
+          <a:lstStyle/>
+          <a:p>
+            <a:pPr indent="0" marL="0">
+              <a:buNone/>
+            </a:pPr>
+            <a:r>
+              <a:rPr lang="en-US" sz="2600" b="1" dirty="0">
                 <a:solidFill>
                   <a:srgbClr val="0E1C42"/>
                 </a:solidFill>
@@ -4876,38 +5583,38 @@
                 <a:ea typeface="Calibri" pitchFamily="34" charset="-122"/>
                 <a:cs typeface="Calibri" pitchFamily="34" charset="-120"/>
               </a:rPr>
-              <a:t>✏️  Writing Time</a:t>
-            </a:r>
-            <a:endParaRPr lang="en-US" sz="3200" dirty="0"/>
-          </a:p>
-        </p:txBody>
-      </p:sp>
-      <p:sp>
-        <p:nvSpPr>
-          <p:cNvPr id="3" name="Text 1"/>
-          <p:cNvSpPr/>
-          <p:nvPr/>
-        </p:nvSpPr>
-        <p:spPr>
-          <a:xfrm>
-            <a:off x="914400" y="822960"/>
-            <a:ext cx="7315200" cy="365760"/>
-          </a:xfrm>
-          <a:prstGeom prst="rect">
-            <a:avLst/>
-          </a:prstGeom>
-          <a:noFill/>
-          <a:ln/>
-        </p:spPr>
-        <p:txBody>
-          <a:bodyPr wrap="square" lIns="0" tIns="0" rIns="0" bIns="0" rtlCol="0" anchor="ctr"/>
-          <a:lstStyle/>
-          <a:p>
-            <a:pPr algn="ctr" indent="0" marL="0">
-              <a:buNone/>
-            </a:pPr>
-            <a:r>
-              <a:rPr lang="en-US" sz="1600" dirty="0">
+              <a:t>5 minutes — keep your pencil moving!</a:t>
+            </a:r>
+            <a:endParaRPr lang="en-US" sz="2600" dirty="0"/>
+          </a:p>
+        </p:txBody>
+      </p:sp>
+      <p:sp>
+        <p:nvSpPr>
+          <p:cNvPr id="5" name="Text 3"/>
+          <p:cNvSpPr/>
+          <p:nvPr/>
+        </p:nvSpPr>
+        <p:spPr>
+          <a:xfrm>
+            <a:off x="365760" y="1463040"/>
+            <a:ext cx="8229600" cy="237744"/>
+          </a:xfrm>
+          <a:prstGeom prst="rect">
+            <a:avLst/>
+          </a:prstGeom>
+          <a:noFill/>
+          <a:ln/>
+        </p:spPr>
+        <p:txBody>
+          <a:bodyPr wrap="square" lIns="0" tIns="0" rIns="0" bIns="0" rtlCol="0" anchor="ctr"/>
+          <a:lstStyle/>
+          <a:p>
+            <a:pPr indent="0" marL="0">
+              <a:buNone/>
+            </a:pPr>
+            <a:r>
+              <a:rPr lang="en-US" sz="1100" b="1" spc="100" kern="0" dirty="0">
                 <a:solidFill>
                   <a:srgbClr val="C7922C"/>
                 </a:solidFill>
@@ -4915,32 +5622,32 @@
                 <a:ea typeface="Calibri" pitchFamily="34" charset="-122"/>
                 <a:cs typeface="Calibri" pitchFamily="34" charset="-120"/>
               </a:rPr>
-              <a:t>5 minutes — keep your pencil moving!</a:t>
-            </a:r>
-            <a:endParaRPr lang="en-US" sz="1600" dirty="0"/>
-          </a:p>
-        </p:txBody>
-      </p:sp>
-      <p:sp>
-        <p:nvSpPr>
-          <p:cNvPr id="4" name="Shape 2"/>
-          <p:cNvSpPr/>
-          <p:nvPr/>
-        </p:nvSpPr>
-        <p:spPr>
-          <a:xfrm>
-            <a:off x="457200" y="1371600"/>
-            <a:ext cx="8229600" cy="1280160"/>
+              <a:t>YOUR PROMPT</a:t>
+            </a:r>
+            <a:endParaRPr lang="en-US" sz="1100" dirty="0"/>
+          </a:p>
+        </p:txBody>
+      </p:sp>
+      <p:sp>
+        <p:nvSpPr>
+          <p:cNvPr id="6" name="Shape 4"/>
+          <p:cNvSpPr/>
+          <p:nvPr/>
+        </p:nvSpPr>
+        <p:spPr>
+          <a:xfrm>
+            <a:off x="365760" y="1737360"/>
+            <a:ext cx="8412480" cy="1417320"/>
           </a:xfrm>
           <a:prstGeom prst="roundRect">
             <a:avLst>
-              <a:gd name="adj" fmla="val 7143"/>
+              <a:gd name="adj" fmla="val 6452"/>
             </a:avLst>
           </a:prstGeom>
           <a:solidFill>
             <a:srgbClr val="FFFFFF"/>
           </a:solidFill>
-          <a:ln w="12700">
+          <a:ln w="19050">
             <a:solidFill>
               <a:srgbClr val="C7922C"/>
             </a:solidFill>
@@ -4957,44 +5664,30 @@
       </p:sp>
       <p:sp>
         <p:nvSpPr>
-          <p:cNvPr id="5" name="Text 3"/>
-          <p:cNvSpPr/>
-          <p:nvPr/>
-        </p:nvSpPr>
-        <p:spPr>
-          <a:xfrm>
-            <a:off x="640080" y="1417320"/>
-            <a:ext cx="7863840" cy="1188720"/>
-          </a:xfrm>
-          <a:prstGeom prst="rect">
-            <a:avLst/>
-          </a:prstGeom>
-          <a:noFill/>
-          <a:ln/>
-        </p:spPr>
-        <p:txBody>
-          <a:bodyPr wrap="square" lIns="0" tIns="0" rIns="0" bIns="0" rtlCol="0" anchor="t"/>
-          <a:lstStyle/>
-          <a:p>
-            <a:pPr indent="0" marL="0">
-              <a:buNone/>
-            </a:pPr>
-            <a:r>
-              <a:rPr lang="en-US" sz="1200" b="1" dirty="0">
-                <a:solidFill>
-                  <a:srgbClr val="C7922C"/>
-                </a:solidFill>
-                <a:latin typeface="Calibri" pitchFamily="34" charset="0"/>
-                <a:ea typeface="Calibri" pitchFamily="34" charset="-122"/>
-                <a:cs typeface="Calibri" pitchFamily="34" charset="-120"/>
-              </a:rPr>
-              <a:t>📖 Prompt: </a:t>
-            </a:r>
-            <a:pPr indent="0" marL="0">
-              <a:buNone/>
-            </a:pPr>
-            <a:r>
-              <a:rPr lang="en-US" sz="1200" i="1" dirty="0">
+          <p:cNvPr id="7" name="Text 5"/>
+          <p:cNvSpPr/>
+          <p:nvPr/>
+        </p:nvSpPr>
+        <p:spPr>
+          <a:xfrm>
+            <a:off x="594360" y="1865376"/>
+            <a:ext cx="7955280" cy="1161288"/>
+          </a:xfrm>
+          <a:prstGeom prst="rect">
+            <a:avLst/>
+          </a:prstGeom>
+          <a:noFill/>
+          <a:ln/>
+        </p:spPr>
+        <p:txBody>
+          <a:bodyPr wrap="square" lIns="0" tIns="0" rIns="0" bIns="0" rtlCol="0" anchor="ctr"/>
+          <a:lstStyle/>
+          <a:p>
+            <a:pPr indent="0" marL="0">
+              <a:buNone/>
+            </a:pPr>
+            <a:r>
+              <a:rPr lang="en-US" sz="1700" dirty="0">
                 <a:solidFill>
                   <a:srgbClr val="1E293B"/>
                 </a:solidFill>
@@ -5002,122 +5695,48 @@
                 <a:ea typeface="Calibri" pitchFamily="34" charset="-122"/>
                 <a:cs typeface="Calibri" pitchFamily="34" charset="-120"/>
               </a:rPr>
-              <a:t>If Flat Stanley showed up at YOUR school for a day, what would happen? Write about his visit. What would the other kids think? What problems might he have? What would be awesome about it?</a:t>
-            </a:r>
-            <a:endParaRPr lang="en-US" sz="1200" dirty="0"/>
-          </a:p>
-        </p:txBody>
-      </p:sp>
-      <p:sp>
-        <p:nvSpPr>
-          <p:cNvPr id="6" name="Shape 4"/>
-          <p:cNvSpPr/>
-          <p:nvPr/>
-        </p:nvSpPr>
-        <p:spPr>
-          <a:xfrm>
-            <a:off x="2286000" y="2926080"/>
-            <a:ext cx="4572000" cy="1280160"/>
-          </a:xfrm>
-          <a:prstGeom prst="roundRect">
-            <a:avLst>
-              <a:gd name="adj" fmla="val 8571"/>
-            </a:avLst>
-          </a:prstGeom>
-          <a:solidFill>
-            <a:srgbClr val="FFFFFF"/>
-          </a:solidFill>
-          <a:ln/>
-          <a:effectLst>
-            <a:outerShdw sx="100000" sy="100000" kx="0" ky="0" algn="bl" rotWithShape="0" blurRad="101600" dist="38100" dir="2700000">
-              <a:srgbClr val="000000">
-                <a:alpha val="12000"/>
-              </a:srgbClr>
-            </a:outerShdw>
-          </a:effectLst>
-        </p:spPr>
-      </p:sp>
-      <p:sp>
-        <p:nvSpPr>
-          <p:cNvPr id="7" name="Text 5"/>
-          <p:cNvSpPr/>
-          <p:nvPr/>
-        </p:nvSpPr>
-        <p:spPr>
-          <a:xfrm>
-            <a:off x="2468880" y="3017520"/>
-            <a:ext cx="4206240" cy="1097280"/>
-          </a:xfrm>
-          <a:prstGeom prst="rect">
-            <a:avLst/>
-          </a:prstGeom>
-          <a:noFill/>
-          <a:ln/>
-        </p:spPr>
-        <p:txBody>
-          <a:bodyPr wrap="square" lIns="0" tIns="0" rIns="0" bIns="0" rtlCol="0" anchor="t"/>
-          <a:lstStyle/>
-          <a:p>
-            <a:pPr indent="0" marL="0">
-              <a:buNone/>
-            </a:pPr>
-            <a:r>
-              <a:rPr lang="en-US" sz="1400" b="1" dirty="0">
-                <a:solidFill>
-                  <a:srgbClr val="0E1C42"/>
-                </a:solidFill>
-                <a:latin typeface="Calibri" pitchFamily="34" charset="0"/>
-                <a:ea typeface="Calibri" pitchFamily="34" charset="-122"/>
-                <a:cs typeface="Calibri" pitchFamily="34" charset="-120"/>
-              </a:rPr>
-              <a:t>If you get stuck:
-</a:t>
-            </a:r>
-            <a:pPr indent="0" marL="0">
-              <a:buNone/>
-            </a:pPr>
-            <a:r>
-              <a:rPr lang="en-US" sz="1300" dirty="0">
-                <a:solidFill>
-                  <a:srgbClr val="1E293B"/>
-                </a:solidFill>
-                <a:latin typeface="Calibri" pitchFamily="34" charset="0"/>
-                <a:ea typeface="Calibri" pitchFamily="34" charset="-122"/>
-                <a:cs typeface="Calibri" pitchFamily="34" charset="-120"/>
-              </a:rPr>
-              <a:t>• Reread the prompt above
-</a:t>
-            </a:r>
-            <a:pPr indent="0" marL="0">
-              <a:buNone/>
-            </a:pPr>
-            <a:r>
-              <a:rPr lang="en-US" sz="1300" dirty="0">
-                <a:solidFill>
-                  <a:srgbClr val="1E293B"/>
-                </a:solidFill>
-                <a:latin typeface="Calibri" pitchFamily="34" charset="0"/>
-                <a:ea typeface="Calibri" pitchFamily="34" charset="-122"/>
-                <a:cs typeface="Calibri" pitchFamily="34" charset="-120"/>
-              </a:rPr>
-              <a:t>• Write "I'm thinking..." until a new idea comes
-</a:t>
-            </a:r>
-            <a:pPr indent="0" marL="0">
-              <a:buNone/>
-            </a:pPr>
-            <a:r>
-              <a:rPr lang="en-US" sz="1300" dirty="0">
-                <a:solidFill>
-                  <a:srgbClr val="1E293B"/>
-                </a:solidFill>
-                <a:latin typeface="Calibri" pitchFamily="34" charset="0"/>
-                <a:ea typeface="Calibri" pitchFamily="34" charset="-122"/>
-                <a:cs typeface="Calibri" pitchFamily="34" charset="-120"/>
-              </a:rPr>
-              <a:t>• Keep going — don't erase!</a:t>
-            </a:r>
-            <a:endParaRPr lang="en-US" sz="1400" dirty="0"/>
+              <a:t>Write about your favourite part of Flat Stanley in three sentences or fewer. Only the most important parts.</a:t>
+            </a:r>
+            <a:endParaRPr lang="en-US" sz="1700" dirty="0"/>
+          </a:p>
+        </p:txBody>
+      </p:sp>
+      <p:sp>
+        <p:nvSpPr>
+          <p:cNvPr id="8" name="Text 6"/>
+          <p:cNvSpPr/>
+          <p:nvPr/>
+        </p:nvSpPr>
+        <p:spPr>
+          <a:xfrm>
+            <a:off x="365760" y="3291840"/>
+            <a:ext cx="8412480" cy="365760"/>
+          </a:xfrm>
+          <a:prstGeom prst="rect">
+            <a:avLst/>
+          </a:prstGeom>
+          <a:noFill/>
+          <a:ln/>
+        </p:spPr>
+        <p:txBody>
+          <a:bodyPr wrap="square" lIns="0" tIns="0" rIns="0" bIns="0" rtlCol="0" anchor="ctr"/>
+          <a:lstStyle/>
+          <a:p>
+            <a:pPr indent="0" marL="0">
+              <a:buNone/>
+            </a:pPr>
+            <a:r>
+              <a:rPr lang="en-US" sz="1500" i="1" dirty="0">
+                <a:solidFill>
+                  <a:srgbClr val="64748B"/>
+                </a:solidFill>
+                <a:latin typeface="Calibri" pitchFamily="34" charset="0"/>
+                <a:ea typeface="Calibri" pitchFamily="34" charset="-122"/>
+                <a:cs typeface="Calibri" pitchFamily="34" charset="-120"/>
+              </a:rPr>
+              <a:t>Do not stop to erase. If you get stuck, write the last word again and keep going.</a:t>
+            </a:r>
+            <a:endParaRPr lang="en-US" sz="1500" dirty="0"/>
           </a:p>
         </p:txBody>
       </p:sp>
@@ -5155,39 +5774,23 @@
       </p:grpSpPr>
       <p:sp>
         <p:nvSpPr>
-          <p:cNvPr id="2" name="Text 0"/>
-          <p:cNvSpPr/>
-          <p:nvPr/>
-        </p:nvSpPr>
-        <p:spPr>
-          <a:xfrm>
-            <a:off x="3657600" y="365760"/>
-            <a:ext cx="1828800" cy="640080"/>
-          </a:xfrm>
-          <a:prstGeom prst="rect">
-            <a:avLst/>
-          </a:prstGeom>
-          <a:noFill/>
-          <a:ln/>
-        </p:spPr>
-        <p:txBody>
-          <a:bodyPr wrap="square" lIns="0" tIns="0" rIns="0" bIns="0" rtlCol="0" anchor="ctr"/>
-          <a:lstStyle/>
-          <a:p>
-            <a:pPr algn="ctr" indent="0" marL="0">
-              <a:buNone/>
-            </a:pPr>
-            <a:r>
-              <a:rPr lang="en-US" sz="4000" dirty="0">
-                <a:solidFill>
-                  <a:srgbClr val="000000"/>
-                </a:solidFill>
-              </a:rPr>
-              <a:t>🔍</a:t>
-            </a:r>
-            <a:endParaRPr lang="en-US" sz="4000" dirty="0"/>
-          </a:p>
-        </p:txBody>
+          <p:cNvPr id="2" name="Shape 0"/>
+          <p:cNvSpPr/>
+          <p:nvPr/>
+        </p:nvSpPr>
+        <p:spPr>
+          <a:xfrm>
+            <a:off x="0" y="0"/>
+            <a:ext cx="9144000" cy="566928"/>
+          </a:xfrm>
+          <a:prstGeom prst="rect">
+            <a:avLst/>
+          </a:prstGeom>
+          <a:solidFill>
+            <a:srgbClr val="34B76F"/>
+          </a:solidFill>
+          <a:ln/>
+        </p:spPr>
       </p:sp>
       <p:sp>
         <p:nvSpPr>
@@ -5197,24 +5800,63 @@
         </p:nvSpPr>
         <p:spPr>
           <a:xfrm>
-            <a:off x="914400" y="914400"/>
-            <a:ext cx="7315200" cy="640080"/>
-          </a:xfrm>
-          <a:prstGeom prst="rect">
-            <a:avLst/>
-          </a:prstGeom>
-          <a:noFill/>
-          <a:ln/>
-        </p:spPr>
-        <p:txBody>
-          <a:bodyPr wrap="square" lIns="0" tIns="0" rIns="0" bIns="0" rtlCol="0" anchor="ctr"/>
-          <a:lstStyle/>
-          <a:p>
-            <a:pPr algn="ctr" indent="0" marL="0">
-              <a:buNone/>
-            </a:pPr>
-            <a:r>
-              <a:rPr lang="en-US" sz="3200" b="1" dirty="0">
+            <a:off x="365760" y="54864"/>
+            <a:ext cx="8412480" cy="457200"/>
+          </a:xfrm>
+          <a:prstGeom prst="rect">
+            <a:avLst/>
+          </a:prstGeom>
+          <a:noFill/>
+          <a:ln/>
+        </p:spPr>
+        <p:txBody>
+          <a:bodyPr wrap="square" lIns="0" tIns="0" rIns="0" bIns="0" rtlCol="0" anchor="ctr"/>
+          <a:lstStyle/>
+          <a:p>
+            <a:pPr indent="0" marL="0">
+              <a:buNone/>
+            </a:pPr>
+            <a:r>
+              <a:rPr lang="en-US" sz="2200" b="1" dirty="0">
+                <a:solidFill>
+                  <a:srgbClr val="FFFFFF"/>
+                </a:solidFill>
+                <a:latin typeface="Calibri" pitchFamily="34" charset="0"/>
+                <a:ea typeface="Calibri" pitchFamily="34" charset="-122"/>
+                <a:cs typeface="Calibri" pitchFamily="34" charset="-120"/>
+              </a:rPr>
+              <a:t>🔍  Edit &amp; Revise</a:t>
+            </a:r>
+            <a:endParaRPr lang="en-US" sz="2200" dirty="0"/>
+          </a:p>
+        </p:txBody>
+      </p:sp>
+      <p:sp>
+        <p:nvSpPr>
+          <p:cNvPr id="4" name="Text 2"/>
+          <p:cNvSpPr/>
+          <p:nvPr/>
+        </p:nvSpPr>
+        <p:spPr>
+          <a:xfrm>
+            <a:off x="365760" y="868680"/>
+            <a:ext cx="8412480" cy="457200"/>
+          </a:xfrm>
+          <a:prstGeom prst="rect">
+            <a:avLst/>
+          </a:prstGeom>
+          <a:noFill/>
+          <a:ln/>
+        </p:spPr>
+        <p:txBody>
+          <a:bodyPr wrap="square" lIns="0" tIns="0" rIns="0" bIns="0" rtlCol="0" anchor="ctr"/>
+          <a:lstStyle/>
+          <a:p>
+            <a:pPr indent="0" marL="0">
+              <a:buNone/>
+            </a:pPr>
+            <a:r>
+              <a:rPr lang="en-US" sz="2400" b="1" dirty="0">
                 <a:solidFill>
                   <a:srgbClr val="0E1C42"/>
                 </a:solidFill>
@@ -5222,38 +5864,38 @@
                 <a:ea typeface="Calibri" pitchFamily="34" charset="-122"/>
                 <a:cs typeface="Calibri" pitchFamily="34" charset="-120"/>
               </a:rPr>
-              <a:t>Edit &amp; Revise</a:t>
-            </a:r>
-            <a:endParaRPr lang="en-US" sz="3200" dirty="0"/>
-          </a:p>
-        </p:txBody>
-      </p:sp>
-      <p:sp>
-        <p:nvSpPr>
-          <p:cNvPr id="4" name="Text 2"/>
-          <p:cNvSpPr/>
-          <p:nvPr/>
-        </p:nvSpPr>
-        <p:spPr>
-          <a:xfrm>
-            <a:off x="914400" y="1508760"/>
-            <a:ext cx="7315200" cy="457200"/>
-          </a:xfrm>
-          <a:prstGeom prst="rect">
-            <a:avLst/>
-          </a:prstGeom>
-          <a:noFill/>
-          <a:ln/>
-        </p:spPr>
-        <p:txBody>
-          <a:bodyPr wrap="square" lIns="0" tIns="0" rIns="0" bIns="0" rtlCol="0" anchor="ctr"/>
-          <a:lstStyle/>
-          <a:p>
-            <a:pPr algn="ctr" indent="0" marL="0">
-              <a:buNone/>
-            </a:pPr>
-            <a:r>
-              <a:rPr lang="en-US" sz="1600" dirty="0">
+              <a:t>1 minute — pick ONE thing to fix.</a:t>
+            </a:r>
+            <a:endParaRPr lang="en-US" sz="2400" dirty="0"/>
+          </a:p>
+        </p:txBody>
+      </p:sp>
+      <p:sp>
+        <p:nvSpPr>
+          <p:cNvPr id="5" name="Text 3"/>
+          <p:cNvSpPr/>
+          <p:nvPr/>
+        </p:nvSpPr>
+        <p:spPr>
+          <a:xfrm>
+            <a:off x="365760" y="1417320"/>
+            <a:ext cx="8229600" cy="237744"/>
+          </a:xfrm>
+          <a:prstGeom prst="rect">
+            <a:avLst/>
+          </a:prstGeom>
+          <a:noFill/>
+          <a:ln/>
+        </p:spPr>
+        <p:txBody>
+          <a:bodyPr wrap="square" lIns="0" tIns="0" rIns="0" bIns="0" rtlCol="0" anchor="ctr"/>
+          <a:lstStyle/>
+          <a:p>
+            <a:pPr indent="0" marL="0">
+              <a:buNone/>
+            </a:pPr>
+            <a:r>
+              <a:rPr lang="en-US" sz="1100" b="1" spc="100" kern="0" dirty="0">
                 <a:solidFill>
                   <a:srgbClr val="34B76F"/>
                 </a:solidFill>
@@ -5261,26 +5903,26 @@
                 <a:ea typeface="Calibri" pitchFamily="34" charset="-122"/>
                 <a:cs typeface="Calibri" pitchFamily="34" charset="-120"/>
               </a:rPr>
-              <a:t>1 minute — pick ONE thing to fix</a:t>
-            </a:r>
-            <a:endParaRPr lang="en-US" sz="1600" dirty="0"/>
-          </a:p>
-        </p:txBody>
-      </p:sp>
-      <p:sp>
-        <p:nvSpPr>
-          <p:cNvPr id="5" name="Shape 3"/>
-          <p:cNvSpPr/>
-          <p:nvPr/>
-        </p:nvSpPr>
-        <p:spPr>
-          <a:xfrm>
-            <a:off x="1371600" y="2103120"/>
-            <a:ext cx="6400800" cy="640080"/>
+              <a:t>TODAY'S EDIT FOCUS</a:t>
+            </a:r>
+            <a:endParaRPr lang="en-US" sz="1100" dirty="0"/>
+          </a:p>
+        </p:txBody>
+      </p:sp>
+      <p:sp>
+        <p:nvSpPr>
+          <p:cNvPr id="6" name="Shape 4"/>
+          <p:cNvSpPr/>
+          <p:nvPr/>
+        </p:nvSpPr>
+        <p:spPr>
+          <a:xfrm>
+            <a:off x="365760" y="1691640"/>
+            <a:ext cx="8412480" cy="777240"/>
           </a:xfrm>
           <a:prstGeom prst="roundRect">
             <a:avLst>
-              <a:gd name="adj" fmla="val 14286"/>
+              <a:gd name="adj" fmla="val 11765"/>
             </a:avLst>
           </a:prstGeom>
           <a:solidFill>
@@ -5303,44 +5945,30 @@
       </p:sp>
       <p:sp>
         <p:nvSpPr>
-          <p:cNvPr id="6" name="Text 4"/>
-          <p:cNvSpPr/>
-          <p:nvPr/>
-        </p:nvSpPr>
-        <p:spPr>
-          <a:xfrm>
-            <a:off x="1554480" y="2148840"/>
-            <a:ext cx="6035040" cy="548640"/>
-          </a:xfrm>
-          <a:prstGeom prst="rect">
-            <a:avLst/>
-          </a:prstGeom>
-          <a:noFill/>
-          <a:ln/>
-        </p:spPr>
-        <p:txBody>
-          <a:bodyPr wrap="square" lIns="0" tIns="0" rIns="0" bIns="0" rtlCol="0" anchor="ctr"/>
-          <a:lstStyle/>
-          <a:p>
-            <a:pPr indent="0" marL="0">
-              <a:buNone/>
-            </a:pPr>
-            <a:r>
-              <a:rPr lang="en-US" sz="1400" b="1" dirty="0">
-                <a:solidFill>
-                  <a:srgbClr val="34B76F"/>
-                </a:solidFill>
-                <a:latin typeface="Calibri" pitchFamily="34" charset="0"/>
-                <a:ea typeface="Calibri" pitchFamily="34" charset="-122"/>
-                <a:cs typeface="Calibri" pitchFamily="34" charset="-120"/>
-              </a:rPr>
-              <a:t>Today's check: </a:t>
-            </a:r>
-            <a:pPr indent="0" marL="0">
-              <a:buNone/>
-            </a:pPr>
-            <a:r>
-              <a:rPr lang="en-US" sz="1400" dirty="0">
+          <p:cNvPr id="7" name="Text 5"/>
+          <p:cNvSpPr/>
+          <p:nvPr/>
+        </p:nvSpPr>
+        <p:spPr>
+          <a:xfrm>
+            <a:off x="594360" y="1819656"/>
+            <a:ext cx="7955280" cy="521208"/>
+          </a:xfrm>
+          <a:prstGeom prst="rect">
+            <a:avLst/>
+          </a:prstGeom>
+          <a:noFill/>
+          <a:ln/>
+        </p:spPr>
+        <p:txBody>
+          <a:bodyPr wrap="square" lIns="0" tIns="0" rIns="0" bIns="0" rtlCol="0" anchor="ctr"/>
+          <a:lstStyle/>
+          <a:p>
+            <a:pPr indent="0" marL="0">
+              <a:buNone/>
+            </a:pPr>
+            <a:r>
+              <a:rPr lang="en-US" sz="1700" dirty="0">
                 <a:solidFill>
                   <a:srgbClr val="1E293B"/>
                 </a:solidFill>
@@ -5348,40 +5976,11 @@
                 <a:ea typeface="Calibri" pitchFamily="34" charset="-122"/>
                 <a:cs typeface="Calibri" pitchFamily="34" charset="-120"/>
               </a:rPr>
-              <a:t>Did I include other people's reactions, not just Stanley's?</a:t>
-            </a:r>
-            <a:endParaRPr lang="en-US" sz="1400" dirty="0"/>
-          </a:p>
-        </p:txBody>
-      </p:sp>
-      <p:sp>
-        <p:nvSpPr>
-          <p:cNvPr id="7" name="Shape 5"/>
-          <p:cNvSpPr/>
-          <p:nvPr/>
-        </p:nvSpPr>
-        <p:spPr>
-          <a:xfrm>
-            <a:off x="1371600" y="2926080"/>
-            <a:ext cx="6400800" cy="1463040"/>
-          </a:xfrm>
-          <a:prstGeom prst="roundRect">
-            <a:avLst>
-              <a:gd name="adj" fmla="val 6250"/>
-            </a:avLst>
-          </a:prstGeom>
-          <a:solidFill>
-            <a:srgbClr val="FFFFFF"/>
-          </a:solidFill>
-          <a:ln/>
-          <a:effectLst>
-            <a:outerShdw sx="100000" sy="100000" kx="0" ky="0" algn="bl" rotWithShape="0" blurRad="101600" dist="38100" dir="2700000">
-              <a:srgbClr val="000000">
-                <a:alpha val="12000"/>
-              </a:srgbClr>
-            </a:outerShdw>
-          </a:effectLst>
-        </p:spPr>
+              <a:t>Did I use a capital letter at the start of each sentence?</a:t>
+            </a:r>
+            <a:endParaRPr lang="en-US" sz="1700" dirty="0"/>
+          </a:p>
+        </p:txBody>
       </p:sp>
       <p:sp>
         <p:nvSpPr>
@@ -5391,45 +5990,24 @@
         </p:nvSpPr>
         <p:spPr>
           <a:xfrm>
-            <a:off x="1554480" y="3017520"/>
-            <a:ext cx="6035040" cy="1280160"/>
-          </a:xfrm>
-          <a:prstGeom prst="rect">
-            <a:avLst/>
-          </a:prstGeom>
-          <a:noFill/>
-          <a:ln/>
-        </p:spPr>
-        <p:txBody>
-          <a:bodyPr wrap="square" lIns="0" tIns="0" rIns="0" bIns="0" rtlCol="0" anchor="t"/>
-          <a:lstStyle/>
-          <a:p>
-            <a:pPr indent="0" marL="0">
-              <a:spcAft>
-                <a:spcPts val="200"/>
-              </a:spcAft>
-              <a:buNone/>
-            </a:pPr>
-            <a:r>
-              <a:rPr lang="en-US" sz="1300" b="1" dirty="0">
-                <a:solidFill>
-                  <a:srgbClr val="0E1C42"/>
-                </a:solidFill>
-                <a:latin typeface="Calibri" pitchFamily="34" charset="0"/>
-                <a:ea typeface="Calibri" pitchFamily="34" charset="-122"/>
-                <a:cs typeface="Calibri" pitchFamily="34" charset="-120"/>
-              </a:rPr>
-              <a:t>Quick check:
-</a:t>
-            </a:r>
-            <a:pPr indent="0" marL="0">
-              <a:spcAft>
-                <a:spcPts val="200"/>
-              </a:spcAft>
-              <a:buNone/>
-            </a:pPr>
-            <a:r>
-              <a:rPr lang="en-US" sz="1200" dirty="0">
+            <a:off x="365760" y="2651760"/>
+            <a:ext cx="8412480" cy="365760"/>
+          </a:xfrm>
+          <a:prstGeom prst="rect">
+            <a:avLst/>
+          </a:prstGeom>
+          <a:noFill/>
+          <a:ln/>
+        </p:spPr>
+        <p:txBody>
+          <a:bodyPr wrap="square" lIns="0" tIns="0" rIns="0" bIns="0" rtlCol="0" anchor="ctr"/>
+          <a:lstStyle/>
+          <a:p>
+            <a:pPr indent="0" marL="0">
+              <a:buNone/>
+            </a:pPr>
+            <a:r>
+              <a:rPr lang="en-US" sz="1500" b="1" dirty="0">
                 <a:solidFill>
                   <a:srgbClr val="1E293B"/>
                 </a:solidFill>
@@ -5437,17 +6015,13 @@
                 <a:ea typeface="Calibri" pitchFamily="34" charset="-122"/>
                 <a:cs typeface="Calibri" pitchFamily="34" charset="-120"/>
               </a:rPr>
-              <a:t>□ Capital letters at the start of every sentence
-</a:t>
-            </a:r>
-            <a:pPr indent="0" marL="0">
-              <a:spcAft>
-                <a:spcPts val="200"/>
-              </a:spcAft>
-              <a:buNone/>
-            </a:pPr>
-            <a:r>
-              <a:rPr lang="en-US" sz="1200" dirty="0">
+              <a:t>Quick check:  </a:t>
+            </a:r>
+            <a:pPr indent="0" marL="0">
+              <a:buNone/>
+            </a:pPr>
+            <a:r>
+              <a:rPr lang="en-US" sz="1500" dirty="0">
                 <a:solidFill>
                   <a:srgbClr val="1E293B"/>
                 </a:solidFill>
@@ -5455,45 +6029,9 @@
                 <a:ea typeface="Calibri" pitchFamily="34" charset="-122"/>
                 <a:cs typeface="Calibri" pitchFamily="34" charset="-120"/>
               </a:rPr>
-              <a:t>□ End punctuation ( .  ?  ! )
-</a:t>
-            </a:r>
-            <a:pPr indent="0" marL="0">
-              <a:spcAft>
-                <a:spcPts val="200"/>
-              </a:spcAft>
-              <a:buNone/>
-            </a:pPr>
-            <a:r>
-              <a:rPr lang="en-US" sz="1200" dirty="0">
-                <a:solidFill>
-                  <a:srgbClr val="1E293B"/>
-                </a:solidFill>
-                <a:latin typeface="Calibri" pitchFamily="34" charset="0"/>
-                <a:ea typeface="Calibri" pitchFamily="34" charset="-122"/>
-                <a:cs typeface="Calibri" pitchFamily="34" charset="-120"/>
-              </a:rPr>
-              <a:t>□ Spelling — circle any words that look wrong
-</a:t>
-            </a:r>
-            <a:pPr indent="0" marL="0">
-              <a:spcAft>
-                <a:spcPts val="200"/>
-              </a:spcAft>
-              <a:buNone/>
-            </a:pPr>
-            <a:r>
-              <a:rPr lang="en-US" sz="1200" dirty="0">
-                <a:solidFill>
-                  <a:srgbClr val="1E293B"/>
-                </a:solidFill>
-                <a:latin typeface="Calibri" pitchFamily="34" charset="0"/>
-                <a:ea typeface="Calibri" pitchFamily="34" charset="-122"/>
-                <a:cs typeface="Calibri" pitchFamily="34" charset="-120"/>
-              </a:rPr>
-              <a:t>□ Read it quietly to yourself — does it sound right?</a:t>
-            </a:r>
-            <a:endParaRPr lang="en-US" sz="1300" dirty="0"/>
+              <a:t>capitals  ·  end punctuation  ·  circle a word you are unsure of  ·  read it aloud</a:t>
+            </a:r>
+            <a:endParaRPr lang="en-US" sz="1500" dirty="0"/>
           </a:p>
         </p:txBody>
       </p:sp>
@@ -5531,39 +6069,23 @@
       </p:grpSpPr>
       <p:sp>
         <p:nvSpPr>
-          <p:cNvPr id="2" name="Text 0"/>
-          <p:cNvSpPr/>
-          <p:nvPr/>
-        </p:nvSpPr>
-        <p:spPr>
-          <a:xfrm>
-            <a:off x="3657600" y="457200"/>
-            <a:ext cx="1828800" cy="731520"/>
-          </a:xfrm>
-          <a:prstGeom prst="rect">
-            <a:avLst/>
-          </a:prstGeom>
-          <a:noFill/>
-          <a:ln/>
-        </p:spPr>
-        <p:txBody>
-          <a:bodyPr wrap="square" lIns="0" tIns="0" rIns="0" bIns="0" rtlCol="0" anchor="ctr"/>
-          <a:lstStyle/>
-          <a:p>
-            <a:pPr algn="ctr" indent="0" marL="0">
-              <a:buNone/>
-            </a:pPr>
-            <a:r>
-              <a:rPr lang="en-US" sz="4400" dirty="0">
-                <a:solidFill>
-                  <a:srgbClr val="000000"/>
-                </a:solidFill>
-              </a:rPr>
-              <a:t>🗣️</a:t>
-            </a:r>
-            <a:endParaRPr lang="en-US" sz="4400" dirty="0"/>
-          </a:p>
-        </p:txBody>
+          <p:cNvPr id="2" name="Shape 0"/>
+          <p:cNvSpPr/>
+          <p:nvPr/>
+        </p:nvSpPr>
+        <p:spPr>
+          <a:xfrm>
+            <a:off x="0" y="0"/>
+            <a:ext cx="9144000" cy="566928"/>
+          </a:xfrm>
+          <a:prstGeom prst="rect">
+            <a:avLst/>
+          </a:prstGeom>
+          <a:solidFill>
+            <a:srgbClr val="55C8E8"/>
+          </a:solidFill>
+          <a:ln/>
+        </p:spPr>
       </p:sp>
       <p:sp>
         <p:nvSpPr>
@@ -5573,24 +6095,63 @@
         </p:nvSpPr>
         <p:spPr>
           <a:xfrm>
-            <a:off x="914400" y="1097280"/>
-            <a:ext cx="7315200" cy="640080"/>
-          </a:xfrm>
-          <a:prstGeom prst="rect">
-            <a:avLst/>
-          </a:prstGeom>
-          <a:noFill/>
-          <a:ln/>
-        </p:spPr>
-        <p:txBody>
-          <a:bodyPr wrap="square" lIns="0" tIns="0" rIns="0" bIns="0" rtlCol="0" anchor="ctr"/>
-          <a:lstStyle/>
-          <a:p>
-            <a:pPr algn="ctr" indent="0" marL="0">
-              <a:buNone/>
-            </a:pPr>
-            <a:r>
-              <a:rPr lang="en-US" sz="3400" b="1" dirty="0">
+            <a:off x="365760" y="54864"/>
+            <a:ext cx="8412480" cy="457200"/>
+          </a:xfrm>
+          <a:prstGeom prst="rect">
+            <a:avLst/>
+          </a:prstGeom>
+          <a:noFill/>
+          <a:ln/>
+        </p:spPr>
+        <p:txBody>
+          <a:bodyPr wrap="square" lIns="0" tIns="0" rIns="0" bIns="0" rtlCol="0" anchor="ctr"/>
+          <a:lstStyle/>
+          <a:p>
+            <a:pPr indent="0" marL="0">
+              <a:buNone/>
+            </a:pPr>
+            <a:r>
+              <a:rPr lang="en-US" sz="2200" b="1" dirty="0">
+                <a:solidFill>
+                  <a:srgbClr val="FFFFFF"/>
+                </a:solidFill>
+                <a:latin typeface="Calibri" pitchFamily="34" charset="0"/>
+                <a:ea typeface="Calibri" pitchFamily="34" charset="-122"/>
+                <a:cs typeface="Calibri" pitchFamily="34" charset="-120"/>
+              </a:rPr>
+              <a:t>🗣️  Share Time</a:t>
+            </a:r>
+            <a:endParaRPr lang="en-US" sz="2200" dirty="0"/>
+          </a:p>
+        </p:txBody>
+      </p:sp>
+      <p:sp>
+        <p:nvSpPr>
+          <p:cNvPr id="4" name="Text 2"/>
+          <p:cNvSpPr/>
+          <p:nvPr/>
+        </p:nvSpPr>
+        <p:spPr>
+          <a:xfrm>
+            <a:off x="365760" y="1005840"/>
+            <a:ext cx="8412480" cy="548640"/>
+          </a:xfrm>
+          <a:prstGeom prst="rect">
+            <a:avLst/>
+          </a:prstGeom>
+          <a:noFill/>
+          <a:ln/>
+        </p:spPr>
+        <p:txBody>
+          <a:bodyPr wrap="square" lIns="0" tIns="0" rIns="0" bIns="0" rtlCol="0" anchor="ctr"/>
+          <a:lstStyle/>
+          <a:p>
+            <a:pPr indent="0" marL="0">
+              <a:buNone/>
+            </a:pPr>
+            <a:r>
+              <a:rPr lang="en-US" sz="2600" b="1" dirty="0">
                 <a:solidFill>
                   <a:srgbClr val="0E1C42"/>
                 </a:solidFill>
@@ -5598,191 +6159,48 @@
                 <a:ea typeface="Calibri" pitchFamily="34" charset="-122"/>
                 <a:cs typeface="Calibri" pitchFamily="34" charset="-120"/>
               </a:rPr>
-              <a:t>Share Time</a:t>
-            </a:r>
-            <a:endParaRPr lang="en-US" sz="3400" dirty="0"/>
-          </a:p>
-        </p:txBody>
-      </p:sp>
-      <p:sp>
-        <p:nvSpPr>
-          <p:cNvPr id="4" name="Text 2"/>
-          <p:cNvSpPr/>
-          <p:nvPr/>
-        </p:nvSpPr>
-        <p:spPr>
-          <a:xfrm>
-            <a:off x="914400" y="1737360"/>
-            <a:ext cx="7315200" cy="457200"/>
-          </a:xfrm>
-          <a:prstGeom prst="rect">
-            <a:avLst/>
-          </a:prstGeom>
-          <a:noFill/>
-          <a:ln/>
-        </p:spPr>
-        <p:txBody>
-          <a:bodyPr wrap="square" lIns="0" tIns="0" rIns="0" bIns="0" rtlCol="0" anchor="ctr"/>
-          <a:lstStyle/>
-          <a:p>
-            <a:pPr algn="ctr" indent="0" marL="0">
+              <a:t>3 minutes — let's hear your writing!</a:t>
+            </a:r>
+            <a:endParaRPr lang="en-US" sz="2600" dirty="0"/>
+          </a:p>
+        </p:txBody>
+      </p:sp>
+      <p:sp>
+        <p:nvSpPr>
+          <p:cNvPr id="5" name="Text 3"/>
+          <p:cNvSpPr/>
+          <p:nvPr/>
+        </p:nvSpPr>
+        <p:spPr>
+          <a:xfrm>
+            <a:off x="365760" y="1691640"/>
+            <a:ext cx="8412480" cy="457200"/>
+          </a:xfrm>
+          <a:prstGeom prst="rect">
+            <a:avLst/>
+          </a:prstGeom>
+          <a:noFill/>
+          <a:ln/>
+        </p:spPr>
+        <p:txBody>
+          <a:bodyPr wrap="square" lIns="0" tIns="0" rIns="0" bIns="0" rtlCol="0" anchor="ctr"/>
+          <a:lstStyle/>
+          <a:p>
+            <a:pPr indent="0" marL="0">
               <a:buNone/>
             </a:pPr>
             <a:r>
               <a:rPr lang="en-US" sz="1700" dirty="0">
                 <a:solidFill>
-                  <a:srgbClr val="55C8E8"/>
-                </a:solidFill>
-                <a:latin typeface="Calibri" pitchFamily="34" charset="0"/>
-                <a:ea typeface="Calibri" pitchFamily="34" charset="-122"/>
-                <a:cs typeface="Calibri" pitchFamily="34" charset="-120"/>
-              </a:rPr>
-              <a:t>3 minutes — let's hear your writing!</a:t>
+                  <a:srgbClr val="1E293B"/>
+                </a:solidFill>
+                <a:latin typeface="Calibri" pitchFamily="34" charset="0"/>
+                <a:ea typeface="Calibri" pitchFamily="34" charset="-122"/>
+                <a:cs typeface="Calibri" pitchFamily="34" charset="-120"/>
+              </a:rPr>
+              <a:t>Raise your hand  ·  paste it in the chat  ·  or hold your paper up to the camera</a:t>
             </a:r>
             <a:endParaRPr lang="en-US" sz="1700" dirty="0"/>
-          </a:p>
-        </p:txBody>
-      </p:sp>
-      <p:sp>
-        <p:nvSpPr>
-          <p:cNvPr id="5" name="Shape 3"/>
-          <p:cNvSpPr/>
-          <p:nvPr/>
-        </p:nvSpPr>
-        <p:spPr>
-          <a:xfrm>
-            <a:off x="1828800" y="2468880"/>
-            <a:ext cx="5486400" cy="1645920"/>
-          </a:xfrm>
-          <a:prstGeom prst="roundRect">
-            <a:avLst>
-              <a:gd name="adj" fmla="val 6667"/>
-            </a:avLst>
-          </a:prstGeom>
-          <a:solidFill>
-            <a:srgbClr val="FFFFFF"/>
-          </a:solidFill>
-          <a:ln/>
-          <a:effectLst>
-            <a:outerShdw sx="100000" sy="100000" kx="0" ky="0" algn="bl" rotWithShape="0" blurRad="101600" dist="38100" dir="2700000">
-              <a:srgbClr val="000000">
-                <a:alpha val="12000"/>
-              </a:srgbClr>
-            </a:outerShdw>
-          </a:effectLst>
-        </p:spPr>
-      </p:sp>
-      <p:sp>
-        <p:nvSpPr>
-          <p:cNvPr id="6" name="Text 4"/>
-          <p:cNvSpPr/>
-          <p:nvPr/>
-        </p:nvSpPr>
-        <p:spPr>
-          <a:xfrm>
-            <a:off x="2103120" y="2560320"/>
-            <a:ext cx="4937760" cy="1463040"/>
-          </a:xfrm>
-          <a:prstGeom prst="rect">
-            <a:avLst/>
-          </a:prstGeom>
-          <a:noFill/>
-          <a:ln/>
-        </p:spPr>
-        <p:txBody>
-          <a:bodyPr wrap="square" lIns="0" tIns="0" rIns="0" bIns="0" rtlCol="0" anchor="t"/>
-          <a:lstStyle/>
-          <a:p>
-            <a:pPr indent="0" marL="0">
-              <a:spcAft>
-                <a:spcPts val="200"/>
-              </a:spcAft>
-              <a:buNone/>
-            </a:pPr>
-            <a:r>
-              <a:rPr lang="en-US" sz="1400" b="1" dirty="0">
-                <a:solidFill>
-                  <a:srgbClr val="0E1C42"/>
-                </a:solidFill>
-                <a:latin typeface="Calibri" pitchFamily="34" charset="0"/>
-                <a:ea typeface="Calibri" pitchFamily="34" charset="-122"/>
-                <a:cs typeface="Calibri" pitchFamily="34" charset="-120"/>
-              </a:rPr>
-              <a:t>How to share:
-</a:t>
-            </a:r>
-            <a:pPr indent="0" marL="0">
-              <a:spcAft>
-                <a:spcPts val="200"/>
-              </a:spcAft>
-              <a:buNone/>
-            </a:pPr>
-            <a:r>
-              <a:rPr lang="en-US" sz="1300" dirty="0">
-                <a:solidFill>
-                  <a:srgbClr val="1E293B"/>
-                </a:solidFill>
-                <a:latin typeface="Calibri" pitchFamily="34" charset="0"/>
-                <a:ea typeface="Calibri" pitchFamily="34" charset="-122"/>
-                <a:cs typeface="Calibri" pitchFamily="34" charset="-120"/>
-              </a:rPr>
-              <a:t>✋ Raise your hand if you want to read yours aloud
-</a:t>
-            </a:r>
-            <a:pPr indent="0" marL="0">
-              <a:spcAft>
-                <a:spcPts val="200"/>
-              </a:spcAft>
-              <a:buNone/>
-            </a:pPr>
-            <a:r>
-              <a:rPr lang="en-US" sz="1300" dirty="0">
-                <a:solidFill>
-                  <a:srgbClr val="1E293B"/>
-                </a:solidFill>
-                <a:latin typeface="Calibri" pitchFamily="34" charset="0"/>
-                <a:ea typeface="Calibri" pitchFamily="34" charset="-122"/>
-                <a:cs typeface="Calibri" pitchFamily="34" charset="-120"/>
-              </a:rPr>
-              <a:t>💬 Or paste your writing in the chat
-</a:t>
-            </a:r>
-            <a:pPr indent="0" marL="0">
-              <a:spcAft>
-                <a:spcPts val="200"/>
-              </a:spcAft>
-              <a:buNone/>
-            </a:pPr>
-            <a:r>
-              <a:rPr lang="en-US" sz="1300" dirty="0">
-                <a:solidFill>
-                  <a:srgbClr val="1E293B"/>
-                </a:solidFill>
-                <a:latin typeface="Calibri" pitchFamily="34" charset="0"/>
-                <a:ea typeface="Calibri" pitchFamily="34" charset="-122"/>
-                <a:cs typeface="Calibri" pitchFamily="34" charset="-120"/>
-              </a:rPr>
-              <a:t>👂 Listen respectfully when others share
-</a:t>
-            </a:r>
-            <a:pPr indent="0" marL="0">
-              <a:spcAft>
-                <a:spcPts val="200"/>
-              </a:spcAft>
-              <a:buNone/>
-            </a:pPr>
-            <a:r>
-              <a:rPr lang="en-US" sz="1200" i="1" dirty="0">
-                <a:solidFill>
-                  <a:srgbClr val="64748B"/>
-                </a:solidFill>
-                <a:latin typeface="Calibri" pitchFamily="34" charset="0"/>
-                <a:ea typeface="Calibri" pitchFamily="34" charset="-122"/>
-                <a:cs typeface="Calibri" pitchFamily="34" charset="-120"/>
-              </a:rPr>
-              <a:t>Every writer's ideas matter — there are no wrong answers.</a:t>
-            </a:r>
-            <a:endParaRPr lang="en-US" sz="1400" dirty="0"/>
           </a:p>
         </p:txBody>
       </p:sp>
@@ -5800,7 +6218,7 @@
     <p:bg>
       <p:bgPr>
         <a:solidFill>
-          <a:srgbClr val="E5F7FC"/>
+          <a:srgbClr val="F8FAFC"/>
         </a:solidFill>
       </p:bgPr>
     </p:bg>
@@ -5820,30 +6238,128 @@
       </p:grpSpPr>
       <p:sp>
         <p:nvSpPr>
-          <p:cNvPr id="2" name="Text 0"/>
-          <p:cNvSpPr/>
-          <p:nvPr/>
-        </p:nvSpPr>
-        <p:spPr>
-          <a:xfrm>
-            <a:off x="365760" y="164592"/>
-            <a:ext cx="5943600" cy="566928"/>
-          </a:xfrm>
-          <a:prstGeom prst="rect">
-            <a:avLst/>
-          </a:prstGeom>
-          <a:noFill/>
-          <a:ln/>
-        </p:spPr>
-        <p:txBody>
-          <a:bodyPr wrap="square" lIns="0" tIns="0" rIns="0" bIns="0" rtlCol="0" anchor="ctr"/>
-          <a:lstStyle/>
-          <a:p>
-            <a:pPr algn="l" indent="0" marL="0">
-              <a:buNone/>
-            </a:pPr>
-            <a:r>
-              <a:rPr lang="en-US" sz="2800" b="1" dirty="0">
+          <p:cNvPr id="2" name="Shape 0"/>
+          <p:cNvSpPr/>
+          <p:nvPr/>
+        </p:nvSpPr>
+        <p:spPr>
+          <a:xfrm>
+            <a:off x="0" y="0"/>
+            <a:ext cx="9144000" cy="566928"/>
+          </a:xfrm>
+          <a:prstGeom prst="rect">
+            <a:avLst/>
+          </a:prstGeom>
+          <a:solidFill>
+            <a:srgbClr val="55C8E8"/>
+          </a:solidFill>
+          <a:ln/>
+        </p:spPr>
+      </p:sp>
+      <p:sp>
+        <p:nvSpPr>
+          <p:cNvPr id="3" name="Text 1"/>
+          <p:cNvSpPr/>
+          <p:nvPr/>
+        </p:nvSpPr>
+        <p:spPr>
+          <a:xfrm>
+            <a:off x="365760" y="54864"/>
+            <a:ext cx="8412480" cy="457200"/>
+          </a:xfrm>
+          <a:prstGeom prst="rect">
+            <a:avLst/>
+          </a:prstGeom>
+          <a:noFill/>
+          <a:ln/>
+        </p:spPr>
+        <p:txBody>
+          <a:bodyPr wrap="square" lIns="0" tIns="0" rIns="0" bIns="0" rtlCol="0" anchor="ctr"/>
+          <a:lstStyle/>
+          <a:p>
+            <a:pPr indent="0" marL="0">
+              <a:buNone/>
+            </a:pPr>
+            <a:r>
+              <a:rPr lang="en-US" sz="2200" b="1" dirty="0">
+                <a:solidFill>
+                  <a:srgbClr val="FFFFFF"/>
+                </a:solidFill>
+                <a:latin typeface="Calibri" pitchFamily="34" charset="0"/>
+                <a:ea typeface="Calibri" pitchFamily="34" charset="-122"/>
+                <a:cs typeface="Calibri" pitchFamily="34" charset="-120"/>
+              </a:rPr>
+              <a:t>📖  Today</a:t>
+            </a:r>
+            <a:endParaRPr lang="en-US" sz="2200" dirty="0"/>
+          </a:p>
+        </p:txBody>
+      </p:sp>
+      <p:sp>
+        <p:nvSpPr>
+          <p:cNvPr id="4" name="Text 2"/>
+          <p:cNvSpPr/>
+          <p:nvPr/>
+        </p:nvSpPr>
+        <p:spPr>
+          <a:xfrm>
+            <a:off x="365760" y="777240"/>
+            <a:ext cx="8229600" cy="237744"/>
+          </a:xfrm>
+          <a:prstGeom prst="rect">
+            <a:avLst/>
+          </a:prstGeom>
+          <a:noFill/>
+          <a:ln/>
+        </p:spPr>
+        <p:txBody>
+          <a:bodyPr wrap="square" lIns="0" tIns="0" rIns="0" bIns="0" rtlCol="0" anchor="ctr"/>
+          <a:lstStyle/>
+          <a:p>
+            <a:pPr indent="0" marL="0">
+              <a:buNone/>
+            </a:pPr>
+            <a:r>
+              <a:rPr lang="en-US" sz="1100" b="1" spc="100" kern="0" dirty="0">
+                <a:solidFill>
+                  <a:srgbClr val="8B6FC0"/>
+                </a:solidFill>
+                <a:latin typeface="Calibri" pitchFamily="34" charset="0"/>
+                <a:ea typeface="Calibri" pitchFamily="34" charset="-122"/>
+                <a:cs typeface="Calibri" pitchFamily="34" charset="-120"/>
+              </a:rPr>
+              <a:t>READING</a:t>
+            </a:r>
+            <a:endParaRPr lang="en-US" sz="1100" dirty="0"/>
+          </a:p>
+        </p:txBody>
+      </p:sp>
+      <p:sp>
+        <p:nvSpPr>
+          <p:cNvPr id="5" name="Text 3"/>
+          <p:cNvSpPr/>
+          <p:nvPr/>
+        </p:nvSpPr>
+        <p:spPr>
+          <a:xfrm>
+            <a:off x="365760" y="1014984"/>
+            <a:ext cx="8412480" cy="365760"/>
+          </a:xfrm>
+          <a:prstGeom prst="rect">
+            <a:avLst/>
+          </a:prstGeom>
+          <a:noFill/>
+          <a:ln/>
+        </p:spPr>
+        <p:txBody>
+          <a:bodyPr wrap="square" lIns="0" tIns="0" rIns="0" bIns="0" rtlCol="0" anchor="ctr"/>
+          <a:lstStyle/>
+          <a:p>
+            <a:pPr indent="0" marL="0">
+              <a:buNone/>
+            </a:pPr>
+            <a:r>
+              <a:rPr lang="en-US" sz="2000" b="1" dirty="0">
                 <a:solidFill>
                   <a:srgbClr val="0E1C42"/>
                 </a:solidFill>
@@ -5851,155 +6367,71 @@
                 <a:ea typeface="Calibri" pitchFamily="34" charset="-122"/>
                 <a:cs typeface="Calibri" pitchFamily="34" charset="-120"/>
               </a:rPr>
-              <a:t>💡 Today's Focus</a:t>
-            </a:r>
-            <a:endParaRPr lang="en-US" sz="2800" dirty="0"/>
-          </a:p>
-        </p:txBody>
-      </p:sp>
-      <p:sp>
-        <p:nvSpPr>
-          <p:cNvPr id="3" name="Shape 1"/>
-          <p:cNvSpPr/>
-          <p:nvPr/>
-        </p:nvSpPr>
-        <p:spPr>
-          <a:xfrm>
-            <a:off x="365760" y="749808"/>
-            <a:ext cx="8412480" cy="0"/>
-          </a:xfrm>
-          <a:prstGeom prst="line">
-            <a:avLst/>
-          </a:prstGeom>
-          <a:noFill/>
-          <a:ln w="19050">
-            <a:solidFill>
-              <a:srgbClr val="8B8BB5"/>
-            </a:solidFill>
-            <a:prstDash val="solid"/>
-          </a:ln>
-        </p:spPr>
-      </p:sp>
-      <p:sp>
-        <p:nvSpPr>
-          <p:cNvPr id="4" name="Shape 2"/>
-          <p:cNvSpPr/>
-          <p:nvPr/>
-        </p:nvSpPr>
-        <p:spPr>
-          <a:xfrm>
-            <a:off x="6492240" y="173736"/>
-            <a:ext cx="2286000" cy="502920"/>
+              <a:t>Whole Book Summary</a:t>
+            </a:r>
+            <a:endParaRPr lang="en-US" sz="2000" dirty="0"/>
+          </a:p>
+        </p:txBody>
+      </p:sp>
+      <p:sp>
+        <p:nvSpPr>
+          <p:cNvPr id="6" name="Text 4"/>
+          <p:cNvSpPr/>
+          <p:nvPr/>
+        </p:nvSpPr>
+        <p:spPr>
+          <a:xfrm>
+            <a:off x="365760" y="1508760"/>
+            <a:ext cx="8229600" cy="237744"/>
+          </a:xfrm>
+          <a:prstGeom prst="rect">
+            <a:avLst/>
+          </a:prstGeom>
+          <a:noFill/>
+          <a:ln/>
+        </p:spPr>
+        <p:txBody>
+          <a:bodyPr wrap="square" lIns="0" tIns="0" rIns="0" bIns="0" rtlCol="0" anchor="ctr"/>
+          <a:lstStyle/>
+          <a:p>
+            <a:pPr indent="0" marL="0">
+              <a:buNone/>
+            </a:pPr>
+            <a:r>
+              <a:rPr lang="en-US" sz="1100" b="1" spc="100" kern="0" dirty="0">
+                <a:solidFill>
+                  <a:srgbClr val="C7922C"/>
+                </a:solidFill>
+                <a:latin typeface="Calibri" pitchFamily="34" charset="0"/>
+                <a:ea typeface="Calibri" pitchFamily="34" charset="-122"/>
+                <a:cs typeface="Calibri" pitchFamily="34" charset="-120"/>
+              </a:rPr>
+              <a:t>BIG QUESTION</a:t>
+            </a:r>
+            <a:endParaRPr lang="en-US" sz="1100" dirty="0"/>
+          </a:p>
+        </p:txBody>
+      </p:sp>
+      <p:sp>
+        <p:nvSpPr>
+          <p:cNvPr id="7" name="Shape 5"/>
+          <p:cNvSpPr/>
+          <p:nvPr/>
+        </p:nvSpPr>
+        <p:spPr>
+          <a:xfrm>
+            <a:off x="365760" y="1746504"/>
+            <a:ext cx="8412480" cy="731520"/>
           </a:xfrm>
           <a:prstGeom prst="roundRect">
             <a:avLst>
-              <a:gd name="adj" fmla="val 21818"/>
-            </a:avLst>
-          </a:prstGeom>
-          <a:solidFill>
-            <a:srgbClr val="8B8BB5"/>
-          </a:solidFill>
-          <a:ln/>
-        </p:spPr>
-      </p:sp>
-      <p:sp>
-        <p:nvSpPr>
-          <p:cNvPr id="5" name="Text 3"/>
-          <p:cNvSpPr/>
-          <p:nvPr/>
-        </p:nvSpPr>
-        <p:spPr>
-          <a:xfrm>
-            <a:off x="6492240" y="173736"/>
-            <a:ext cx="2286000" cy="502920"/>
-          </a:xfrm>
-          <a:prstGeom prst="rect">
-            <a:avLst/>
-          </a:prstGeom>
-          <a:noFill/>
-          <a:ln/>
-        </p:spPr>
-        <p:txBody>
-          <a:bodyPr wrap="square" lIns="0" tIns="0" rIns="0" bIns="0" rtlCol="0" anchor="ctr"/>
-          <a:lstStyle/>
-          <a:p>
-            <a:pPr algn="ctr" indent="0" marL="0">
-              <a:buNone/>
-            </a:pPr>
-            <a:r>
-              <a:rPr lang="en-US" sz="1100" b="1" dirty="0">
-                <a:solidFill>
-                  <a:srgbClr val="0E1C42"/>
-                </a:solidFill>
-                <a:latin typeface="Calibri" pitchFamily="34" charset="0"/>
-                <a:ea typeface="Calibri" pitchFamily="34" charset="-122"/>
-                <a:cs typeface="Calibri" pitchFamily="34" charset="-120"/>
-              </a:rPr>
-              <a:t>CHAT PROMPT</a:t>
-            </a:r>
-            <a:endParaRPr lang="en-US" sz="1100" dirty="0"/>
-          </a:p>
-        </p:txBody>
-      </p:sp>
-      <p:sp>
-        <p:nvSpPr>
-          <p:cNvPr id="6" name="Text 4"/>
-          <p:cNvSpPr/>
-          <p:nvPr/>
-        </p:nvSpPr>
-        <p:spPr>
-          <a:xfrm>
-            <a:off x="457200" y="914400"/>
-            <a:ext cx="8046720" cy="292608"/>
-          </a:xfrm>
-          <a:prstGeom prst="rect">
-            <a:avLst/>
-          </a:prstGeom>
-          <a:noFill/>
-          <a:ln/>
-        </p:spPr>
-        <p:txBody>
-          <a:bodyPr wrap="square" lIns="0" tIns="0" rIns="0" bIns="0" rtlCol="0" anchor="ctr"/>
-          <a:lstStyle/>
-          <a:p>
-            <a:pPr indent="0" marL="0">
-              <a:buNone/>
-            </a:pPr>
-            <a:r>
-              <a:rPr lang="en-US" sz="1100" b="1" spc="200" kern="0" dirty="0">
-                <a:solidFill>
-                  <a:srgbClr val="C7922C"/>
-                </a:solidFill>
-                <a:latin typeface="Calibri" pitchFamily="34" charset="0"/>
-                <a:ea typeface="Calibri" pitchFamily="34" charset="-122"/>
-                <a:cs typeface="Calibri" pitchFamily="34" charset="-120"/>
-              </a:rPr>
-              <a:t>BIG QUESTION</a:t>
-            </a:r>
-            <a:endParaRPr lang="en-US" sz="1100" dirty="0"/>
-          </a:p>
-        </p:txBody>
-      </p:sp>
-      <p:sp>
-        <p:nvSpPr>
-          <p:cNvPr id="7" name="Shape 5"/>
-          <p:cNvSpPr/>
-          <p:nvPr/>
-        </p:nvSpPr>
-        <p:spPr>
-          <a:xfrm>
-            <a:off x="457200" y="1234440"/>
-            <a:ext cx="8229600" cy="640080"/>
-          </a:xfrm>
-          <a:prstGeom prst="roundRect">
-            <a:avLst>
-              <a:gd name="adj" fmla="val 14286"/>
+              <a:gd name="adj" fmla="val 12500"/>
             </a:avLst>
           </a:prstGeom>
           <a:solidFill>
             <a:srgbClr val="FEF6E8"/>
           </a:solidFill>
-          <a:ln w="12700">
+          <a:ln w="19050">
             <a:solidFill>
               <a:srgbClr val="C7922C"/>
             </a:solidFill>
@@ -6022,24 +6454,24 @@
         </p:nvSpPr>
         <p:spPr>
           <a:xfrm>
-            <a:off x="640080" y="1344168"/>
-            <a:ext cx="7863840" cy="411480"/>
-          </a:xfrm>
-          <a:prstGeom prst="rect">
-            <a:avLst/>
-          </a:prstGeom>
-          <a:noFill/>
-          <a:ln/>
-        </p:spPr>
-        <p:txBody>
-          <a:bodyPr wrap="square" lIns="0" tIns="0" rIns="0" bIns="0" rtlCol="0" anchor="ctr"/>
-          <a:lstStyle/>
-          <a:p>
-            <a:pPr indent="0" marL="0">
-              <a:buNone/>
-            </a:pPr>
-            <a:r>
-              <a:rPr lang="en-US" sz="1800" i="1" dirty="0">
+            <a:off x="594360" y="1874520"/>
+            <a:ext cx="7955280" cy="475488"/>
+          </a:xfrm>
+          <a:prstGeom prst="rect">
+            <a:avLst/>
+          </a:prstGeom>
+          <a:noFill/>
+          <a:ln/>
+        </p:spPr>
+        <p:txBody>
+          <a:bodyPr wrap="square" lIns="0" tIns="0" rIns="0" bIns="0" rtlCol="0" anchor="ctr"/>
+          <a:lstStyle/>
+          <a:p>
+            <a:pPr indent="0" marL="0">
+              <a:buNone/>
+            </a:pPr>
+            <a:r>
+              <a:rPr lang="en-US" sz="1700" dirty="0">
                 <a:solidFill>
                   <a:srgbClr val="1E293B"/>
                 </a:solidFill>
@@ -6049,7 +6481,7 @@
               </a:rPr>
               <a:t>If you could only tell someone THREE things about Flat Stanley , what would they be?</a:t>
             </a:r>
-            <a:endParaRPr lang="en-US" sz="1800" dirty="0"/>
+            <a:endParaRPr lang="en-US" sz="1700" dirty="0"/>
           </a:p>
         </p:txBody>
       </p:sp>
@@ -6061,26 +6493,26 @@
         </p:nvSpPr>
         <p:spPr>
           <a:xfrm>
-            <a:off x="457200" y="1965960"/>
-            <a:ext cx="8046720" cy="292608"/>
-          </a:xfrm>
-          <a:prstGeom prst="rect">
-            <a:avLst/>
-          </a:prstGeom>
-          <a:noFill/>
-          <a:ln/>
-        </p:spPr>
-        <p:txBody>
-          <a:bodyPr wrap="square" lIns="0" tIns="0" rIns="0" bIns="0" rtlCol="0" anchor="ctr"/>
-          <a:lstStyle/>
-          <a:p>
-            <a:pPr indent="0" marL="0">
-              <a:buNone/>
-            </a:pPr>
-            <a:r>
-              <a:rPr lang="en-US" sz="1100" b="1" spc="200" kern="0" dirty="0">
-                <a:solidFill>
-                  <a:srgbClr val="8B6FC0"/>
+            <a:off x="365760" y="2606040"/>
+            <a:ext cx="8229600" cy="237744"/>
+          </a:xfrm>
+          <a:prstGeom prst="rect">
+            <a:avLst/>
+          </a:prstGeom>
+          <a:noFill/>
+          <a:ln/>
+        </p:spPr>
+        <p:txBody>
+          <a:bodyPr wrap="square" lIns="0" tIns="0" rIns="0" bIns="0" rtlCol="0" anchor="ctr"/>
+          <a:lstStyle/>
+          <a:p>
+            <a:pPr indent="0" marL="0">
+              <a:buNone/>
+            </a:pPr>
+            <a:r>
+              <a:rPr lang="en-US" sz="1100" b="1" spc="100" kern="0" dirty="0">
+                <a:solidFill>
+                  <a:srgbClr val="55C8E8"/>
                 </a:solidFill>
                 <a:latin typeface="Calibri" pitchFamily="34" charset="0"/>
                 <a:ea typeface="Calibri" pitchFamily="34" charset="-122"/>
@@ -6100,8 +6532,8 @@
         </p:nvSpPr>
         <p:spPr>
           <a:xfrm>
-            <a:off x="640080" y="2286000"/>
-            <a:ext cx="7863840" cy="731520"/>
+            <a:off x="365760" y="2843784"/>
+            <a:ext cx="8412480" cy="914400"/>
           </a:xfrm>
           <a:prstGeom prst="rect">
             <a:avLst/>
@@ -6125,7 +6557,7 @@
                 <a:ea typeface="Calibri" pitchFamily="34" charset="-122"/>
                 <a:cs typeface="Calibri" pitchFamily="34" charset="-120"/>
               </a:rPr>
-              <a:t>Good readers preview a book before reading. They look at the cover, chapter titles, and pictures to make predictions.</a:t>
+              <a:t>Good readers summarize when they finish a story. A summary retells only the most important events, in the order they happened. It leaves out the small details, no matter how funny they were.</a:t>
             </a:r>
             <a:endParaRPr lang="en-US" sz="1500" dirty="0"/>
           </a:p>
@@ -6142,6 +6574,749 @@
 <file path=ppt/slides/slide7.xml><?xml version="1.0" encoding="utf-8"?>
 <p:sld xmlns:a="http://schemas.openxmlformats.org/drawingml/2006/main" xmlns:r="http://schemas.openxmlformats.org/officeDocument/2006/relationships" xmlns:p="http://schemas.openxmlformats.org/presentationml/2006/main">
   <p:cSld name="Slide 7">
+    <p:bg>
+      <p:bgPr>
+        <a:solidFill>
+          <a:srgbClr val="F8FAFC"/>
+        </a:solidFill>
+      </p:bgPr>
+    </p:bg>
+    <p:spTree>
+      <p:nvGrpSpPr>
+        <p:cNvPr id="1" name=""/>
+        <p:cNvGrpSpPr/>
+        <p:nvPr/>
+      </p:nvGrpSpPr>
+      <p:grpSpPr>
+        <a:xfrm>
+          <a:off x="0" y="0"/>
+          <a:ext cx="0" cy="0"/>
+          <a:chOff x="0" y="0"/>
+          <a:chExt cx="0" cy="0"/>
+        </a:xfrm>
+      </p:grpSpPr>
+      <p:sp>
+        <p:nvSpPr>
+          <p:cNvPr id="2" name="Shape 0"/>
+          <p:cNvSpPr/>
+          <p:nvPr/>
+        </p:nvSpPr>
+        <p:spPr>
+          <a:xfrm>
+            <a:off x="0" y="0"/>
+            <a:ext cx="9144000" cy="566928"/>
+          </a:xfrm>
+          <a:prstGeom prst="rect">
+            <a:avLst/>
+          </a:prstGeom>
+          <a:solidFill>
+            <a:srgbClr val="55C8E8"/>
+          </a:solidFill>
+          <a:ln/>
+        </p:spPr>
+      </p:sp>
+      <p:sp>
+        <p:nvSpPr>
+          <p:cNvPr id="3" name="Text 1"/>
+          <p:cNvSpPr/>
+          <p:nvPr/>
+        </p:nvSpPr>
+        <p:spPr>
+          <a:xfrm>
+            <a:off x="365760" y="54864"/>
+            <a:ext cx="8412480" cy="457200"/>
+          </a:xfrm>
+          <a:prstGeom prst="rect">
+            <a:avLst/>
+          </a:prstGeom>
+          <a:noFill/>
+          <a:ln/>
+        </p:spPr>
+        <p:txBody>
+          <a:bodyPr wrap="square" lIns="0" tIns="0" rIns="0" bIns="0" rtlCol="0" anchor="ctr"/>
+          <a:lstStyle/>
+          <a:p>
+            <a:pPr indent="0" marL="0">
+              <a:buNone/>
+            </a:pPr>
+            <a:r>
+              <a:rPr lang="en-US" sz="2200" b="1" dirty="0">
+                <a:solidFill>
+                  <a:srgbClr val="FFFFFF"/>
+                </a:solidFill>
+                <a:latin typeface="Calibri" pitchFamily="34" charset="0"/>
+                <a:ea typeface="Calibri" pitchFamily="34" charset="-122"/>
+                <a:cs typeface="Calibri" pitchFamily="34" charset="-120"/>
+              </a:rPr>
+              <a:t>✏️  Daily Oral Language</a:t>
+            </a:r>
+            <a:endParaRPr lang="en-US" sz="2200" dirty="0"/>
+          </a:p>
+        </p:txBody>
+      </p:sp>
+      <p:sp>
+        <p:nvSpPr>
+          <p:cNvPr id="4" name="Text 2"/>
+          <p:cNvSpPr/>
+          <p:nvPr/>
+        </p:nvSpPr>
+        <p:spPr>
+          <a:xfrm>
+            <a:off x="365760" y="749808"/>
+            <a:ext cx="8229600" cy="237744"/>
+          </a:xfrm>
+          <a:prstGeom prst="rect">
+            <a:avLst/>
+          </a:prstGeom>
+          <a:noFill/>
+          <a:ln/>
+        </p:spPr>
+        <p:txBody>
+          <a:bodyPr wrap="square" lIns="0" tIns="0" rIns="0" bIns="0" rtlCol="0" anchor="ctr"/>
+          <a:lstStyle/>
+          <a:p>
+            <a:pPr indent="0" marL="0">
+              <a:buNone/>
+            </a:pPr>
+            <a:r>
+              <a:rPr lang="en-US" sz="1100" b="1" spc="100" kern="0" dirty="0">
+                <a:solidFill>
+                  <a:srgbClr val="55C8E8"/>
+                </a:solidFill>
+                <a:latin typeface="Calibri" pitchFamily="34" charset="0"/>
+                <a:ea typeface="Calibri" pitchFamily="34" charset="-122"/>
+                <a:cs typeface="Calibri" pitchFamily="34" charset="-120"/>
+              </a:rPr>
+              <a:t>FIX THESE SENTENCES</a:t>
+            </a:r>
+            <a:endParaRPr lang="en-US" sz="1100" dirty="0"/>
+          </a:p>
+        </p:txBody>
+      </p:sp>
+      <p:sp>
+        <p:nvSpPr>
+          <p:cNvPr id="5" name="Shape 3"/>
+          <p:cNvSpPr/>
+          <p:nvPr/>
+        </p:nvSpPr>
+        <p:spPr>
+          <a:xfrm>
+            <a:off x="365760" y="1024128"/>
+            <a:ext cx="8412480" cy="777240"/>
+          </a:xfrm>
+          <a:prstGeom prst="roundRect">
+            <a:avLst>
+              <a:gd name="adj" fmla="val 11765"/>
+            </a:avLst>
+          </a:prstGeom>
+          <a:solidFill>
+            <a:srgbClr val="FFFFFF"/>
+          </a:solidFill>
+          <a:ln w="19050">
+            <a:solidFill>
+              <a:srgbClr val="55C8E8"/>
+            </a:solidFill>
+            <a:prstDash val="solid"/>
+          </a:ln>
+          <a:effectLst>
+            <a:outerShdw sx="100000" sy="100000" kx="0" ky="0" algn="bl" rotWithShape="0" blurRad="101600" dist="38100" dir="2700000">
+              <a:srgbClr val="000000">
+                <a:alpha val="12000"/>
+              </a:srgbClr>
+            </a:outerShdw>
+          </a:effectLst>
+        </p:spPr>
+      </p:sp>
+      <p:sp>
+        <p:nvSpPr>
+          <p:cNvPr id="6" name="Text 4"/>
+          <p:cNvSpPr/>
+          <p:nvPr/>
+        </p:nvSpPr>
+        <p:spPr>
+          <a:xfrm>
+            <a:off x="594360" y="1152144"/>
+            <a:ext cx="7955280" cy="521208"/>
+          </a:xfrm>
+          <a:prstGeom prst="rect">
+            <a:avLst/>
+          </a:prstGeom>
+          <a:noFill/>
+          <a:ln/>
+        </p:spPr>
+        <p:txBody>
+          <a:bodyPr wrap="square" lIns="0" tIns="0" rIns="0" bIns="0" rtlCol="0" anchor="ctr"/>
+          <a:lstStyle/>
+          <a:p>
+            <a:pPr indent="0" marL="0">
+              <a:buNone/>
+            </a:pPr>
+            <a:r>
+              <a:rPr lang="en-US" sz="1700" dirty="0">
+                <a:solidFill>
+                  <a:srgbClr val="1E293B"/>
+                </a:solidFill>
+                <a:latin typeface="Calibri" pitchFamily="34" charset="0"/>
+                <a:ea typeface="Calibri" pitchFamily="34" charset="-122"/>
+                <a:cs typeface="Calibri" pitchFamily="34" charset="-120"/>
+              </a:rPr>
+              <a:t>“Good for you, Stanley,” she said. Then she turned angrily to the policemen.</a:t>
+            </a:r>
+            <a:endParaRPr lang="en-US" sz="1700" dirty="0"/>
+          </a:p>
+        </p:txBody>
+      </p:sp>
+      <p:sp>
+        <p:nvSpPr>
+          <p:cNvPr id="7" name="Shape 5"/>
+          <p:cNvSpPr/>
+          <p:nvPr/>
+        </p:nvSpPr>
+        <p:spPr>
+          <a:xfrm>
+            <a:off x="365760" y="1874520"/>
+            <a:ext cx="8412480" cy="777240"/>
+          </a:xfrm>
+          <a:prstGeom prst="roundRect">
+            <a:avLst>
+              <a:gd name="adj" fmla="val 11765"/>
+            </a:avLst>
+          </a:prstGeom>
+          <a:solidFill>
+            <a:srgbClr val="FFFFFF"/>
+          </a:solidFill>
+          <a:ln w="19050">
+            <a:solidFill>
+              <a:srgbClr val="55C8E8"/>
+            </a:solidFill>
+            <a:prstDash val="solid"/>
+          </a:ln>
+          <a:effectLst>
+            <a:outerShdw sx="100000" sy="100000" kx="0" ky="0" algn="bl" rotWithShape="0" blurRad="101600" dist="38100" dir="2700000">
+              <a:srgbClr val="000000">
+                <a:alpha val="12000"/>
+              </a:srgbClr>
+            </a:outerShdw>
+          </a:effectLst>
+        </p:spPr>
+      </p:sp>
+      <p:sp>
+        <p:nvSpPr>
+          <p:cNvPr id="8" name="Text 6"/>
+          <p:cNvSpPr/>
+          <p:nvPr/>
+        </p:nvSpPr>
+        <p:spPr>
+          <a:xfrm>
+            <a:off x="594360" y="2002536"/>
+            <a:ext cx="7955280" cy="521208"/>
+          </a:xfrm>
+          <a:prstGeom prst="rect">
+            <a:avLst/>
+          </a:prstGeom>
+          <a:noFill/>
+          <a:ln/>
+        </p:spPr>
+        <p:txBody>
+          <a:bodyPr wrap="square" lIns="0" tIns="0" rIns="0" bIns="0" rtlCol="0" anchor="ctr"/>
+          <a:lstStyle/>
+          <a:p>
+            <a:pPr indent="0" marL="0">
+              <a:buNone/>
+            </a:pPr>
+            <a:r>
+              <a:rPr lang="en-US" sz="1700" dirty="0">
+                <a:solidFill>
+                  <a:srgbClr val="1E293B"/>
+                </a:solidFill>
+                <a:latin typeface="Calibri" pitchFamily="34" charset="0"/>
+                <a:ea typeface="Calibri" pitchFamily="34" charset="-122"/>
+                <a:cs typeface="Calibri" pitchFamily="34" charset="-120"/>
+              </a:rPr>
+              <a:t>the chief of police called mr lambchop the next morning and thanked stanley for catching the thieves</a:t>
+            </a:r>
+            <a:endParaRPr lang="en-US" sz="1700" dirty="0"/>
+          </a:p>
+        </p:txBody>
+      </p:sp>
+      <p:sp>
+        <p:nvSpPr>
+          <p:cNvPr id="9" name="Text 7"/>
+          <p:cNvSpPr/>
+          <p:nvPr/>
+        </p:nvSpPr>
+        <p:spPr>
+          <a:xfrm>
+            <a:off x="365760" y="2788920"/>
+            <a:ext cx="8412480" cy="365760"/>
+          </a:xfrm>
+          <a:prstGeom prst="rect">
+            <a:avLst/>
+          </a:prstGeom>
+          <a:noFill/>
+          <a:ln/>
+        </p:spPr>
+        <p:txBody>
+          <a:bodyPr wrap="square" lIns="0" tIns="0" rIns="0" bIns="0" rtlCol="0" anchor="ctr"/>
+          <a:lstStyle/>
+          <a:p>
+            <a:pPr indent="0" marL="0">
+              <a:buNone/>
+            </a:pPr>
+            <a:r>
+              <a:rPr lang="en-US" sz="1600" b="1" dirty="0">
+                <a:solidFill>
+                  <a:srgbClr val="0E1C42"/>
+                </a:solidFill>
+                <a:latin typeface="Calibri" pitchFamily="34" charset="0"/>
+                <a:ea typeface="Calibri" pitchFamily="34" charset="-122"/>
+                <a:cs typeface="Calibri" pitchFamily="34" charset="-120"/>
+              </a:rPr>
+              <a:t>Rewrite both sentences correctly in your notebook.</a:t>
+            </a:r>
+            <a:endParaRPr lang="en-US" sz="1600" dirty="0"/>
+          </a:p>
+        </p:txBody>
+      </p:sp>
+    </p:spTree>
+  </p:cSld>
+  <p:clrMapOvr>
+    <a:masterClrMapping/>
+  </p:clrMapOvr>
+</p:sld>
+</file>
+
+<file path=ppt/slides/slide8.xml><?xml version="1.0" encoding="utf-8"?>
+<p:sld xmlns:a="http://schemas.openxmlformats.org/drawingml/2006/main" xmlns:r="http://schemas.openxmlformats.org/officeDocument/2006/relationships" xmlns:p="http://schemas.openxmlformats.org/presentationml/2006/main">
+  <p:cSld name="Slide 8">
+    <p:bg>
+      <p:bgPr>
+        <a:solidFill>
+          <a:srgbClr val="F8FAFC"/>
+        </a:solidFill>
+      </p:bgPr>
+    </p:bg>
+    <p:spTree>
+      <p:nvGrpSpPr>
+        <p:cNvPr id="1" name=""/>
+        <p:cNvGrpSpPr/>
+        <p:nvPr/>
+      </p:nvGrpSpPr>
+      <p:grpSpPr>
+        <a:xfrm>
+          <a:off x="0" y="0"/>
+          <a:ext cx="0" cy="0"/>
+          <a:chOff x="0" y="0"/>
+          <a:chExt cx="0" cy="0"/>
+        </a:xfrm>
+      </p:grpSpPr>
+      <p:sp>
+        <p:nvSpPr>
+          <p:cNvPr id="2" name="Shape 0"/>
+          <p:cNvSpPr/>
+          <p:nvPr/>
+        </p:nvSpPr>
+        <p:spPr>
+          <a:xfrm>
+            <a:off x="0" y="0"/>
+            <a:ext cx="9144000" cy="566928"/>
+          </a:xfrm>
+          <a:prstGeom prst="rect">
+            <a:avLst/>
+          </a:prstGeom>
+          <a:solidFill>
+            <a:srgbClr val="55C8E8"/>
+          </a:solidFill>
+          <a:ln/>
+        </p:spPr>
+      </p:sp>
+      <p:sp>
+        <p:nvSpPr>
+          <p:cNvPr id="3" name="Text 1"/>
+          <p:cNvSpPr/>
+          <p:nvPr/>
+        </p:nvSpPr>
+        <p:spPr>
+          <a:xfrm>
+            <a:off x="365760" y="54864"/>
+            <a:ext cx="8412480" cy="457200"/>
+          </a:xfrm>
+          <a:prstGeom prst="rect">
+            <a:avLst/>
+          </a:prstGeom>
+          <a:noFill/>
+          <a:ln/>
+        </p:spPr>
+        <p:txBody>
+          <a:bodyPr wrap="square" lIns="0" tIns="0" rIns="0" bIns="0" rtlCol="0" anchor="ctr"/>
+          <a:lstStyle/>
+          <a:p>
+            <a:pPr indent="0" marL="0">
+              <a:buNone/>
+            </a:pPr>
+            <a:r>
+              <a:rPr lang="en-US" sz="2200" b="1" dirty="0">
+                <a:solidFill>
+                  <a:srgbClr val="FFFFFF"/>
+                </a:solidFill>
+                <a:latin typeface="Calibri" pitchFamily="34" charset="0"/>
+                <a:ea typeface="Calibri" pitchFamily="34" charset="-122"/>
+                <a:cs typeface="Calibri" pitchFamily="34" charset="-120"/>
+              </a:rPr>
+              <a:t>✏️  Daily Oral Language</a:t>
+            </a:r>
+            <a:endParaRPr lang="en-US" sz="2200" dirty="0"/>
+          </a:p>
+        </p:txBody>
+      </p:sp>
+      <p:sp>
+        <p:nvSpPr>
+          <p:cNvPr id="4" name="Text 2"/>
+          <p:cNvSpPr/>
+          <p:nvPr/>
+        </p:nvSpPr>
+        <p:spPr>
+          <a:xfrm>
+            <a:off x="365760" y="749808"/>
+            <a:ext cx="8229600" cy="237744"/>
+          </a:xfrm>
+          <a:prstGeom prst="rect">
+            <a:avLst/>
+          </a:prstGeom>
+          <a:noFill/>
+          <a:ln/>
+        </p:spPr>
+        <p:txBody>
+          <a:bodyPr wrap="square" lIns="0" tIns="0" rIns="0" bIns="0" rtlCol="0" anchor="ctr"/>
+          <a:lstStyle/>
+          <a:p>
+            <a:pPr indent="0" marL="0">
+              <a:buNone/>
+            </a:pPr>
+            <a:r>
+              <a:rPr lang="en-US" sz="1100" b="1" spc="100" kern="0" dirty="0">
+                <a:solidFill>
+                  <a:srgbClr val="55C8E8"/>
+                </a:solidFill>
+                <a:latin typeface="Calibri" pitchFamily="34" charset="0"/>
+                <a:ea typeface="Calibri" pitchFamily="34" charset="-122"/>
+                <a:cs typeface="Calibri" pitchFamily="34" charset="-120"/>
+              </a:rPr>
+              <a:t>FIX THESE SENTENCES</a:t>
+            </a:r>
+            <a:endParaRPr lang="en-US" sz="1100" dirty="0"/>
+          </a:p>
+        </p:txBody>
+      </p:sp>
+      <p:sp>
+        <p:nvSpPr>
+          <p:cNvPr id="5" name="Shape 3"/>
+          <p:cNvSpPr/>
+          <p:nvPr/>
+        </p:nvSpPr>
+        <p:spPr>
+          <a:xfrm>
+            <a:off x="365760" y="1024128"/>
+            <a:ext cx="8412480" cy="777240"/>
+          </a:xfrm>
+          <a:prstGeom prst="roundRect">
+            <a:avLst>
+              <a:gd name="adj" fmla="val 11765"/>
+            </a:avLst>
+          </a:prstGeom>
+          <a:solidFill>
+            <a:srgbClr val="FFFFFF"/>
+          </a:solidFill>
+          <a:ln w="19050">
+            <a:solidFill>
+              <a:srgbClr val="55C8E8"/>
+            </a:solidFill>
+            <a:prstDash val="solid"/>
+          </a:ln>
+          <a:effectLst>
+            <a:outerShdw sx="100000" sy="100000" kx="0" ky="0" algn="bl" rotWithShape="0" blurRad="101600" dist="38100" dir="2700000">
+              <a:srgbClr val="000000">
+                <a:alpha val="12000"/>
+              </a:srgbClr>
+            </a:outerShdw>
+          </a:effectLst>
+        </p:spPr>
+      </p:sp>
+      <p:sp>
+        <p:nvSpPr>
+          <p:cNvPr id="6" name="Text 4"/>
+          <p:cNvSpPr/>
+          <p:nvPr/>
+        </p:nvSpPr>
+        <p:spPr>
+          <a:xfrm>
+            <a:off x="594360" y="1152144"/>
+            <a:ext cx="7955280" cy="521208"/>
+          </a:xfrm>
+          <a:prstGeom prst="rect">
+            <a:avLst/>
+          </a:prstGeom>
+          <a:noFill/>
+          <a:ln/>
+        </p:spPr>
+        <p:txBody>
+          <a:bodyPr wrap="square" lIns="0" tIns="0" rIns="0" bIns="0" rtlCol="0" anchor="ctr"/>
+          <a:lstStyle/>
+          <a:p>
+            <a:pPr indent="0" marL="0">
+              <a:buNone/>
+            </a:pPr>
+            <a:r>
+              <a:rPr lang="en-US" sz="1700" dirty="0">
+                <a:solidFill>
+                  <a:srgbClr val="1E293B"/>
+                </a:solidFill>
+                <a:latin typeface="Calibri" pitchFamily="34" charset="0"/>
+                <a:ea typeface="Calibri" pitchFamily="34" charset="-122"/>
+                <a:cs typeface="Calibri" pitchFamily="34" charset="-120"/>
+              </a:rPr>
+              <a:t>“Good for you, Stanley,” she said. Then she turned angrily to the policemen.</a:t>
+            </a:r>
+            <a:endParaRPr lang="en-US" sz="1700" dirty="0"/>
+          </a:p>
+        </p:txBody>
+      </p:sp>
+      <p:sp>
+        <p:nvSpPr>
+          <p:cNvPr id="7" name="Shape 5"/>
+          <p:cNvSpPr/>
+          <p:nvPr/>
+        </p:nvSpPr>
+        <p:spPr>
+          <a:xfrm>
+            <a:off x="365760" y="1874520"/>
+            <a:ext cx="8412480" cy="777240"/>
+          </a:xfrm>
+          <a:prstGeom prst="roundRect">
+            <a:avLst>
+              <a:gd name="adj" fmla="val 11765"/>
+            </a:avLst>
+          </a:prstGeom>
+          <a:solidFill>
+            <a:srgbClr val="FFFFFF"/>
+          </a:solidFill>
+          <a:ln w="19050">
+            <a:solidFill>
+              <a:srgbClr val="55C8E8"/>
+            </a:solidFill>
+            <a:prstDash val="solid"/>
+          </a:ln>
+          <a:effectLst>
+            <a:outerShdw sx="100000" sy="100000" kx="0" ky="0" algn="bl" rotWithShape="0" blurRad="101600" dist="38100" dir="2700000">
+              <a:srgbClr val="000000">
+                <a:alpha val="12000"/>
+              </a:srgbClr>
+            </a:outerShdw>
+          </a:effectLst>
+        </p:spPr>
+      </p:sp>
+      <p:sp>
+        <p:nvSpPr>
+          <p:cNvPr id="8" name="Text 6"/>
+          <p:cNvSpPr/>
+          <p:nvPr/>
+        </p:nvSpPr>
+        <p:spPr>
+          <a:xfrm>
+            <a:off x="594360" y="2002536"/>
+            <a:ext cx="7955280" cy="521208"/>
+          </a:xfrm>
+          <a:prstGeom prst="rect">
+            <a:avLst/>
+          </a:prstGeom>
+          <a:noFill/>
+          <a:ln/>
+        </p:spPr>
+        <p:txBody>
+          <a:bodyPr wrap="square" lIns="0" tIns="0" rIns="0" bIns="0" rtlCol="0" anchor="ctr"/>
+          <a:lstStyle/>
+          <a:p>
+            <a:pPr indent="0" marL="0">
+              <a:buNone/>
+            </a:pPr>
+            <a:r>
+              <a:rPr lang="en-US" sz="1700" dirty="0">
+                <a:solidFill>
+                  <a:srgbClr val="1E293B"/>
+                </a:solidFill>
+                <a:latin typeface="Calibri" pitchFamily="34" charset="0"/>
+                <a:ea typeface="Calibri" pitchFamily="34" charset="-122"/>
+                <a:cs typeface="Calibri" pitchFamily="34" charset="-120"/>
+              </a:rPr>
+              <a:t>the chief of police called mr lambchop the next morning and thanked stanley for catching the thieves</a:t>
+            </a:r>
+            <a:endParaRPr lang="en-US" sz="1700" dirty="0"/>
+          </a:p>
+        </p:txBody>
+      </p:sp>
+      <p:sp>
+        <p:nvSpPr>
+          <p:cNvPr id="9" name="Shape 7"/>
+          <p:cNvSpPr/>
+          <p:nvPr/>
+        </p:nvSpPr>
+        <p:spPr>
+          <a:xfrm>
+            <a:off x="365760" y="2743200"/>
+            <a:ext cx="8412480" cy="1417320"/>
+          </a:xfrm>
+          <a:prstGeom prst="roundRect">
+            <a:avLst>
+              <a:gd name="adj" fmla="val 6452"/>
+            </a:avLst>
+          </a:prstGeom>
+          <a:solidFill>
+            <a:srgbClr val="E8F8EF"/>
+          </a:solidFill>
+          <a:ln/>
+          <a:effectLst>
+            <a:outerShdw sx="100000" sy="100000" kx="0" ky="0" algn="bl" rotWithShape="0" blurRad="101600" dist="38100" dir="2700000">
+              <a:srgbClr val="000000">
+                <a:alpha val="12000"/>
+              </a:srgbClr>
+            </a:outerShdw>
+          </a:effectLst>
+        </p:spPr>
+      </p:sp>
+      <p:sp>
+        <p:nvSpPr>
+          <p:cNvPr id="10" name="Text 8"/>
+          <p:cNvSpPr/>
+          <p:nvPr/>
+        </p:nvSpPr>
+        <p:spPr>
+          <a:xfrm>
+            <a:off x="566928" y="2816352"/>
+            <a:ext cx="8229600" cy="237744"/>
+          </a:xfrm>
+          <a:prstGeom prst="rect">
+            <a:avLst/>
+          </a:prstGeom>
+          <a:noFill/>
+          <a:ln/>
+        </p:spPr>
+        <p:txBody>
+          <a:bodyPr wrap="square" lIns="0" tIns="0" rIns="0" bIns="0" rtlCol="0" anchor="ctr"/>
+          <a:lstStyle/>
+          <a:p>
+            <a:pPr indent="0" marL="0">
+              <a:buNone/>
+            </a:pPr>
+            <a:r>
+              <a:rPr lang="en-US" sz="1100" b="1" spc="100" kern="0" dirty="0">
+                <a:solidFill>
+                  <a:srgbClr val="34B76F"/>
+                </a:solidFill>
+                <a:latin typeface="Calibri" pitchFamily="34" charset="0"/>
+                <a:ea typeface="Calibri" pitchFamily="34" charset="-122"/>
+                <a:cs typeface="Calibri" pitchFamily="34" charset="-120"/>
+              </a:rPr>
+              <a:t>✅  CORRECTED</a:t>
+            </a:r>
+            <a:endParaRPr lang="en-US" sz="1100" dirty="0"/>
+          </a:p>
+        </p:txBody>
+      </p:sp>
+      <p:sp>
+        <p:nvSpPr>
+          <p:cNvPr id="11" name="Text 9"/>
+          <p:cNvSpPr/>
+          <p:nvPr/>
+        </p:nvSpPr>
+        <p:spPr>
+          <a:xfrm>
+            <a:off x="566928" y="3072384"/>
+            <a:ext cx="8010144" cy="685800"/>
+          </a:xfrm>
+          <a:prstGeom prst="rect">
+            <a:avLst/>
+          </a:prstGeom>
+          <a:noFill/>
+          <a:ln/>
+        </p:spPr>
+        <p:txBody>
+          <a:bodyPr wrap="square" lIns="0" tIns="0" rIns="0" bIns="0" rtlCol="0" anchor="ctr"/>
+          <a:lstStyle/>
+          <a:p>
+            <a:pPr indent="0" marL="0">
+              <a:buNone/>
+            </a:pPr>
+            <a:r>
+              <a:rPr lang="en-US" sz="1400" i="1" dirty="0">
+                <a:solidFill>
+                  <a:srgbClr val="1E293B"/>
+                </a:solidFill>
+                <a:latin typeface="Calibri" pitchFamily="34" charset="0"/>
+                <a:ea typeface="Calibri" pitchFamily="34" charset="-122"/>
+                <a:cs typeface="Calibri" pitchFamily="34" charset="-120"/>
+              </a:rPr>
+              <a:t>Corrected:</a:t>
+            </a:r>
+            <a:endParaRPr lang="en-US" sz="1400" dirty="0"/>
+          </a:p>
+          <a:p>
+            <a:pPr indent="0" marL="0">
+              <a:buNone/>
+            </a:pPr>
+            <a:endParaRPr lang="en-US" sz="1400" dirty="0"/>
+          </a:p>
+        </p:txBody>
+      </p:sp>
+      <p:sp>
+        <p:nvSpPr>
+          <p:cNvPr id="12" name="Text 10"/>
+          <p:cNvSpPr/>
+          <p:nvPr/>
+        </p:nvSpPr>
+        <p:spPr>
+          <a:xfrm>
+            <a:off x="566928" y="3767328"/>
+            <a:ext cx="8010144" cy="320040"/>
+          </a:xfrm>
+          <a:prstGeom prst="rect">
+            <a:avLst/>
+          </a:prstGeom>
+          <a:noFill/>
+          <a:ln/>
+        </p:spPr>
+        <p:txBody>
+          <a:bodyPr wrap="square" lIns="0" tIns="0" rIns="0" bIns="0" rtlCol="0" anchor="ctr"/>
+          <a:lstStyle/>
+          <a:p>
+            <a:pPr indent="0" marL="0">
+              <a:buNone/>
+            </a:pPr>
+            <a:r>
+              <a:rPr lang="en-US" sz="1200" dirty="0">
+                <a:solidFill>
+                  <a:srgbClr val="64748B"/>
+                </a:solidFill>
+                <a:latin typeface="Calibri" pitchFamily="34" charset="0"/>
+                <a:ea typeface="Calibri" pitchFamily="34" charset="-122"/>
+                <a:cs typeface="Calibri" pitchFamily="34" charset="-120"/>
+              </a:rPr>
+              <a:t>The Chief of Police called Mr. Lambchop the next morning and thanked Stanley for catching the thieves .</a:t>
+            </a:r>
+            <a:endParaRPr lang="en-US" sz="1200" dirty="0"/>
+          </a:p>
+        </p:txBody>
+      </p:sp>
+    </p:spTree>
+  </p:cSld>
+  <p:clrMapOvr>
+    <a:masterClrMapping/>
+  </p:clrMapOvr>
+</p:sld>
+</file>
+
+<file path=ppt/slides/slide9.xml><?xml version="1.0" encoding="utf-8"?>
+<p:sld xmlns:a="http://schemas.openxmlformats.org/drawingml/2006/main" xmlns:r="http://schemas.openxmlformats.org/officeDocument/2006/relationships" xmlns:p="http://schemas.openxmlformats.org/presentationml/2006/main">
+  <p:cSld name="Slide 9">
     <p:bg>
       <p:bgPr>
         <a:solidFill>
@@ -6165,91 +7340,122 @@
       </p:grpSpPr>
       <p:sp>
         <p:nvSpPr>
-          <p:cNvPr id="2" name="Text 0"/>
-          <p:cNvSpPr/>
-          <p:nvPr/>
-        </p:nvSpPr>
-        <p:spPr>
-          <a:xfrm>
-            <a:off x="365760" y="164592"/>
-            <a:ext cx="8412480" cy="566928"/>
-          </a:xfrm>
-          <a:prstGeom prst="rect">
-            <a:avLst/>
-          </a:prstGeom>
-          <a:noFill/>
-          <a:ln/>
-        </p:spPr>
-        <p:txBody>
-          <a:bodyPr wrap="square" lIns="0" tIns="0" rIns="0" bIns="0" rtlCol="0" anchor="ctr"/>
-          <a:lstStyle/>
-          <a:p>
-            <a:pPr algn="l" indent="0" marL="0">
-              <a:buNone/>
-            </a:pPr>
-            <a:r>
-              <a:rPr lang="en-US" sz="2800" b="1" dirty="0">
-                <a:solidFill>
-                  <a:srgbClr val="0E1C42"/>
-                </a:solidFill>
-                <a:latin typeface="Calibri" pitchFamily="34" charset="0"/>
-                <a:ea typeface="Calibri" pitchFamily="34" charset="-122"/>
-                <a:cs typeface="Calibri" pitchFamily="34" charset="-120"/>
-              </a:rPr>
-              <a:t>✅ Model Sentence — Study What's Right</a:t>
-            </a:r>
-            <a:endParaRPr lang="en-US" sz="2800" dirty="0"/>
-          </a:p>
-        </p:txBody>
-      </p:sp>
-      <p:sp>
-        <p:nvSpPr>
-          <p:cNvPr id="3" name="Shape 1"/>
-          <p:cNvSpPr/>
-          <p:nvPr/>
-        </p:nvSpPr>
-        <p:spPr>
-          <a:xfrm>
-            <a:off x="365760" y="749808"/>
-            <a:ext cx="8412480" cy="0"/>
-          </a:xfrm>
-          <a:prstGeom prst="line">
-            <a:avLst/>
-          </a:prstGeom>
-          <a:noFill/>
-          <a:ln w="19050">
-            <a:solidFill>
-              <a:srgbClr val="34B76F"/>
-            </a:solidFill>
-            <a:prstDash val="solid"/>
-          </a:ln>
-        </p:spPr>
-      </p:sp>
-      <p:sp>
-        <p:nvSpPr>
-          <p:cNvPr id="4" name="Shape 2"/>
-          <p:cNvSpPr/>
-          <p:nvPr/>
-        </p:nvSpPr>
-        <p:spPr>
-          <a:xfrm>
-            <a:off x="457200" y="1097280"/>
-            <a:ext cx="8229600" cy="914400"/>
+          <p:cNvPr id="2" name="Shape 0"/>
+          <p:cNvSpPr/>
+          <p:nvPr/>
+        </p:nvSpPr>
+        <p:spPr>
+          <a:xfrm>
+            <a:off x="0" y="0"/>
+            <a:ext cx="9144000" cy="566928"/>
+          </a:xfrm>
+          <a:prstGeom prst="rect">
+            <a:avLst/>
+          </a:prstGeom>
+          <a:solidFill>
+            <a:srgbClr val="55C8E8"/>
+          </a:solidFill>
+          <a:ln/>
+        </p:spPr>
+      </p:sp>
+      <p:sp>
+        <p:nvSpPr>
+          <p:cNvPr id="3" name="Text 1"/>
+          <p:cNvSpPr/>
+          <p:nvPr/>
+        </p:nvSpPr>
+        <p:spPr>
+          <a:xfrm>
+            <a:off x="365760" y="54864"/>
+            <a:ext cx="8412480" cy="457200"/>
+          </a:xfrm>
+          <a:prstGeom prst="rect">
+            <a:avLst/>
+          </a:prstGeom>
+          <a:noFill/>
+          <a:ln/>
+        </p:spPr>
+        <p:txBody>
+          <a:bodyPr wrap="square" lIns="0" tIns="0" rIns="0" bIns="0" rtlCol="0" anchor="ctr"/>
+          <a:lstStyle/>
+          <a:p>
+            <a:pPr indent="0" marL="0">
+              <a:buNone/>
+            </a:pPr>
+            <a:r>
+              <a:rPr lang="en-US" sz="2200" b="1" dirty="0">
+                <a:solidFill>
+                  <a:srgbClr val="FFFFFF"/>
+                </a:solidFill>
+                <a:latin typeface="Calibri" pitchFamily="34" charset="0"/>
+                <a:ea typeface="Calibri" pitchFamily="34" charset="-122"/>
+                <a:cs typeface="Calibri" pitchFamily="34" charset="-120"/>
+              </a:rPr>
+              <a:t>🌱  Morphology</a:t>
+            </a:r>
+            <a:endParaRPr lang="en-US" sz="2200" dirty="0"/>
+          </a:p>
+        </p:txBody>
+      </p:sp>
+      <p:sp>
+        <p:nvSpPr>
+          <p:cNvPr id="4" name="Text 2"/>
+          <p:cNvSpPr/>
+          <p:nvPr/>
+        </p:nvSpPr>
+        <p:spPr>
+          <a:xfrm>
+            <a:off x="365760" y="804672"/>
+            <a:ext cx="8229600" cy="237744"/>
+          </a:xfrm>
+          <a:prstGeom prst="rect">
+            <a:avLst/>
+          </a:prstGeom>
+          <a:noFill/>
+          <a:ln/>
+        </p:spPr>
+        <p:txBody>
+          <a:bodyPr wrap="square" lIns="0" tIns="0" rIns="0" bIns="0" rtlCol="0" anchor="ctr"/>
+          <a:lstStyle/>
+          <a:p>
+            <a:pPr indent="0" marL="0">
+              <a:buNone/>
+            </a:pPr>
+            <a:r>
+              <a:rPr lang="en-US" sz="1100" b="1" spc="100" kern="0" dirty="0">
+                <a:solidFill>
+                  <a:srgbClr val="8B6FC0"/>
+                </a:solidFill>
+                <a:latin typeface="Calibri" pitchFamily="34" charset="0"/>
+                <a:ea typeface="Calibri" pitchFamily="34" charset="-122"/>
+                <a:cs typeface="Calibri" pitchFamily="34" charset="-120"/>
+              </a:rPr>
+              <a:t>SUFFIX -ED SHOWS PAST ACTION</a:t>
+            </a:r>
+            <a:endParaRPr lang="en-US" sz="1100" dirty="0"/>
+          </a:p>
+        </p:txBody>
+      </p:sp>
+      <p:sp>
+        <p:nvSpPr>
+          <p:cNvPr id="5" name="Shape 3"/>
+          <p:cNvSpPr/>
+          <p:nvPr/>
+        </p:nvSpPr>
+        <p:spPr>
+          <a:xfrm>
+            <a:off x="365760" y="1097280"/>
+            <a:ext cx="8412480" cy="621792"/>
           </a:xfrm>
           <a:prstGeom prst="roundRect">
             <a:avLst>
-              <a:gd name="adj" fmla="val 10000"/>
+              <a:gd name="adj" fmla="val 14706"/>
             </a:avLst>
           </a:prstGeom>
           <a:solidFill>
-            <a:srgbClr val="E8F8EF"/>
+            <a:srgbClr val="F0E8FF"/>
           </a:solidFill>
-          <a:ln w="12700">
-            <a:solidFill>
-              <a:srgbClr val="34B76F"/>
-            </a:solidFill>
-            <a:prstDash val="solid"/>
-          </a:ln>
+          <a:ln/>
           <a:effectLst>
             <a:outerShdw sx="100000" sy="100000" kx="0" ky="0" algn="bl" rotWithShape="0" blurRad="101600" dist="38100" dir="2700000">
               <a:srgbClr val="000000">
@@ -6261,30 +7467,30 @@
       </p:sp>
       <p:sp>
         <p:nvSpPr>
-          <p:cNvPr id="5" name="Text 3"/>
-          <p:cNvSpPr/>
-          <p:nvPr/>
-        </p:nvSpPr>
-        <p:spPr>
-          <a:xfrm>
-            <a:off x="640080" y="1207008"/>
-            <a:ext cx="7863840" cy="685800"/>
-          </a:xfrm>
-          <a:prstGeom prst="rect">
-            <a:avLst/>
-          </a:prstGeom>
-          <a:noFill/>
-          <a:ln/>
-        </p:spPr>
-        <p:txBody>
-          <a:bodyPr wrap="square" lIns="0" tIns="0" rIns="0" bIns="0" rtlCol="0" anchor="ctr"/>
-          <a:lstStyle/>
-          <a:p>
-            <a:pPr indent="0" marL="0">
-              <a:buNone/>
-            </a:pPr>
-            <a:r>
-              <a:rPr lang="en-US" sz="1800" i="1" dirty="0">
+          <p:cNvPr id="6" name="Text 4"/>
+          <p:cNvSpPr/>
+          <p:nvPr/>
+        </p:nvSpPr>
+        <p:spPr>
+          <a:xfrm>
+            <a:off x="594360" y="1216152"/>
+            <a:ext cx="7863840" cy="384048"/>
+          </a:xfrm>
+          <a:prstGeom prst="rect">
+            <a:avLst/>
+          </a:prstGeom>
+          <a:noFill/>
+          <a:ln/>
+        </p:spPr>
+        <p:txBody>
+          <a:bodyPr wrap="square" lIns="0" tIns="0" rIns="0" bIns="0" rtlCol="0" anchor="ctr"/>
+          <a:lstStyle/>
+          <a:p>
+            <a:pPr indent="0" marL="0">
+              <a:buNone/>
+            </a:pPr>
+            <a:r>
+              <a:rPr lang="en-US" sz="1500" dirty="0">
                 <a:solidFill>
                   <a:srgbClr val="1E293B"/>
                 </a:solidFill>
@@ -6292,192 +7498,32 @@
                 <a:ea typeface="Calibri" pitchFamily="34" charset="-122"/>
                 <a:cs typeface="Calibri" pitchFamily="34" charset="-120"/>
               </a:rPr>
-              <a:t>“Good for you, Stanley,” she said. Then she turned angrily to the policemen.</a:t>
-            </a:r>
-            <a:endParaRPr lang="en-US" sz="1800" dirty="0"/>
-          </a:p>
-        </p:txBody>
-      </p:sp>
-    </p:spTree>
-  </p:cSld>
-  <p:clrMapOvr>
-    <a:masterClrMapping/>
-  </p:clrMapOvr>
-</p:sld>
-</file>
-
-<file path=ppt/slides/slide8.xml><?xml version="1.0" encoding="utf-8"?>
-<p:sld xmlns:a="http://schemas.openxmlformats.org/drawingml/2006/main" xmlns:r="http://schemas.openxmlformats.org/officeDocument/2006/relationships" xmlns:p="http://schemas.openxmlformats.org/presentationml/2006/main">
-  <p:cSld name="Slide 8">
-    <p:bg>
-      <p:bgPr>
-        <a:solidFill>
-          <a:srgbClr val="E5F7FC"/>
-        </a:solidFill>
-      </p:bgPr>
-    </p:bg>
-    <p:spTree>
-      <p:nvGrpSpPr>
-        <p:cNvPr id="1" name=""/>
-        <p:cNvGrpSpPr/>
-        <p:nvPr/>
-      </p:nvGrpSpPr>
-      <p:grpSpPr>
-        <a:xfrm>
-          <a:off x="0" y="0"/>
-          <a:ext cx="0" cy="0"/>
-          <a:chOff x="0" y="0"/>
-          <a:chExt cx="0" cy="0"/>
-        </a:xfrm>
-      </p:grpSpPr>
-      <p:sp>
-        <p:nvSpPr>
-          <p:cNvPr id="2" name="Text 0"/>
-          <p:cNvSpPr/>
-          <p:nvPr/>
-        </p:nvSpPr>
-        <p:spPr>
-          <a:xfrm>
-            <a:off x="365760" y="164592"/>
-            <a:ext cx="5943600" cy="566928"/>
-          </a:xfrm>
-          <a:prstGeom prst="rect">
-            <a:avLst/>
-          </a:prstGeom>
-          <a:noFill/>
-          <a:ln/>
-        </p:spPr>
-        <p:txBody>
-          <a:bodyPr wrap="square" lIns="0" tIns="0" rIns="0" bIns="0" rtlCol="0" anchor="ctr"/>
-          <a:lstStyle/>
-          <a:p>
-            <a:pPr algn="l" indent="0" marL="0">
-              <a:buNone/>
-            </a:pPr>
-            <a:r>
-              <a:rPr lang="en-US" sz="2800" b="1" dirty="0">
-                <a:solidFill>
-                  <a:srgbClr val="0E1C42"/>
-                </a:solidFill>
-                <a:latin typeface="Calibri" pitchFamily="34" charset="0"/>
-                <a:ea typeface="Calibri" pitchFamily="34" charset="-122"/>
-                <a:cs typeface="Calibri" pitchFamily="34" charset="-120"/>
-              </a:rPr>
-              <a:t>🔧 Fix-It Sentence — Now You Try</a:t>
-            </a:r>
-            <a:endParaRPr lang="en-US" sz="2800" dirty="0"/>
-          </a:p>
-        </p:txBody>
-      </p:sp>
-      <p:sp>
-        <p:nvSpPr>
-          <p:cNvPr id="3" name="Shape 1"/>
-          <p:cNvSpPr/>
-          <p:nvPr/>
-        </p:nvSpPr>
-        <p:spPr>
-          <a:xfrm>
-            <a:off x="365760" y="749808"/>
-            <a:ext cx="8412480" cy="0"/>
-          </a:xfrm>
-          <a:prstGeom prst="line">
-            <a:avLst/>
-          </a:prstGeom>
-          <a:noFill/>
-          <a:ln w="19050">
-            <a:solidFill>
-              <a:srgbClr val="8B8BB5"/>
-            </a:solidFill>
-            <a:prstDash val="solid"/>
-          </a:ln>
-        </p:spPr>
-      </p:sp>
-      <p:sp>
-        <p:nvSpPr>
-          <p:cNvPr id="4" name="Shape 2"/>
-          <p:cNvSpPr/>
-          <p:nvPr/>
-        </p:nvSpPr>
-        <p:spPr>
-          <a:xfrm>
-            <a:off x="6492240" y="173736"/>
-            <a:ext cx="2286000" cy="502920"/>
+              <a:t>🌱  walk + -ed =walked</a:t>
+            </a:r>
+            <a:endParaRPr lang="en-US" sz="1500" dirty="0"/>
+          </a:p>
+        </p:txBody>
+      </p:sp>
+      <p:sp>
+        <p:nvSpPr>
+          <p:cNvPr id="7" name="Shape 5"/>
+          <p:cNvSpPr/>
+          <p:nvPr/>
+        </p:nvSpPr>
+        <p:spPr>
+          <a:xfrm>
+            <a:off x="365760" y="1792224"/>
+            <a:ext cx="8412480" cy="621792"/>
           </a:xfrm>
           <a:prstGeom prst="roundRect">
             <a:avLst>
-              <a:gd name="adj" fmla="val 21818"/>
+              <a:gd name="adj" fmla="val 14706"/>
             </a:avLst>
           </a:prstGeom>
           <a:solidFill>
-            <a:srgbClr val="8B8BB5"/>
+            <a:srgbClr val="F8F4FF"/>
           </a:solidFill>
           <a:ln/>
-        </p:spPr>
-      </p:sp>
-      <p:sp>
-        <p:nvSpPr>
-          <p:cNvPr id="5" name="Text 3"/>
-          <p:cNvSpPr/>
-          <p:nvPr/>
-        </p:nvSpPr>
-        <p:spPr>
-          <a:xfrm>
-            <a:off x="6492240" y="173736"/>
-            <a:ext cx="2286000" cy="502920"/>
-          </a:xfrm>
-          <a:prstGeom prst="rect">
-            <a:avLst/>
-          </a:prstGeom>
-          <a:noFill/>
-          <a:ln/>
-        </p:spPr>
-        <p:txBody>
-          <a:bodyPr wrap="square" lIns="0" tIns="0" rIns="0" bIns="0" rtlCol="0" anchor="ctr"/>
-          <a:lstStyle/>
-          <a:p>
-            <a:pPr algn="ctr" indent="0" marL="0">
-              <a:buNone/>
-            </a:pPr>
-            <a:r>
-              <a:rPr lang="en-US" sz="1100" b="1" dirty="0">
-                <a:solidFill>
-                  <a:srgbClr val="0E1C42"/>
-                </a:solidFill>
-                <a:latin typeface="Calibri" pitchFamily="34" charset="0"/>
-                <a:ea typeface="Calibri" pitchFamily="34" charset="-122"/>
-                <a:cs typeface="Calibri" pitchFamily="34" charset="-120"/>
-              </a:rPr>
-              <a:t>CHAT PROMPT</a:t>
-            </a:r>
-            <a:endParaRPr lang="en-US" sz="1100" dirty="0"/>
-          </a:p>
-        </p:txBody>
-      </p:sp>
-      <p:sp>
-        <p:nvSpPr>
-          <p:cNvPr id="6" name="Shape 4"/>
-          <p:cNvSpPr/>
-          <p:nvPr/>
-        </p:nvSpPr>
-        <p:spPr>
-          <a:xfrm>
-            <a:off x="457200" y="1005840"/>
-            <a:ext cx="8229600" cy="640080"/>
-          </a:xfrm>
-          <a:prstGeom prst="roundRect">
-            <a:avLst>
-              <a:gd name="adj" fmla="val 14286"/>
-            </a:avLst>
-          </a:prstGeom>
-          <a:solidFill>
-            <a:srgbClr val="F8FAFC"/>
-          </a:solidFill>
-          <a:ln w="12700">
-            <a:solidFill>
-              <a:srgbClr val="C7922C"/>
-            </a:solidFill>
-            <a:prstDash val="solid"/>
-          </a:ln>
           <a:effectLst>
             <a:outerShdw sx="100000" sy="100000" kx="0" ky="0" algn="bl" rotWithShape="0" blurRad="101600" dist="38100" dir="2700000">
               <a:srgbClr val="000000">
@@ -6489,30 +7535,30 @@
       </p:sp>
       <p:sp>
         <p:nvSpPr>
-          <p:cNvPr id="7" name="Text 5"/>
-          <p:cNvSpPr/>
-          <p:nvPr/>
-        </p:nvSpPr>
-        <p:spPr>
-          <a:xfrm>
-            <a:off x="640080" y="1115568"/>
-            <a:ext cx="7863840" cy="411480"/>
-          </a:xfrm>
-          <a:prstGeom prst="rect">
-            <a:avLst/>
-          </a:prstGeom>
-          <a:noFill/>
-          <a:ln/>
-        </p:spPr>
-        <p:txBody>
-          <a:bodyPr wrap="square" lIns="0" tIns="0" rIns="0" bIns="0" rtlCol="0" anchor="ctr"/>
-          <a:lstStyle/>
-          <a:p>
-            <a:pPr indent="0" marL="0">
-              <a:buNone/>
-            </a:pPr>
-            <a:r>
-              <a:rPr lang="en-US" sz="1800" i="1" dirty="0">
+          <p:cNvPr id="8" name="Text 6"/>
+          <p:cNvSpPr/>
+          <p:nvPr/>
+        </p:nvSpPr>
+        <p:spPr>
+          <a:xfrm>
+            <a:off x="594360" y="1911096"/>
+            <a:ext cx="7863840" cy="384048"/>
+          </a:xfrm>
+          <a:prstGeom prst="rect">
+            <a:avLst/>
+          </a:prstGeom>
+          <a:noFill/>
+          <a:ln/>
+        </p:spPr>
+        <p:txBody>
+          <a:bodyPr wrap="square" lIns="0" tIns="0" rIns="0" bIns="0" rtlCol="0" anchor="ctr"/>
+          <a:lstStyle/>
+          <a:p>
+            <a:pPr indent="0" marL="0">
+              <a:buNone/>
+            </a:pPr>
+            <a:r>
+              <a:rPr lang="en-US" sz="1500" dirty="0">
                 <a:solidFill>
                   <a:srgbClr val="1E293B"/>
                 </a:solidFill>
@@ -6520,192 +7566,32 @@
                 <a:ea typeface="Calibri" pitchFamily="34" charset="-122"/>
                 <a:cs typeface="Calibri" pitchFamily="34" charset="-120"/>
               </a:rPr>
-              <a:t>the chief of police called mr lambchop the next morning and thanked stanley for catching the thieves</a:t>
-            </a:r>
-            <a:endParaRPr lang="en-US" sz="1800" dirty="0"/>
-          </a:p>
-        </p:txBody>
-      </p:sp>
-    </p:spTree>
-  </p:cSld>
-  <p:clrMapOvr>
-    <a:masterClrMapping/>
-  </p:clrMapOvr>
-</p:sld>
-</file>
-
-<file path=ppt/slides/slide9.xml><?xml version="1.0" encoding="utf-8"?>
-<p:sld xmlns:a="http://schemas.openxmlformats.org/drawingml/2006/main" xmlns:r="http://schemas.openxmlformats.org/officeDocument/2006/relationships" xmlns:p="http://schemas.openxmlformats.org/presentationml/2006/main">
-  <p:cSld name="Slide 9">
-    <p:bg>
-      <p:bgPr>
-        <a:solidFill>
-          <a:srgbClr val="E5F7FC"/>
-        </a:solidFill>
-      </p:bgPr>
-    </p:bg>
-    <p:spTree>
-      <p:nvGrpSpPr>
-        <p:cNvPr id="1" name=""/>
-        <p:cNvGrpSpPr/>
-        <p:nvPr/>
-      </p:nvGrpSpPr>
-      <p:grpSpPr>
-        <a:xfrm>
-          <a:off x="0" y="0"/>
-          <a:ext cx="0" cy="0"/>
-          <a:chOff x="0" y="0"/>
-          <a:chExt cx="0" cy="0"/>
-        </a:xfrm>
-      </p:grpSpPr>
-      <p:sp>
-        <p:nvSpPr>
-          <p:cNvPr id="2" name="Text 0"/>
-          <p:cNvSpPr/>
-          <p:nvPr/>
-        </p:nvSpPr>
-        <p:spPr>
-          <a:xfrm>
-            <a:off x="365760" y="164592"/>
-            <a:ext cx="5943600" cy="566928"/>
-          </a:xfrm>
-          <a:prstGeom prst="rect">
-            <a:avLst/>
-          </a:prstGeom>
-          <a:noFill/>
-          <a:ln/>
-        </p:spPr>
-        <p:txBody>
-          <a:bodyPr wrap="square" lIns="0" tIns="0" rIns="0" bIns="0" rtlCol="0" anchor="ctr"/>
-          <a:lstStyle/>
-          <a:p>
-            <a:pPr algn="l" indent="0" marL="0">
-              <a:buNone/>
-            </a:pPr>
-            <a:r>
-              <a:rPr lang="en-US" sz="2800" b="1" dirty="0">
-                <a:solidFill>
-                  <a:srgbClr val="0E1C42"/>
-                </a:solidFill>
-                <a:latin typeface="Calibri" pitchFamily="34" charset="0"/>
-                <a:ea typeface="Calibri" pitchFamily="34" charset="-122"/>
-                <a:cs typeface="Calibri" pitchFamily="34" charset="-120"/>
-              </a:rPr>
-              <a:t>🔧 Fix-It Sentence — Answer Revealed</a:t>
-            </a:r>
-            <a:endParaRPr lang="en-US" sz="2800" dirty="0"/>
-          </a:p>
-        </p:txBody>
-      </p:sp>
-      <p:sp>
-        <p:nvSpPr>
-          <p:cNvPr id="3" name="Shape 1"/>
-          <p:cNvSpPr/>
-          <p:nvPr/>
-        </p:nvSpPr>
-        <p:spPr>
-          <a:xfrm>
-            <a:off x="365760" y="749808"/>
-            <a:ext cx="8412480" cy="0"/>
-          </a:xfrm>
-          <a:prstGeom prst="line">
-            <a:avLst/>
-          </a:prstGeom>
-          <a:noFill/>
-          <a:ln w="19050">
-            <a:solidFill>
-              <a:srgbClr val="8B8BB5"/>
-            </a:solidFill>
-            <a:prstDash val="solid"/>
-          </a:ln>
-        </p:spPr>
-      </p:sp>
-      <p:sp>
-        <p:nvSpPr>
-          <p:cNvPr id="4" name="Shape 2"/>
-          <p:cNvSpPr/>
-          <p:nvPr/>
-        </p:nvSpPr>
-        <p:spPr>
-          <a:xfrm>
-            <a:off x="6492240" y="173736"/>
-            <a:ext cx="2286000" cy="502920"/>
+              <a:t>🌱  call + -ed =called</a:t>
+            </a:r>
+            <a:endParaRPr lang="en-US" sz="1500" dirty="0"/>
+          </a:p>
+        </p:txBody>
+      </p:sp>
+      <p:sp>
+        <p:nvSpPr>
+          <p:cNvPr id="9" name="Shape 7"/>
+          <p:cNvSpPr/>
+          <p:nvPr/>
+        </p:nvSpPr>
+        <p:spPr>
+          <a:xfrm>
+            <a:off x="365760" y="2487168"/>
+            <a:ext cx="8412480" cy="621792"/>
           </a:xfrm>
           <a:prstGeom prst="roundRect">
             <a:avLst>
-              <a:gd name="adj" fmla="val 21818"/>
+              <a:gd name="adj" fmla="val 14706"/>
             </a:avLst>
           </a:prstGeom>
           <a:solidFill>
-            <a:srgbClr val="8B8BB5"/>
+            <a:srgbClr val="F0E8FF"/>
           </a:solidFill>
           <a:ln/>
-        </p:spPr>
-      </p:sp>
-      <p:sp>
-        <p:nvSpPr>
-          <p:cNvPr id="5" name="Text 3"/>
-          <p:cNvSpPr/>
-          <p:nvPr/>
-        </p:nvSpPr>
-        <p:spPr>
-          <a:xfrm>
-            <a:off x="6492240" y="173736"/>
-            <a:ext cx="2286000" cy="502920"/>
-          </a:xfrm>
-          <a:prstGeom prst="rect">
-            <a:avLst/>
-          </a:prstGeom>
-          <a:noFill/>
-          <a:ln/>
-        </p:spPr>
-        <p:txBody>
-          <a:bodyPr wrap="square" lIns="0" tIns="0" rIns="0" bIns="0" rtlCol="0" anchor="ctr"/>
-          <a:lstStyle/>
-          <a:p>
-            <a:pPr algn="ctr" indent="0" marL="0">
-              <a:buNone/>
-            </a:pPr>
-            <a:r>
-              <a:rPr lang="en-US" sz="1100" b="1" dirty="0">
-                <a:solidFill>
-                  <a:srgbClr val="0E1C42"/>
-                </a:solidFill>
-                <a:latin typeface="Calibri" pitchFamily="34" charset="0"/>
-                <a:ea typeface="Calibri" pitchFamily="34" charset="-122"/>
-                <a:cs typeface="Calibri" pitchFamily="34" charset="-120"/>
-              </a:rPr>
-              <a:t>CHAT PROMPT</a:t>
-            </a:r>
-            <a:endParaRPr lang="en-US" sz="1100" dirty="0"/>
-          </a:p>
-        </p:txBody>
-      </p:sp>
-      <p:sp>
-        <p:nvSpPr>
-          <p:cNvPr id="6" name="Shape 4"/>
-          <p:cNvSpPr/>
-          <p:nvPr/>
-        </p:nvSpPr>
-        <p:spPr>
-          <a:xfrm>
-            <a:off x="457200" y="1005840"/>
-            <a:ext cx="8229600" cy="640080"/>
-          </a:xfrm>
-          <a:prstGeom prst="roundRect">
-            <a:avLst>
-              <a:gd name="adj" fmla="val 14286"/>
-            </a:avLst>
-          </a:prstGeom>
-          <a:solidFill>
-            <a:srgbClr val="F8FAFC"/>
-          </a:solidFill>
-          <a:ln w="12700">
-            <a:solidFill>
-              <a:srgbClr val="C7922C"/>
-            </a:solidFill>
-            <a:prstDash val="solid"/>
-          </a:ln>
           <a:effectLst>
             <a:outerShdw sx="100000" sy="100000" kx="0" ky="0" algn="bl" rotWithShape="0" blurRad="101600" dist="38100" dir="2700000">
               <a:srgbClr val="000000">
@@ -6717,30 +7603,30 @@
       </p:sp>
       <p:sp>
         <p:nvSpPr>
-          <p:cNvPr id="7" name="Text 5"/>
-          <p:cNvSpPr/>
-          <p:nvPr/>
-        </p:nvSpPr>
-        <p:spPr>
-          <a:xfrm>
-            <a:off x="640080" y="1115568"/>
-            <a:ext cx="7863840" cy="411480"/>
-          </a:xfrm>
-          <a:prstGeom prst="rect">
-            <a:avLst/>
-          </a:prstGeom>
-          <a:noFill/>
-          <a:ln/>
-        </p:spPr>
-        <p:txBody>
-          <a:bodyPr wrap="square" lIns="0" tIns="0" rIns="0" bIns="0" rtlCol="0" anchor="ctr"/>
-          <a:lstStyle/>
-          <a:p>
-            <a:pPr indent="0" marL="0">
-              <a:buNone/>
-            </a:pPr>
-            <a:r>
-              <a:rPr lang="en-US" sz="1800" i="1" dirty="0">
+          <p:cNvPr id="10" name="Text 8"/>
+          <p:cNvSpPr/>
+          <p:nvPr/>
+        </p:nvSpPr>
+        <p:spPr>
+          <a:xfrm>
+            <a:off x="594360" y="2606040"/>
+            <a:ext cx="7863840" cy="384048"/>
+          </a:xfrm>
+          <a:prstGeom prst="rect">
+            <a:avLst/>
+          </a:prstGeom>
+          <a:noFill/>
+          <a:ln/>
+        </p:spPr>
+        <p:txBody>
+          <a:bodyPr wrap="square" lIns="0" tIns="0" rIns="0" bIns="0" rtlCol="0" anchor="ctr"/>
+          <a:lstStyle/>
+          <a:p>
+            <a:pPr indent="0" marL="0">
+              <a:buNone/>
+            </a:pPr>
+            <a:r>
+              <a:rPr lang="en-US" sz="1500" dirty="0">
                 <a:solidFill>
                   <a:srgbClr val="1E293B"/>
                 </a:solidFill>
@@ -6748,87 +7634,77 @@
                 <a:ea typeface="Calibri" pitchFamily="34" charset="-122"/>
                 <a:cs typeface="Calibri" pitchFamily="34" charset="-120"/>
               </a:rPr>
-              <a:t>the chief of police called mr lambchop the next morning and thanked stanley for catching the thieves</a:t>
-            </a:r>
-            <a:endParaRPr lang="en-US" sz="1800" dirty="0"/>
-          </a:p>
-        </p:txBody>
-      </p:sp>
-      <p:sp>
-        <p:nvSpPr>
-          <p:cNvPr id="8" name="Text 6"/>
-          <p:cNvSpPr/>
-          <p:nvPr/>
-        </p:nvSpPr>
-        <p:spPr>
-          <a:xfrm>
-            <a:off x="457200" y="1737360"/>
-            <a:ext cx="8046720" cy="292608"/>
-          </a:xfrm>
-          <a:prstGeom prst="rect">
-            <a:avLst/>
-          </a:prstGeom>
-          <a:noFill/>
-          <a:ln/>
-        </p:spPr>
-        <p:txBody>
-          <a:bodyPr wrap="square" lIns="0" tIns="0" rIns="0" bIns="0" rtlCol="0" anchor="ctr"/>
-          <a:lstStyle/>
-          <a:p>
-            <a:pPr indent="0" marL="0">
-              <a:buNone/>
-            </a:pPr>
-            <a:r>
-              <a:rPr lang="en-US" sz="1100" b="1" spc="200" kern="0" dirty="0">
-                <a:solidFill>
-                  <a:srgbClr val="64748B"/>
-                </a:solidFill>
-                <a:latin typeface="Calibri" pitchFamily="34" charset="0"/>
-                <a:ea typeface="Calibri" pitchFamily="34" charset="-122"/>
-                <a:cs typeface="Calibri" pitchFamily="34" charset="-120"/>
-              </a:rPr>
-              <a:t>WHY</a:t>
-            </a:r>
-            <a:endParaRPr lang="en-US" sz="1100" dirty="0"/>
-          </a:p>
-        </p:txBody>
-      </p:sp>
-      <p:sp>
-        <p:nvSpPr>
-          <p:cNvPr id="9" name="Text 7"/>
-          <p:cNvSpPr/>
-          <p:nvPr/>
-        </p:nvSpPr>
-        <p:spPr>
-          <a:xfrm>
-            <a:off x="640080" y="2011680"/>
-            <a:ext cx="7863840" cy="502920"/>
-          </a:xfrm>
-          <a:prstGeom prst="rect">
-            <a:avLst/>
-          </a:prstGeom>
-          <a:noFill/>
-          <a:ln/>
-        </p:spPr>
-        <p:txBody>
-          <a:bodyPr wrap="square" lIns="0" tIns="0" rIns="0" bIns="0" rtlCol="0" anchor="ctr"/>
-          <a:lstStyle/>
-          <a:p>
-            <a:pPr indent="0" marL="0">
-              <a:buNone/>
-            </a:pPr>
-            <a:r>
-              <a:rPr lang="en-US" sz="1300" i="1" dirty="0">
-                <a:solidFill>
-                  <a:srgbClr val="64748B"/>
-                </a:solidFill>
-                <a:latin typeface="Calibri" pitchFamily="34" charset="0"/>
-                <a:ea typeface="Calibri" pitchFamily="34" charset="-122"/>
-                <a:cs typeface="Calibri" pitchFamily="34" charset="-120"/>
-              </a:rPr>
-              <a:t>The Chief of Police called Mr. Lambchop the next morning and thanked Stanley for catching the thieves .</a:t>
-            </a:r>
-            <a:endParaRPr lang="en-US" sz="1300" dirty="0"/>
+              <a:t>🌱  help + -ed =helped</a:t>
+            </a:r>
+            <a:endParaRPr lang="en-US" sz="1500" dirty="0"/>
+          </a:p>
+        </p:txBody>
+      </p:sp>
+      <p:sp>
+        <p:nvSpPr>
+          <p:cNvPr id="11" name="Shape 9"/>
+          <p:cNvSpPr/>
+          <p:nvPr/>
+        </p:nvSpPr>
+        <p:spPr>
+          <a:xfrm>
+            <a:off x="365760" y="3182112"/>
+            <a:ext cx="8412480" cy="621792"/>
+          </a:xfrm>
+          <a:prstGeom prst="roundRect">
+            <a:avLst>
+              <a:gd name="adj" fmla="val 14706"/>
+            </a:avLst>
+          </a:prstGeom>
+          <a:solidFill>
+            <a:srgbClr val="F8F4FF"/>
+          </a:solidFill>
+          <a:ln/>
+          <a:effectLst>
+            <a:outerShdw sx="100000" sy="100000" kx="0" ky="0" algn="bl" rotWithShape="0" blurRad="101600" dist="38100" dir="2700000">
+              <a:srgbClr val="000000">
+                <a:alpha val="12000"/>
+              </a:srgbClr>
+            </a:outerShdw>
+          </a:effectLst>
+        </p:spPr>
+      </p:sp>
+      <p:sp>
+        <p:nvSpPr>
+          <p:cNvPr id="12" name="Text 10"/>
+          <p:cNvSpPr/>
+          <p:nvPr/>
+        </p:nvSpPr>
+        <p:spPr>
+          <a:xfrm>
+            <a:off x="594360" y="3300984"/>
+            <a:ext cx="7863840" cy="384048"/>
+          </a:xfrm>
+          <a:prstGeom prst="rect">
+            <a:avLst/>
+          </a:prstGeom>
+          <a:noFill/>
+          <a:ln/>
+        </p:spPr>
+        <p:txBody>
+          <a:bodyPr wrap="square" lIns="0" tIns="0" rIns="0" bIns="0" rtlCol="0" anchor="ctr"/>
+          <a:lstStyle/>
+          <a:p>
+            <a:pPr indent="0" marL="0">
+              <a:buNone/>
+            </a:pPr>
+            <a:r>
+              <a:rPr lang="en-US" sz="1500" dirty="0">
+                <a:solidFill>
+                  <a:srgbClr val="1E293B"/>
+                </a:solidFill>
+                <a:latin typeface="Calibri" pitchFamily="34" charset="0"/>
+                <a:ea typeface="Calibri" pitchFamily="34" charset="-122"/>
+                <a:cs typeface="Calibri" pitchFamily="34" charset="-120"/>
+              </a:rPr>
+              <a:t>🌱  look + -ed =looked</a:t>
+            </a:r>
+            <a:endParaRPr lang="en-US" sz="1500" dirty="0"/>
           </a:p>
         </p:txBody>
       </p:sp>

--- a/Planning docs/Slides/lesson-5-1-teacher-slides.pptx
+++ b/Planning docs/Slides/lesson-5-1-teacher-slides.pptx
@@ -4986,24 +4986,7 @@
                 <a:ea typeface="Calibri" pitchFamily="34" charset="-122"/>
                 <a:cs typeface="Calibri" pitchFamily="34" charset="-120"/>
               </a:rPr>
-              <a:t>•  If you could only tell someone THREE things about Flat Stanley , what would they be?</a:t>
-            </a:r>
-            <a:endParaRPr lang="en-US" sz="1500" dirty="0"/>
-          </a:p>
-          <a:p>
-            <a:pPr indent="0" marL="0">
-              <a:buNone/>
-            </a:pPr>
-            <a:r>
-              <a:rPr lang="en-US" sz="1500" dirty="0">
-                <a:solidFill>
-                  <a:srgbClr val="1E293B"/>
-                </a:solidFill>
-                <a:latin typeface="Calibri" pitchFamily="34" charset="0"/>
-                <a:ea typeface="Calibri" pitchFamily="34" charset="-122"/>
-                <a:cs typeface="Calibri" pitchFamily="34" charset="-120"/>
-              </a:rPr>
-              <a:t>•  If you could only tell someone THREE things about Flat Stanley , what would they be?</a:t>
+              <a:t>•  Stop at the end of the kite chapter. Two things happened: Stanley flew high above the trees, and Stanley wore a red shirt and blue trousers. One belongs in a summary and one does not. Pick the one that belongs, and say why the other can be left out.</a:t>
             </a:r>
             <a:endParaRPr lang="en-US" sz="1500" dirty="0"/>
           </a:p>
